--- a/DevOps/Lesson 04-05 - CICD and Terraform/CI-CD-Terraform-back-to-back-class.pptx
+++ b/DevOps/Lesson 04-05 - CICD and Terraform/CI-CD-Terraform-back-to-back-class.pptx
@@ -5,7 +5,7 @@
     <p:sldMasterId id="2147483648" r:id="rId1"/>
   </p:sldMasterIdLst>
   <p:notesMasterIdLst>
-    <p:notesMasterId r:id="rId30"/>
+    <p:notesMasterId r:id="rId31"/>
   </p:notesMasterIdLst>
   <p:sldIdLst>
     <p:sldId id="256" r:id="rId2"/>
@@ -18,34 +18,35 @@
     <p:sldId id="263" r:id="rId9"/>
     <p:sldId id="264" r:id="rId10"/>
     <p:sldId id="265" r:id="rId11"/>
-    <p:sldId id="266" r:id="rId12"/>
-    <p:sldId id="267" r:id="rId13"/>
-    <p:sldId id="268" r:id="rId14"/>
-    <p:sldId id="269" r:id="rId15"/>
-    <p:sldId id="270" r:id="rId16"/>
-    <p:sldId id="271" r:id="rId17"/>
-    <p:sldId id="272" r:id="rId18"/>
-    <p:sldId id="273" r:id="rId19"/>
-    <p:sldId id="274" r:id="rId20"/>
-    <p:sldId id="275" r:id="rId21"/>
-    <p:sldId id="276" r:id="rId22"/>
-    <p:sldId id="277" r:id="rId23"/>
-    <p:sldId id="278" r:id="rId24"/>
-    <p:sldId id="279" r:id="rId25"/>
-    <p:sldId id="280" r:id="rId26"/>
-    <p:sldId id="281" r:id="rId27"/>
-    <p:sldId id="282" r:id="rId28"/>
-    <p:sldId id="283" r:id="rId29"/>
+    <p:sldId id="285" r:id="rId12"/>
+    <p:sldId id="266" r:id="rId13"/>
+    <p:sldId id="267" r:id="rId14"/>
+    <p:sldId id="268" r:id="rId15"/>
+    <p:sldId id="269" r:id="rId16"/>
+    <p:sldId id="270" r:id="rId17"/>
+    <p:sldId id="271" r:id="rId18"/>
+    <p:sldId id="272" r:id="rId19"/>
+    <p:sldId id="273" r:id="rId20"/>
+    <p:sldId id="274" r:id="rId21"/>
+    <p:sldId id="275" r:id="rId22"/>
+    <p:sldId id="276" r:id="rId23"/>
+    <p:sldId id="277" r:id="rId24"/>
+    <p:sldId id="278" r:id="rId25"/>
+    <p:sldId id="279" r:id="rId26"/>
+    <p:sldId id="280" r:id="rId27"/>
+    <p:sldId id="281" r:id="rId28"/>
+    <p:sldId id="282" r:id="rId29"/>
+    <p:sldId id="283" r:id="rId30"/>
   </p:sldIdLst>
   <p:sldSz cx="9144000" cy="5143500" type="screen16x9"/>
   <p:notesSz cx="6858000" cy="9144000"/>
   <p:embeddedFontLst>
     <p:embeddedFont>
       <p:font typeface="Roboto" panose="02000000000000000000" pitchFamily="2" charset="0"/>
-      <p:regular r:id="rId31"/>
-      <p:bold r:id="rId32"/>
-      <p:italic r:id="rId33"/>
-      <p:boldItalic r:id="rId34"/>
+      <p:regular r:id="rId32"/>
+      <p:bold r:id="rId33"/>
+      <p:italic r:id="rId34"/>
+      <p:boldItalic r:id="rId35"/>
     </p:embeddedFont>
   </p:embeddedFontLst>
   <p:defaultTextStyle>
@@ -143,6 +144,11 @@
       </a:defRPr>
     </a:lvl9pPr>
   </p:defaultTextStyle>
+  <p:extLst>
+    <p:ext uri="{EFAFB233-063F-42B5-8137-9DF3F51BA10A}">
+      <p15:sldGuideLst xmlns:p15="http://schemas.microsoft.com/office/powerpoint/2012/main"/>
+    </p:ext>
+  </p:extLst>
 </p:presentation>
 </file>
 
@@ -485,16 +491,27 @@
           <a:lstStyle/>
           <a:p>
             <a:r>
-              <a:t>Show a minimal ci.yml file live rather than crowding this slide.</a:t>
+              <a:rPr dirty="0"/>
+              <a:t>Show a minimal </a:t>
             </a:r>
-          </a:p>
-          <a:p>
             <a:r>
+              <a:rPr dirty="0" err="1"/>
+              <a:t>ci.yml</a:t>
+            </a:r>
+            <a:r>
+              <a:rPr dirty="0"/>
+              <a:t> file live rather than crowding this slide.</a:t>
+            </a:r>
+          </a:p>
+          <a:p>
+            <a:r>
+              <a:rPr dirty="0"/>
               <a:t>Emphasize that YAML defines the automation; the runner executes it.</a:t>
             </a:r>
           </a:p>
           <a:p>
             <a:r>
+              <a:rPr dirty="0"/>
               <a:t>Use actions/checkout and actions/setup-python as examples if using the GitHub Skills lab.</a:t>
             </a:r>
           </a:p>
@@ -532,7 +549,13 @@
   <p:cSld>
     <p:spTree>
       <p:nvGrpSpPr>
-        <p:cNvPr id="1" name=""/>
+        <p:cNvPr id="1" name="">
+          <a:extLst>
+            <a:ext uri="{FF2B5EF4-FFF2-40B4-BE49-F238E27FC236}">
+              <a16:creationId xmlns:a16="http://schemas.microsoft.com/office/drawing/2014/main" id="{6A07969D-48A1-0F6A-170C-717B3340A84C}"/>
+            </a:ext>
+          </a:extLst>
+        </p:cNvPr>
         <p:cNvGrpSpPr/>
         <p:nvPr/>
       </p:nvGrpSpPr>
@@ -546,7 +569,13 @@
       </p:grpSpPr>
       <p:sp>
         <p:nvSpPr>
-          <p:cNvPr id="2" name="Slide Image Placeholder 1"/>
+          <p:cNvPr id="2" name="Slide Image Placeholder 1">
+            <a:extLst>
+              <a:ext uri="{FF2B5EF4-FFF2-40B4-BE49-F238E27FC236}">
+                <a16:creationId xmlns:a16="http://schemas.microsoft.com/office/drawing/2014/main" id="{A6687A98-ABD2-048D-E9F6-CEE386CA7EBB}"/>
+              </a:ext>
+            </a:extLst>
+          </p:cNvPr>
           <p:cNvSpPr>
             <a:spLocks noGrp="1" noRot="1" noChangeAspect="1"/>
           </p:cNvSpPr>
@@ -558,7 +587,13 @@
       </p:sp>
       <p:sp>
         <p:nvSpPr>
-          <p:cNvPr id="3" name="Notes Placeholder 2"/>
+          <p:cNvPr id="3" name="Notes Placeholder 2">
+            <a:extLst>
+              <a:ext uri="{FF2B5EF4-FFF2-40B4-BE49-F238E27FC236}">
+                <a16:creationId xmlns:a16="http://schemas.microsoft.com/office/drawing/2014/main" id="{CF8A023C-C579-B6C7-3535-7AC85651E389}"/>
+              </a:ext>
+            </a:extLst>
+          </p:cNvPr>
           <p:cNvSpPr>
             <a:spLocks noGrp="1"/>
           </p:cNvSpPr>
@@ -572,19 +607,41 @@
           <a:lstStyle/>
           <a:p>
             <a:r>
-              <a:t>Use the official GitHub Skills lab if students do not already have a sample repository.</a:t>
+              <a:rPr dirty="0"/>
+              <a:t>Show a minimal </a:t>
             </a:r>
-          </a:p>
-          <a:p>
             <a:r>
-              <a:t>Have them intentionally break the test before fixing it.</a:t>
+              <a:rPr dirty="0" err="1"/>
+              <a:t>ci.yml</a:t>
+            </a:r>
+            <a:r>
+              <a:rPr dirty="0"/>
+              <a:t> file live rather than crowding this slide.</a:t>
+            </a:r>
+          </a:p>
+          <a:p>
+            <a:r>
+              <a:rPr dirty="0"/>
+              <a:t>Emphasize that YAML defines the automation; the runner executes it.</a:t>
+            </a:r>
+          </a:p>
+          <a:p>
+            <a:r>
+              <a:rPr dirty="0"/>
+              <a:t>Use actions/checkout and actions/setup-python as examples if using the GitHub Skills lab.</a:t>
             </a:r>
           </a:p>
         </p:txBody>
       </p:sp>
       <p:sp>
         <p:nvSpPr>
-          <p:cNvPr id="4" name="Slide Number Placeholder 3"/>
+          <p:cNvPr id="4" name="Slide Number Placeholder 3">
+            <a:extLst>
+              <a:ext uri="{FF2B5EF4-FFF2-40B4-BE49-F238E27FC236}">
+                <a16:creationId xmlns:a16="http://schemas.microsoft.com/office/drawing/2014/main" id="{A41B1B08-5E07-1CE3-D02C-BFE573025575}"/>
+              </a:ext>
+            </a:extLst>
+          </p:cNvPr>
           <p:cNvSpPr>
             <a:spLocks noGrp="1"/>
           </p:cNvSpPr>
@@ -602,6 +659,11 @@
         </p:txBody>
       </p:sp>
     </p:spTree>
+    <p:extLst>
+      <p:ext uri="{BB962C8B-B14F-4D97-AF65-F5344CB8AC3E}">
+        <p14:creationId xmlns:p14="http://schemas.microsoft.com/office/powerpoint/2010/main" val="642718381"/>
+      </p:ext>
+    </p:extLst>
   </p:cSld>
   <p:clrMapOvr>
     <a:masterClrMapping/>
@@ -654,12 +716,12 @@
           <a:lstStyle/>
           <a:p>
             <a:r>
-              <a:t>Connect this to the lab: the workflow run becomes part of the merge decision.</a:t>
+              <a:t>Use the official GitHub Skills lab if students do not already have a sample repository.</a:t>
             </a:r>
           </a:p>
           <a:p>
             <a:r>
-              <a:t>If students have limited repository permissions, demo this part instead of requiring every student to configure it.</a:t>
+              <a:t>Have them intentionally break the test before fixing it.</a:t>
             </a:r>
           </a:p>
         </p:txBody>
@@ -736,12 +798,12 @@
           <a:lstStyle/>
           <a:p>
             <a:r>
-              <a:t>Students often read only the last red line.</a:t>
+              <a:t>Connect this to the lab: the workflow run becomes part of the merge decision.</a:t>
             </a:r>
           </a:p>
           <a:p>
             <a:r>
-              <a:t>Model a calm log-reading workflow during the lab.</a:t>
+              <a:t>If students have limited repository permissions, demo this part instead of requiring every student to configure it.</a:t>
             </a:r>
           </a:p>
         </p:txBody>
@@ -818,12 +880,12 @@
           <a:lstStyle/>
           <a:p>
             <a:r>
-              <a:t>This is the bridge slide between the two back-to-back classes.</a:t>
+              <a:t>Students often read only the last red line.</a:t>
             </a:r>
           </a:p>
           <a:p>
             <a:r>
-              <a:t>Students should recognize the same change discipline before learning Terraform syntax.</a:t>
+              <a:t>Model a calm log-reading workflow during the lab.</a:t>
             </a:r>
           </a:p>
         </p:txBody>
@@ -900,12 +962,12 @@
           <a:lstStyle/>
           <a:p>
             <a:r>
-              <a:t>Use this slide as the closing resource list for students.</a:t>
+              <a:t>This is the bridge slide between the two back-to-back classes.</a:t>
             </a:r>
           </a:p>
           <a:p>
             <a:r>
-              <a:t>The Terraform lab path intentionally avoids provider credentials and cloud cost.</a:t>
+              <a:t>Students should recognize the same change discipline before learning Terraform syntax.</a:t>
             </a:r>
           </a:p>
         </p:txBody>
@@ -982,12 +1044,12 @@
           <a:lstStyle/>
           <a:p>
             <a:r>
-              <a:t>End with the common discipline, not the specific tools.</a:t>
+              <a:t>Use this slide as the closing resource list for students.</a:t>
             </a:r>
           </a:p>
           <a:p>
             <a:r>
-              <a:t>Ask students to name one manual step in their current workflow that can become a checked, reviewable automation.</a:t>
+              <a:t>The Terraform lab path intentionally avoids provider credentials and cloud cost.</a:t>
             </a:r>
           </a:p>
         </p:txBody>
@@ -1064,12 +1126,12 @@
           <a:lstStyle/>
           <a:p>
             <a:r>
-              <a:t>If time is limited, run this as an instructor demo.</a:t>
+              <a:t>End with the common discipline, not the specific tools.</a:t>
             </a:r>
           </a:p>
           <a:p>
             <a:r>
-              <a:t>The goal is to make the two classes feel like one workflow, not two unrelated tools.</a:t>
+              <a:t>Ask students to name one manual step in their current workflow that can become a checked, reviewable automation.</a:t>
             </a:r>
           </a:p>
         </p:txBody>
@@ -1146,12 +1208,12 @@
           <a:lstStyle/>
           <a:p>
             <a:r>
-              <a:t>This closes the back-to-back loop.</a:t>
+              <a:t>If time is limited, run this as an instructor demo.</a:t>
             </a:r>
           </a:p>
           <a:p>
             <a:r>
-              <a:t>The same repository workflow can test application code and check Terraform configuration.</a:t>
+              <a:t>The goal is to make the two classes feel like one workflow, not two unrelated tools.</a:t>
             </a:r>
           </a:p>
         </p:txBody>
@@ -1228,12 +1290,12 @@
           <a:lstStyle/>
           <a:p>
             <a:r>
-              <a:t>In this local lab, state is low risk.</a:t>
+              <a:t>This closes the back-to-back loop.</a:t>
             </a:r>
           </a:p>
           <a:p>
             <a:r>
-              <a:t>In real work, state can contain sensitive data and needs an appropriate backend, access control, and locking.</a:t>
+              <a:t>The same repository workflow can test application code and check Terraform configuration.</a:t>
             </a:r>
           </a:p>
         </p:txBody>
@@ -1397,12 +1459,12 @@
           <a:lstStyle/>
           <a:p>
             <a:r>
-              <a:t>Teach modules as an interface, not just as folders.</a:t>
+              <a:t>In this local lab, state is low risk.</a:t>
             </a:r>
           </a:p>
           <a:p>
             <a:r>
-              <a:t>Inputs and outputs are the contract between caller and module.</a:t>
+              <a:t>In real work, state can contain sensitive data and needs an appropriate backend, access control, and locking.</a:t>
             </a:r>
           </a:p>
         </p:txBody>
@@ -1479,12 +1541,12 @@
           <a:lstStyle/>
           <a:p>
             <a:r>
-              <a:t>This is the strongest link to CI/CD.</a:t>
+              <a:t>Teach modules as an interface, not just as folders.</a:t>
             </a:r>
           </a:p>
           <a:p>
             <a:r>
-              <a:t>A Terraform plan is the infrastructure equivalent of a reviewable test result and diff.</a:t>
+              <a:t>Inputs and outputs are the contract between caller and module.</a:t>
             </a:r>
           </a:p>
         </p:txBody>
@@ -1561,12 +1623,12 @@
           <a:lstStyle/>
           <a:p>
             <a:r>
-              <a:t>Have students predict the plan before apply.</a:t>
+              <a:t>This is the strongest link to CI/CD.</a:t>
             </a:r>
           </a:p>
           <a:p>
             <a:r>
-              <a:t>Use terraform_data because it stores values in state without needing a cloud provider.</a:t>
+              <a:t>A Terraform plan is the infrastructure equivalent of a reviewable test result and diff.</a:t>
             </a:r>
           </a:p>
         </p:txBody>
@@ -1643,12 +1705,12 @@
           <a:lstStyle/>
           <a:p>
             <a:r>
-              <a:t>Keep this lightweight before the lab.</a:t>
+              <a:t>Have students predict the plan before apply.</a:t>
             </a:r>
           </a:p>
           <a:p>
             <a:r>
-              <a:t>Variables, locals, and outputs are enough to make the first lab feel real without cloud access.</a:t>
+              <a:t>Use terraform_data because it stores values in state without needing a cloud provider.</a:t>
             </a:r>
           </a:p>
         </p:txBody>
@@ -1725,12 +1787,12 @@
           <a:lstStyle/>
           <a:p>
             <a:r>
-              <a:t>Use the same command rhythm in every lab.</a:t>
+              <a:t>Keep this lightweight before the lab.</a:t>
             </a:r>
           </a:p>
           <a:p>
             <a:r>
-              <a:t>The goal is muscle memory around plan before apply.</a:t>
+              <a:t>Variables, locals, and outputs are enough to make the first lab feel real without cloud access.</a:t>
             </a:r>
           </a:p>
         </p:txBody>
@@ -1807,12 +1869,12 @@
           <a:lstStyle/>
           <a:p>
             <a:r>
-              <a:t>Emphasize state early.</a:t>
+              <a:t>Use the same command rhythm in every lab.</a:t>
             </a:r>
           </a:p>
           <a:p>
             <a:r>
-              <a:t>Students often treat state as an implementation detail, but it is central to how Terraform tracks managed objects.</a:t>
+              <a:t>The goal is muscle memory around plan before apply.</a:t>
             </a:r>
           </a:p>
         </p:txBody>
@@ -1889,12 +1951,12 @@
           <a:lstStyle/>
           <a:p>
             <a:r>
-              <a:t>Connect this directly to pull requests: both workflows ask for evidence before accepting change.</a:t>
+              <a:t>Emphasize state early.</a:t>
             </a:r>
           </a:p>
           <a:p>
             <a:r>
-              <a:t>The business value is not only automation; it is traceability and repeatability.</a:t>
+              <a:t>Students often treat state as an implementation detail, but it is central to how Terraform tracks managed objects.</a:t>
             </a:r>
           </a:p>
         </p:txBody>
@@ -1971,12 +2033,12 @@
           <a:lstStyle/>
           <a:p>
             <a:r>
-              <a:t>Terraform 1.4 or later supports terraform_data.</a:t>
+              <a:t>Connect this directly to pull requests: both workflows ask for evidence before accepting change.</a:t>
             </a:r>
           </a:p>
           <a:p>
             <a:r>
-              <a:t>If you want terraform test provider mocking later, use a newer Terraform version, but this deck does not depend on mocking.</a:t>
+              <a:t>The business value is not only automation; it is traceability and repeatability.</a:t>
             </a:r>
           </a:p>
         </p:txBody>
@@ -2009,6 +2071,88 @@
 </file>
 
 <file path=ppt/notesSlides/notesSlide28.xml><?xml version="1.0" encoding="utf-8"?>
+<p:notes xmlns:a="http://schemas.openxmlformats.org/drawingml/2006/main" xmlns:r="http://schemas.openxmlformats.org/officeDocument/2006/relationships" xmlns:p="http://schemas.openxmlformats.org/presentationml/2006/main">
+  <p:cSld>
+    <p:spTree>
+      <p:nvGrpSpPr>
+        <p:cNvPr id="1" name=""/>
+        <p:cNvGrpSpPr/>
+        <p:nvPr/>
+      </p:nvGrpSpPr>
+      <p:grpSpPr>
+        <a:xfrm>
+          <a:off x="0" y="0"/>
+          <a:ext cx="0" cy="0"/>
+          <a:chOff x="0" y="0"/>
+          <a:chExt cx="0" cy="0"/>
+        </a:xfrm>
+      </p:grpSpPr>
+      <p:sp>
+        <p:nvSpPr>
+          <p:cNvPr id="2" name="Slide Image Placeholder 1"/>
+          <p:cNvSpPr>
+            <a:spLocks noGrp="1" noRot="1" noChangeAspect="1"/>
+          </p:cNvSpPr>
+          <p:nvPr>
+            <p:ph type="sldImg"/>
+          </p:nvPr>
+        </p:nvSpPr>
+        <p:spPr/>
+      </p:sp>
+      <p:sp>
+        <p:nvSpPr>
+          <p:cNvPr id="3" name="Notes Placeholder 2"/>
+          <p:cNvSpPr>
+            <a:spLocks noGrp="1"/>
+          </p:cNvSpPr>
+          <p:nvPr>
+            <p:ph type="body" idx="1"/>
+          </p:nvPr>
+        </p:nvSpPr>
+        <p:spPr/>
+        <p:txBody>
+          <a:bodyPr/>
+          <a:lstStyle/>
+          <a:p>
+            <a:r>
+              <a:t>Terraform 1.4 or later supports terraform_data.</a:t>
+            </a:r>
+          </a:p>
+          <a:p>
+            <a:r>
+              <a:t>If you want terraform test provider mocking later, use a newer Terraform version, but this deck does not depend on mocking.</a:t>
+            </a:r>
+          </a:p>
+        </p:txBody>
+      </p:sp>
+      <p:sp>
+        <p:nvSpPr>
+          <p:cNvPr id="4" name="Slide Number Placeholder 3"/>
+          <p:cNvSpPr>
+            <a:spLocks noGrp="1"/>
+          </p:cNvSpPr>
+          <p:nvPr>
+            <p:ph type="sldNum" idx="5"/>
+          </p:nvPr>
+        </p:nvSpPr>
+        <p:spPr/>
+        <p:txBody>
+          <a:bodyPr/>
+          <a:lstStyle/>
+          <a:p>
+            <a:endParaRPr/>
+          </a:p>
+        </p:txBody>
+      </p:sp>
+    </p:spTree>
+  </p:cSld>
+  <p:clrMapOvr>
+    <a:masterClrMapping/>
+  </p:clrMapOvr>
+</p:notes>
+</file>
+
+<file path=ppt/notesSlides/notesSlide29.xml><?xml version="1.0" encoding="utf-8"?>
 <p:notes xmlns:a="http://schemas.openxmlformats.org/drawingml/2006/main" xmlns:r="http://schemas.openxmlformats.org/officeDocument/2006/relationships" xmlns:p="http://schemas.openxmlformats.org/presentationml/2006/main">
   <p:cSld>
     <p:spTree>
@@ -39369,7 +39513,13 @@
   <p:cSld>
     <p:spTree>
       <p:nvGrpSpPr>
-        <p:cNvPr id="1" name=""/>
+        <p:cNvPr id="1" name="">
+          <a:extLst>
+            <a:ext uri="{FF2B5EF4-FFF2-40B4-BE49-F238E27FC236}">
+              <a16:creationId xmlns:a16="http://schemas.microsoft.com/office/drawing/2014/main" id="{BF3EF678-9EC6-8718-79D7-6D6A6E31850B}"/>
+            </a:ext>
+          </a:extLst>
+        </p:cNvPr>
         <p:cNvGrpSpPr/>
         <p:nvPr/>
       </p:nvGrpSpPr>
@@ -39386,7 +39536,7 @@
           <p:cNvPr id="2" name="Title 1">
             <a:extLst>
               <a:ext uri="{FF2B5EF4-FFF2-40B4-BE49-F238E27FC236}">
-                <a16:creationId xmlns:a16="http://schemas.microsoft.com/office/drawing/2014/main" id="{CE3EBA7D-B4B3-3797-8578-839899CDAF0F}"/>
+                <a16:creationId xmlns:a16="http://schemas.microsoft.com/office/drawing/2014/main" id="{405404B9-D175-77CF-8D63-BBE0DDF7ECFC}"/>
               </a:ext>
             </a:extLst>
           </p:cNvPr>
@@ -39421,7 +39571,7 @@
               </a:defRPr>
             </a:pPr>
             <a:r>
-              <a:rPr sz="2250" b="1" u="none">
+              <a:rPr lang="en-US" sz="2250" b="1" u="none" dirty="0">
                 <a:solidFill>
                   <a:srgbClr val="221F20"/>
                 </a:solidFill>
@@ -39429,8 +39579,16 @@
                 <a:ea typeface="Arial"/>
                 <a:cs typeface="Arial"/>
               </a:rPr>
-              <a:t>Lab: build a pull-request test pipeline</a:t>
+              <a:t>In Class Demo</a:t>
             </a:r>
+            <a:endParaRPr sz="2250" b="1" u="none" dirty="0">
+              <a:solidFill>
+                <a:srgbClr val="221F20"/>
+              </a:solidFill>
+              <a:latin typeface="Arial"/>
+              <a:ea typeface="Arial"/>
+              <a:cs typeface="Arial"/>
+            </a:endParaRPr>
           </a:p>
         </p:txBody>
       </p:sp>
@@ -39439,7 +39597,7 @@
           <p:cNvPr id="3" name="Content Placeholder 2">
             <a:extLst>
               <a:ext uri="{FF2B5EF4-FFF2-40B4-BE49-F238E27FC236}">
-                <a16:creationId xmlns:a16="http://schemas.microsoft.com/office/drawing/2014/main" id="{D93EE42B-DB9D-4A87-960F-9EAB79C801BC}"/>
+                <a16:creationId xmlns:a16="http://schemas.microsoft.com/office/drawing/2014/main" id="{AE5477F3-9DDC-782A-F571-54EBA87D5B1D}"/>
               </a:ext>
             </a:extLst>
           </p:cNvPr>
@@ -39480,28 +39638,22 @@
               </a:defRPr>
             </a:pPr>
             <a:r>
-              <a:rPr sz="1350" b="0" u="none">
+              <a:rPr lang="en-US" sz="1350" dirty="0">
                 <a:solidFill>
                   <a:srgbClr val="221F20"/>
                 </a:solidFill>
-                <a:latin typeface="Arial"/>
-                <a:ea typeface="Arial"/>
-                <a:cs typeface="Arial"/>
               </a:rPr>
-              <a:t>Starter: https://github.com/skills/test-with-actions</a:t>
+              <a:t>Short demo of creating and running a pipeline on a small </a:t>
             </a:r>
-          </a:p>
-          <a:p>
-            <a:pPr marL="0" indent="0">
-              <a:spcBef>
-                <a:spcPts val="0"/>
-              </a:spcBef>
-              <a:spcAft>
-                <a:spcPts val="650"/>
-              </a:spcAft>
-              <a:buNone/>
-            </a:pPr>
-            <a:endParaRPr sz="1350" b="0" u="none">
+            <a:r>
+              <a:rPr lang="en-US" sz="1350">
+                <a:solidFill>
+                  <a:srgbClr val="221F20"/>
+                </a:solidFill>
+              </a:rPr>
+              <a:t>python application</a:t>
+            </a:r>
+            <a:endParaRPr sz="1350" b="0" u="none" dirty="0">
               <a:solidFill>
                 <a:srgbClr val="221F20"/>
               </a:solidFill>
@@ -39510,192 +39662,12 @@
               <a:cs typeface="Arial"/>
             </a:endParaRPr>
           </a:p>
-          <a:p>
-            <a:pPr marL="0" indent="0" algn="l">
-              <a:spcBef>
-                <a:spcPts val="0"/>
-              </a:spcBef>
-              <a:spcAft>
-                <a:spcPts val="650"/>
-              </a:spcAft>
-              <a:buNone/>
-              <a:defRPr sz="1350" b="0" u="none">
-                <a:solidFill>
-                  <a:srgbClr val="221F20"/>
-                </a:solidFill>
-                <a:latin typeface="Arial"/>
-                <a:ea typeface="Arial"/>
-                <a:cs typeface="Arial"/>
-              </a:defRPr>
-            </a:pPr>
-            <a:r>
-              <a:rPr sz="1350" b="0" u="none">
-                <a:solidFill>
-                  <a:srgbClr val="221F20"/>
-                </a:solidFill>
-                <a:latin typeface="Arial"/>
-                <a:ea typeface="Arial"/>
-                <a:cs typeface="Arial"/>
-              </a:rPr>
-              <a:t>Students will:</a:t>
-            </a:r>
-          </a:p>
-          <a:p>
-            <a:pPr marL="0" indent="0" algn="l">
-              <a:spcBef>
-                <a:spcPts val="0"/>
-              </a:spcBef>
-              <a:spcAft>
-                <a:spcPts val="650"/>
-              </a:spcAft>
-              <a:buNone/>
-              <a:defRPr sz="1350" b="0" u="none">
-                <a:solidFill>
-                  <a:srgbClr val="221F20"/>
-                </a:solidFill>
-                <a:latin typeface="Arial"/>
-                <a:ea typeface="Arial"/>
-                <a:cs typeface="Arial"/>
-              </a:defRPr>
-            </a:pPr>
-            <a:r>
-              <a:rPr sz="1350" b="0" u="none">
-                <a:solidFill>
-                  <a:srgbClr val="221F20"/>
-                </a:solidFill>
-                <a:latin typeface="Arial"/>
-                <a:ea typeface="Arial"/>
-                <a:cs typeface="Arial"/>
-              </a:rPr>
-              <a:t>1. Create or fork the lab repository</a:t>
-            </a:r>
-          </a:p>
-          <a:p>
-            <a:pPr marL="0" indent="0" algn="l">
-              <a:spcBef>
-                <a:spcPts val="0"/>
-              </a:spcBef>
-              <a:spcAft>
-                <a:spcPts val="650"/>
-              </a:spcAft>
-              <a:buNone/>
-              <a:defRPr sz="1350" b="0" u="none">
-                <a:solidFill>
-                  <a:srgbClr val="221F20"/>
-                </a:solidFill>
-                <a:latin typeface="Arial"/>
-                <a:ea typeface="Arial"/>
-                <a:cs typeface="Arial"/>
-              </a:defRPr>
-            </a:pPr>
-            <a:r>
-              <a:rPr sz="1350" b="0" u="none">
-                <a:solidFill>
-                  <a:srgbClr val="221F20"/>
-                </a:solidFill>
-                <a:latin typeface="Arial"/>
-                <a:ea typeface="Arial"/>
-                <a:cs typeface="Arial"/>
-              </a:rPr>
-              <a:t>2. Add .github/workflows/ci.yml</a:t>
-            </a:r>
-          </a:p>
-          <a:p>
-            <a:pPr marL="0" indent="0" algn="l">
-              <a:spcBef>
-                <a:spcPts val="0"/>
-              </a:spcBef>
-              <a:spcAft>
-                <a:spcPts val="650"/>
-              </a:spcAft>
-              <a:buNone/>
-              <a:defRPr sz="1350" b="0" u="none">
-                <a:solidFill>
-                  <a:srgbClr val="221F20"/>
-                </a:solidFill>
-                <a:latin typeface="Arial"/>
-                <a:ea typeface="Arial"/>
-                <a:cs typeface="Arial"/>
-              </a:defRPr>
-            </a:pPr>
-            <a:r>
-              <a:rPr sz="1350" b="0" u="none">
-                <a:solidFill>
-                  <a:srgbClr val="221F20"/>
-                </a:solidFill>
-                <a:latin typeface="Arial"/>
-                <a:ea typeface="Arial"/>
-                <a:cs typeface="Arial"/>
-              </a:rPr>
-              <a:t>3. Trigger a workflow from a pull request</a:t>
-            </a:r>
-          </a:p>
-          <a:p>
-            <a:pPr marL="0" indent="0" algn="l">
-              <a:spcBef>
-                <a:spcPts val="0"/>
-              </a:spcBef>
-              <a:spcAft>
-                <a:spcPts val="650"/>
-              </a:spcAft>
-              <a:buNone/>
-              <a:defRPr sz="1350" b="0" u="none">
-                <a:solidFill>
-                  <a:srgbClr val="221F20"/>
-                </a:solidFill>
-                <a:latin typeface="Arial"/>
-                <a:ea typeface="Arial"/>
-                <a:cs typeface="Arial"/>
-              </a:defRPr>
-            </a:pPr>
-            <a:r>
-              <a:rPr sz="1350" b="0" u="none">
-                <a:solidFill>
-                  <a:srgbClr val="221F20"/>
-                </a:solidFill>
-                <a:latin typeface="Arial"/>
-                <a:ea typeface="Arial"/>
-                <a:cs typeface="Arial"/>
-              </a:rPr>
-              <a:t>4. Read the workflow log</a:t>
-            </a:r>
-          </a:p>
-          <a:p>
-            <a:pPr marL="0" indent="0" algn="l">
-              <a:spcBef>
-                <a:spcPts val="0"/>
-              </a:spcBef>
-              <a:spcAft>
-                <a:spcPts val="650"/>
-              </a:spcAft>
-              <a:buNone/>
-              <a:defRPr sz="1350" b="0" u="none">
-                <a:solidFill>
-                  <a:srgbClr val="221F20"/>
-                </a:solidFill>
-                <a:latin typeface="Arial"/>
-                <a:ea typeface="Arial"/>
-                <a:cs typeface="Arial"/>
-              </a:defRPr>
-            </a:pPr>
-            <a:r>
-              <a:rPr sz="1350" b="0" u="none">
-                <a:solidFill>
-                  <a:srgbClr val="221F20"/>
-                </a:solidFill>
-                <a:latin typeface="Arial"/>
-                <a:ea typeface="Arial"/>
-                <a:cs typeface="Arial"/>
-              </a:rPr>
-              <a:t>5. Fix a failing test and confirm the green check</a:t>
-            </a:r>
-          </a:p>
         </p:txBody>
       </p:sp>
     </p:spTree>
     <p:extLst>
       <p:ext uri="{BB962C8B-B14F-4D97-AF65-F5344CB8AC3E}">
-        <p14:creationId xmlns:p14="http://schemas.microsoft.com/office/powerpoint/2010/main" val="3459908186"/>
+        <p14:creationId xmlns:p14="http://schemas.microsoft.com/office/powerpoint/2010/main" val="3593148535"/>
       </p:ext>
     </p:extLst>
   </p:cSld>
@@ -39770,7 +39742,7 @@
                 <a:ea typeface="Arial"/>
                 <a:cs typeface="Arial"/>
               </a:rPr>
-              <a:t>Branch protection turns CI into a merge gate</a:t>
+              <a:t>Lab: build a pull-request test pipeline</a:t>
             </a:r>
           </a:p>
         </p:txBody>
@@ -39811,7 +39783,7 @@
                 <a:spcPts val="650"/>
               </a:spcAft>
               <a:buNone/>
-              <a:defRPr sz="1425" b="0" u="none">
+              <a:defRPr sz="1350" b="0" u="none">
                 <a:solidFill>
                   <a:srgbClr val="221F20"/>
                 </a:solidFill>
@@ -39821,7 +39793,7 @@
               </a:defRPr>
             </a:pPr>
             <a:r>
-              <a:rPr sz="1425" b="0" u="none">
+              <a:rPr sz="1350" b="0" u="none" dirty="0">
                 <a:solidFill>
                   <a:srgbClr val="221F20"/>
                 </a:solidFill>
@@ -39829,10 +39801,29 @@
                 <a:ea typeface="Arial"/>
                 <a:cs typeface="Arial"/>
               </a:rPr>
-              <a:t>Protect the main branch from direct, unreviewed changes.</a:t>
+              <a:t>Starter: https://github.com/skills/test-with-actions</a:t>
             </a:r>
           </a:p>
           <a:p>
+            <a:pPr marL="0" indent="0">
+              <a:spcBef>
+                <a:spcPts val="0"/>
+              </a:spcBef>
+              <a:spcAft>
+                <a:spcPts val="650"/>
+              </a:spcAft>
+              <a:buNone/>
+            </a:pPr>
+            <a:endParaRPr sz="1350" b="0" u="none" dirty="0">
+              <a:solidFill>
+                <a:srgbClr val="221F20"/>
+              </a:solidFill>
+              <a:latin typeface="Arial"/>
+              <a:ea typeface="Arial"/>
+              <a:cs typeface="Arial"/>
+            </a:endParaRPr>
+          </a:p>
+          <a:p>
             <a:pPr marL="0" indent="0" algn="l">
               <a:spcBef>
                 <a:spcPts val="0"/>
@@ -39841,7 +39832,7 @@
                 <a:spcPts val="650"/>
               </a:spcAft>
               <a:buNone/>
-              <a:defRPr sz="1425" b="0" u="none">
+              <a:defRPr sz="1350" b="0" u="none">
                 <a:solidFill>
                   <a:srgbClr val="221F20"/>
                 </a:solidFill>
@@ -39851,7 +39842,7 @@
               </a:defRPr>
             </a:pPr>
             <a:r>
-              <a:rPr sz="1425" b="0" u="none">
+              <a:rPr sz="1350" b="0" u="none" dirty="0">
                 <a:solidFill>
                   <a:srgbClr val="221F20"/>
                 </a:solidFill>
@@ -39859,7 +39850,7 @@
                 <a:ea typeface="Arial"/>
                 <a:cs typeface="Arial"/>
               </a:rPr>
-              <a:t>Require pull request review before merge.</a:t>
+              <a:t>Students will:</a:t>
             </a:r>
           </a:p>
           <a:p>
@@ -39871,7 +39862,7 @@
                 <a:spcPts val="650"/>
               </a:spcAft>
               <a:buNone/>
-              <a:defRPr sz="1425" b="0" u="none">
+              <a:defRPr sz="1350" b="0" u="none">
                 <a:solidFill>
                   <a:srgbClr val="221F20"/>
                 </a:solidFill>
@@ -39881,7 +39872,7 @@
               </a:defRPr>
             </a:pPr>
             <a:r>
-              <a:rPr sz="1425" b="0" u="none">
+              <a:rPr sz="1350" b="0" u="none" dirty="0">
                 <a:solidFill>
                   <a:srgbClr val="221F20"/>
                 </a:solidFill>
@@ -39889,7 +39880,7 @@
                 <a:ea typeface="Arial"/>
                 <a:cs typeface="Arial"/>
               </a:rPr>
-              <a:t>Require the CI status check to pass.</a:t>
+              <a:t>1. Create or fork the lab repository</a:t>
             </a:r>
           </a:p>
           <a:p>
@@ -39901,7 +39892,7 @@
                 <a:spcPts val="650"/>
               </a:spcAft>
               <a:buNone/>
-              <a:defRPr sz="1425" b="0" u="none">
+              <a:defRPr sz="1350" b="0" u="none">
                 <a:solidFill>
                   <a:srgbClr val="221F20"/>
                 </a:solidFill>
@@ -39911,7 +39902,7 @@
               </a:defRPr>
             </a:pPr>
             <a:r>
-              <a:rPr sz="1425" b="0" u="none">
+              <a:rPr sz="1350" b="0" u="none" dirty="0">
                 <a:solidFill>
                   <a:srgbClr val="221F20"/>
                 </a:solidFill>
@@ -39919,8 +39910,49 @@
                 <a:ea typeface="Arial"/>
                 <a:cs typeface="Arial"/>
               </a:rPr>
-              <a:t>Use clear job names so required checks are easy to select.</a:t>
+              <a:t>2. Add .</a:t>
             </a:r>
+            <a:r>
+              <a:rPr sz="1350" b="0" u="none" dirty="0" err="1">
+                <a:solidFill>
+                  <a:srgbClr val="221F20"/>
+                </a:solidFill>
+                <a:latin typeface="Arial"/>
+                <a:ea typeface="Arial"/>
+                <a:cs typeface="Arial"/>
+              </a:rPr>
+              <a:t>github</a:t>
+            </a:r>
+            <a:r>
+              <a:rPr sz="1350" b="0" u="none" dirty="0">
+                <a:solidFill>
+                  <a:srgbClr val="221F20"/>
+                </a:solidFill>
+                <a:latin typeface="Arial"/>
+                <a:ea typeface="Arial"/>
+                <a:cs typeface="Arial"/>
+              </a:rPr>
+              <a:t>/workflows/</a:t>
+            </a:r>
+            <a:r>
+              <a:rPr sz="1350" b="0" u="none" dirty="0" err="1">
+                <a:solidFill>
+                  <a:srgbClr val="221F20"/>
+                </a:solidFill>
+                <a:latin typeface="Arial"/>
+                <a:ea typeface="Arial"/>
+                <a:cs typeface="Arial"/>
+              </a:rPr>
+              <a:t>ci.yml</a:t>
+            </a:r>
+            <a:endParaRPr sz="1350" b="0" u="none" dirty="0">
+              <a:solidFill>
+                <a:srgbClr val="221F20"/>
+              </a:solidFill>
+              <a:latin typeface="Arial"/>
+              <a:ea typeface="Arial"/>
+              <a:cs typeface="Arial"/>
+            </a:endParaRPr>
           </a:p>
           <a:p>
             <a:pPr marL="0" indent="0" algn="l">
@@ -39931,7 +39963,7 @@
                 <a:spcPts val="650"/>
               </a:spcAft>
               <a:buNone/>
-              <a:defRPr sz="1425" b="0" u="none">
+              <a:defRPr sz="1350" b="0" u="none">
                 <a:solidFill>
                   <a:srgbClr val="221F20"/>
                 </a:solidFill>
@@ -39941,7 +39973,7 @@
               </a:defRPr>
             </a:pPr>
             <a:r>
-              <a:rPr sz="1425" b="0" u="none">
+              <a:rPr sz="1350" b="0" u="none" dirty="0">
                 <a:solidFill>
                   <a:srgbClr val="221F20"/>
                 </a:solidFill>
@@ -39949,7 +39981,67 @@
                 <a:ea typeface="Arial"/>
                 <a:cs typeface="Arial"/>
               </a:rPr>
-              <a:t>Keep deployment approval separate from test automation when risk is high.</a:t>
+              <a:t>3. Trigger a workflow from a pull request</a:t>
+            </a:r>
+          </a:p>
+          <a:p>
+            <a:pPr marL="0" indent="0" algn="l">
+              <a:spcBef>
+                <a:spcPts val="0"/>
+              </a:spcBef>
+              <a:spcAft>
+                <a:spcPts val="650"/>
+              </a:spcAft>
+              <a:buNone/>
+              <a:defRPr sz="1350" b="0" u="none">
+                <a:solidFill>
+                  <a:srgbClr val="221F20"/>
+                </a:solidFill>
+                <a:latin typeface="Arial"/>
+                <a:ea typeface="Arial"/>
+                <a:cs typeface="Arial"/>
+              </a:defRPr>
+            </a:pPr>
+            <a:r>
+              <a:rPr sz="1350" b="0" u="none" dirty="0">
+                <a:solidFill>
+                  <a:srgbClr val="221F20"/>
+                </a:solidFill>
+                <a:latin typeface="Arial"/>
+                <a:ea typeface="Arial"/>
+                <a:cs typeface="Arial"/>
+              </a:rPr>
+              <a:t>4. Read the workflow log</a:t>
+            </a:r>
+          </a:p>
+          <a:p>
+            <a:pPr marL="0" indent="0" algn="l">
+              <a:spcBef>
+                <a:spcPts val="0"/>
+              </a:spcBef>
+              <a:spcAft>
+                <a:spcPts val="650"/>
+              </a:spcAft>
+              <a:buNone/>
+              <a:defRPr sz="1350" b="0" u="none">
+                <a:solidFill>
+                  <a:srgbClr val="221F20"/>
+                </a:solidFill>
+                <a:latin typeface="Arial"/>
+                <a:ea typeface="Arial"/>
+                <a:cs typeface="Arial"/>
+              </a:defRPr>
+            </a:pPr>
+            <a:r>
+              <a:rPr sz="1350" b="0" u="none" dirty="0">
+                <a:solidFill>
+                  <a:srgbClr val="221F20"/>
+                </a:solidFill>
+                <a:latin typeface="Arial"/>
+                <a:ea typeface="Arial"/>
+                <a:cs typeface="Arial"/>
+              </a:rPr>
+              <a:t>5. Fix a failing test and confirm the green check</a:t>
             </a:r>
           </a:p>
         </p:txBody>
@@ -40032,7 +40124,7 @@
                 <a:ea typeface="Arial"/>
                 <a:cs typeface="Arial"/>
               </a:rPr>
-              <a:t>Troubleshoot the first useful error</a:t>
+              <a:t>Branch protection turns CI into a merge gate</a:t>
             </a:r>
           </a:p>
         </p:txBody>
@@ -40073,7 +40165,7 @@
                 <a:spcPts val="650"/>
               </a:spcAft>
               <a:buNone/>
-              <a:defRPr sz="1500" b="0" u="none">
+              <a:defRPr sz="1425" b="0" u="none">
                 <a:solidFill>
                   <a:srgbClr val="221F20"/>
                 </a:solidFill>
@@ -40083,7 +40175,7 @@
               </a:defRPr>
             </a:pPr>
             <a:r>
-              <a:rPr sz="1500" b="0" u="none">
+              <a:rPr sz="1425" b="0" u="none">
                 <a:solidFill>
                   <a:srgbClr val="221F20"/>
                 </a:solidFill>
@@ -40091,7 +40183,7 @@
                 <a:ea typeface="Arial"/>
                 <a:cs typeface="Arial"/>
               </a:rPr>
-              <a:t>Start with the failing job, not the whole workflow.</a:t>
+              <a:t>Protect the main branch from direct, unreviewed changes.</a:t>
             </a:r>
           </a:p>
           <a:p>
@@ -40103,7 +40195,7 @@
                 <a:spcPts val="650"/>
               </a:spcAft>
               <a:buNone/>
-              <a:defRPr sz="1500" b="0" u="none">
+              <a:defRPr sz="1425" b="0" u="none">
                 <a:solidFill>
                   <a:srgbClr val="221F20"/>
                 </a:solidFill>
@@ -40113,7 +40205,7 @@
               </a:defRPr>
             </a:pPr>
             <a:r>
-              <a:rPr sz="1500" b="0" u="none">
+              <a:rPr sz="1425" b="0" u="none">
                 <a:solidFill>
                   <a:srgbClr val="221F20"/>
                 </a:solidFill>
@@ -40121,7 +40213,7 @@
                 <a:ea typeface="Arial"/>
                 <a:cs typeface="Arial"/>
               </a:rPr>
-              <a:t>Open the failed step and read upward to the first real error.</a:t>
+              <a:t>Require pull request review before merge.</a:t>
             </a:r>
           </a:p>
           <a:p>
@@ -40133,7 +40225,7 @@
                 <a:spcPts val="650"/>
               </a:spcAft>
               <a:buNone/>
-              <a:defRPr sz="1500" b="0" u="none">
+              <a:defRPr sz="1425" b="0" u="none">
                 <a:solidFill>
                   <a:srgbClr val="221F20"/>
                 </a:solidFill>
@@ -40143,7 +40235,7 @@
               </a:defRPr>
             </a:pPr>
             <a:r>
-              <a:rPr sz="1500" b="0" u="none">
+              <a:rPr sz="1425" b="0" u="none">
                 <a:solidFill>
                   <a:srgbClr val="221F20"/>
                 </a:solidFill>
@@ -40151,7 +40243,7 @@
                 <a:ea typeface="Arial"/>
                 <a:cs typeface="Arial"/>
               </a:rPr>
-              <a:t>Separate YAML errors from dependency errors and test failures.</a:t>
+              <a:t>Require the CI status check to pass.</a:t>
             </a:r>
           </a:p>
           <a:p>
@@ -40163,7 +40255,7 @@
                 <a:spcPts val="650"/>
               </a:spcAft>
               <a:buNone/>
-              <a:defRPr sz="1500" b="0" u="none">
+              <a:defRPr sz="1425" b="0" u="none">
                 <a:solidFill>
                   <a:srgbClr val="221F20"/>
                 </a:solidFill>
@@ -40173,7 +40265,7 @@
               </a:defRPr>
             </a:pPr>
             <a:r>
-              <a:rPr sz="1500" b="0" u="none">
+              <a:rPr sz="1425" b="0" u="none">
                 <a:solidFill>
                   <a:srgbClr val="221F20"/>
                 </a:solidFill>
@@ -40181,7 +40273,7 @@
                 <a:ea typeface="Arial"/>
                 <a:cs typeface="Arial"/>
               </a:rPr>
-              <a:t>Check what changed in the commit.</a:t>
+              <a:t>Use clear job names so required checks are easy to select.</a:t>
             </a:r>
           </a:p>
           <a:p>
@@ -40193,7 +40285,7 @@
                 <a:spcPts val="650"/>
               </a:spcAft>
               <a:buNone/>
-              <a:defRPr sz="1500" b="0" u="none">
+              <a:defRPr sz="1425" b="0" u="none">
                 <a:solidFill>
                   <a:srgbClr val="221F20"/>
                 </a:solidFill>
@@ -40203,7 +40295,7 @@
               </a:defRPr>
             </a:pPr>
             <a:r>
-              <a:rPr sz="1500" b="0" u="none">
+              <a:rPr sz="1425" b="0" u="none">
                 <a:solidFill>
                   <a:srgbClr val="221F20"/>
                 </a:solidFill>
@@ -40211,7 +40303,7 @@
                 <a:ea typeface="Arial"/>
                 <a:cs typeface="Arial"/>
               </a:rPr>
-              <a:t>Make one hypothesis, fix one thing, and run again.</a:t>
+              <a:t>Keep deployment approval separate from test automation when risk is high.</a:t>
             </a:r>
           </a:p>
         </p:txBody>
@@ -40265,18 +40357,18 @@
         <p:spPr>
           <a:xfrm>
             <a:off x="381000" y="361950"/>
-            <a:ext cx="6953250" cy="552450"/>
+            <a:ext cx="6762750" cy="552450"/>
           </a:xfrm>
         </p:spPr>
         <p:txBody>
           <a:bodyPr wrap="square" lIns="0" tIns="0" rIns="38100" bIns="0" anchor="t">
-            <a:normAutofit fontScale="92593"/>
+            <a:normAutofit/>
           </a:bodyPr>
           <a:lstStyle/>
           <a:p>
             <a:pPr algn="l">
               <a:buNone/>
-              <a:defRPr sz="2175" b="1" u="none">
+              <a:defRPr sz="2250" b="1" u="none">
                 <a:solidFill>
                   <a:srgbClr val="221F20"/>
                 </a:solidFill>
@@ -40286,7 +40378,7 @@
               </a:defRPr>
             </a:pPr>
             <a:r>
-              <a:rPr sz="2175" b="1" u="none">
+              <a:rPr sz="2250" b="1" u="none">
                 <a:solidFill>
                   <a:srgbClr val="221F20"/>
                 </a:solidFill>
@@ -40294,7 +40386,7 @@
                 <a:ea typeface="Arial"/>
                 <a:cs typeface="Arial"/>
               </a:rPr>
-              <a:t>Transition: code checks and infrastructure plans are both evidence</a:t>
+              <a:t>Troubleshoot the first useful error</a:t>
             </a:r>
           </a:p>
         </p:txBody>
@@ -40317,8 +40409,8 @@
         </p:nvSpPr>
         <p:spPr>
           <a:xfrm>
-            <a:off x="552450" y="1181100"/>
-            <a:ext cx="7677150" cy="3048000"/>
+            <a:off x="514350" y="1162050"/>
+            <a:ext cx="7810500" cy="3238500"/>
           </a:xfrm>
         </p:spPr>
         <p:txBody>
@@ -40335,7 +40427,7 @@
                 <a:spcPts val="650"/>
               </a:spcAft>
               <a:buNone/>
-              <a:defRPr sz="1350" b="0" u="none">
+              <a:defRPr sz="1500" b="0" u="none">
                 <a:solidFill>
                   <a:srgbClr val="221F20"/>
                 </a:solidFill>
@@ -40345,7 +40437,7 @@
               </a:defRPr>
             </a:pPr>
             <a:r>
-              <a:rPr sz="1350" b="0" u="none">
+              <a:rPr sz="1500" b="0" u="none">
                 <a:solidFill>
                   <a:srgbClr val="221F20"/>
                 </a:solidFill>
@@ -40353,7 +40445,7 @@
                 <a:ea typeface="Arial"/>
                 <a:cs typeface="Arial"/>
               </a:rPr>
-              <a:t>GitHub Actions answers: did the application change pass the required checks?</a:t>
+              <a:t>Start with the failing job, not the whole workflow.</a:t>
             </a:r>
           </a:p>
           <a:p>
@@ -40365,7 +40457,7 @@
                 <a:spcPts val="650"/>
               </a:spcAft>
               <a:buNone/>
-              <a:defRPr sz="1350" b="0" u="none">
+              <a:defRPr sz="1500" b="0" u="none">
                 <a:solidFill>
                   <a:srgbClr val="221F20"/>
                 </a:solidFill>
@@ -40375,7 +40467,7 @@
               </a:defRPr>
             </a:pPr>
             <a:r>
-              <a:rPr sz="1350" b="0" u="none">
+              <a:rPr sz="1500" b="0" u="none">
                 <a:solidFill>
                   <a:srgbClr val="221F20"/>
                 </a:solidFill>
@@ -40383,7 +40475,7 @@
                 <a:ea typeface="Arial"/>
                 <a:cs typeface="Arial"/>
               </a:rPr>
-              <a:t>Terraform plan answers: what infrastructure-like state would change if we apply this?</a:t>
+              <a:t>Open the failed step and read upward to the first real error.</a:t>
             </a:r>
           </a:p>
           <a:p>
@@ -40395,7 +40487,7 @@
                 <a:spcPts val="650"/>
               </a:spcAft>
               <a:buNone/>
-              <a:defRPr sz="1350" b="0" u="none">
+              <a:defRPr sz="1500" b="0" u="none">
                 <a:solidFill>
                   <a:srgbClr val="221F20"/>
                 </a:solidFill>
@@ -40405,7 +40497,7 @@
               </a:defRPr>
             </a:pPr>
             <a:r>
-              <a:rPr sz="1350" b="0" u="none">
+              <a:rPr sz="1500" b="0" u="none">
                 <a:solidFill>
                   <a:srgbClr val="221F20"/>
                 </a:solidFill>
@@ -40413,7 +40505,7 @@
                 <a:ea typeface="Arial"/>
                 <a:cs typeface="Arial"/>
               </a:rPr>
-              <a:t>The second class reuses the same habit from the first class:</a:t>
+              <a:t>Separate YAML errors from dependency errors and test failures.</a:t>
             </a:r>
           </a:p>
           <a:p>
@@ -40425,7 +40517,7 @@
                 <a:spcPts val="650"/>
               </a:spcAft>
               <a:buNone/>
-              <a:defRPr sz="1350" b="0" u="none">
+              <a:defRPr sz="1500" b="0" u="none">
                 <a:solidFill>
                   <a:srgbClr val="221F20"/>
                 </a:solidFill>
@@ -40435,7 +40527,7 @@
               </a:defRPr>
             </a:pPr>
             <a:r>
-              <a:rPr sz="1350" b="0" u="none">
+              <a:rPr sz="1500" b="0" u="none">
                 <a:solidFill>
                   <a:srgbClr val="221F20"/>
                 </a:solidFill>
@@ -40443,82 +40535,21 @@
                 <a:ea typeface="Arial"/>
                 <a:cs typeface="Arial"/>
               </a:rPr>
-              <a:t>small change -&gt; automated check -&gt; readable difference -&gt; review -&gt; controlled apply</a:t>
+              <a:t>Check what changed in the commit.</a:t>
             </a:r>
           </a:p>
-        </p:txBody>
-      </p:sp>
-      <p:sp>
-        <p:nvSpPr>
-          <p:cNvPr id="4" name="modern-gold-rule">
-            <a:extLst>
-              <a:ext uri="{FF2B5EF4-FFF2-40B4-BE49-F238E27FC236}">
-                <a16:creationId xmlns:a16="http://schemas.microsoft.com/office/drawing/2014/main" id="{A41F9E2E-0AB4-4384-897C-E745E68F6A4A}"/>
-              </a:ext>
-            </a:extLst>
-          </p:cNvPr>
-          <p:cNvSpPr>
-            <a:spLocks noGrp="1"/>
-          </p:cNvSpPr>
-          <p:nvPr/>
-        </p:nvSpPr>
-        <p:spPr>
-          <a:xfrm>
-            <a:off x="381000" y="914400"/>
-            <a:ext cx="2095500" cy="47625"/>
-          </a:xfrm>
-          <a:prstGeom prst="rect">
-            <a:avLst/>
-          </a:prstGeom>
-          <a:solidFill>
-            <a:srgbClr val="FFCC01"/>
-          </a:solidFill>
-          <a:ln w="0">
-            <a:solidFill>
-              <a:srgbClr val="FFCC01"/>
-            </a:solidFill>
-            <a:prstDash val="solid"/>
-          </a:ln>
-        </p:spPr>
-      </p:sp>
-      <p:sp>
-        <p:nvSpPr>
-          <p:cNvPr id="5" name="section-label">
-            <a:extLst>
-              <a:ext uri="{FF2B5EF4-FFF2-40B4-BE49-F238E27FC236}">
-                <a16:creationId xmlns:a16="http://schemas.microsoft.com/office/drawing/2014/main" id="{840F7FC5-8044-4D8A-BD68-AC3F101FAABC}"/>
-              </a:ext>
-            </a:extLst>
-          </p:cNvPr>
-          <p:cNvSpPr>
-            <a:spLocks noGrp="1"/>
-          </p:cNvSpPr>
-          <p:nvPr/>
-        </p:nvSpPr>
-        <p:spPr>
-          <a:xfrm>
-            <a:off x="381000" y="990600"/>
-            <a:ext cx="4286250" cy="171450"/>
-          </a:xfrm>
-          <a:prstGeom prst="rect">
-            <a:avLst/>
-          </a:prstGeom>
-          <a:noFill/>
-          <a:ln w="0">
-            <a:noFill/>
-            <a:prstDash val="solid"/>
-          </a:ln>
-        </p:spPr>
-        <p:txBody>
-          <a:bodyPr wrap="square" lIns="0" tIns="0" rIns="0" bIns="0" anchor="t">
-            <a:normAutofit/>
-          </a:bodyPr>
-          <a:lstStyle/>
-          <a:p>
-            <a:pPr algn="l">
-              <a:defRPr sz="638" b="1" u="none">
-                <a:solidFill>
-                  <a:srgbClr val="565557"/>
+          <a:p>
+            <a:pPr marL="0" indent="0" algn="l">
+              <a:spcBef>
+                <a:spcPts val="0"/>
+              </a:spcBef>
+              <a:spcAft>
+                <a:spcPts val="650"/>
+              </a:spcAft>
+              <a:buNone/>
+              <a:defRPr sz="1500" b="0" u="none">
+                <a:solidFill>
+                  <a:srgbClr val="221F20"/>
                 </a:solidFill>
                 <a:latin typeface="Arial"/>
                 <a:ea typeface="Arial"/>
@@ -40526,467 +40557,15 @@
               </a:defRPr>
             </a:pPr>
             <a:r>
-              <a:rPr sz="638" b="1" u="none">
-                <a:solidFill>
-                  <a:srgbClr val="565557"/>
+              <a:rPr sz="1500" b="0" u="none">
+                <a:solidFill>
+                  <a:srgbClr val="221F20"/>
                 </a:solidFill>
                 <a:latin typeface="Arial"/>
                 <a:ea typeface="Arial"/>
                 <a:cs typeface="Arial"/>
               </a:rPr>
-              <a:t>BRIDGE BETWEEN CLASSES</a:t>
-            </a:r>
-          </a:p>
-        </p:txBody>
-      </p:sp>
-      <p:sp>
-        <p:nvSpPr>
-          <p:cNvPr id="6" name="diagram-node">
-            <a:extLst>
-              <a:ext uri="{FF2B5EF4-FFF2-40B4-BE49-F238E27FC236}">
-                <a16:creationId xmlns:a16="http://schemas.microsoft.com/office/drawing/2014/main" id="{56377B15-823B-469F-844F-63481D4C89DC}"/>
-              </a:ext>
-            </a:extLst>
-          </p:cNvPr>
-          <p:cNvSpPr>
-            <a:spLocks noGrp="1"/>
-          </p:cNvSpPr>
-          <p:nvPr/>
-        </p:nvSpPr>
-        <p:spPr>
-          <a:xfrm>
-            <a:off x="590550" y="2381250"/>
-            <a:ext cx="1285875" cy="514350"/>
-          </a:xfrm>
-          <a:prstGeom prst="roundRect">
-            <a:avLst>
-              <a:gd name="adj" fmla="val 14815"/>
-            </a:avLst>
-          </a:prstGeom>
-          <a:solidFill>
-            <a:srgbClr val="221F20"/>
-          </a:solidFill>
-          <a:ln w="9525">
-            <a:solidFill>
-              <a:srgbClr val="221F20"/>
-            </a:solidFill>
-            <a:prstDash val="solid"/>
-          </a:ln>
-        </p:spPr>
-        <p:txBody>
-          <a:bodyPr wrap="square" lIns="76200" tIns="95250" rIns="76200" bIns="76200" anchor="t">
-            <a:normAutofit/>
-          </a:bodyPr>
-          <a:lstStyle/>
-          <a:p>
-            <a:pPr algn="ctr">
-              <a:defRPr sz="1050" b="1" u="none">
-                <a:solidFill>
-                  <a:srgbClr val="FFFFFF"/>
-                </a:solidFill>
-                <a:latin typeface="Arial"/>
-                <a:ea typeface="Arial"/>
-                <a:cs typeface="Arial"/>
-              </a:defRPr>
-            </a:pPr>
-            <a:r>
-              <a:rPr sz="1050" b="1" u="none">
-                <a:solidFill>
-                  <a:srgbClr val="FFFFFF"/>
-                </a:solidFill>
-                <a:latin typeface="Arial"/>
-                <a:ea typeface="Arial"/>
-                <a:cs typeface="Arial"/>
-              </a:rPr>
-              <a:t>Change</a:t>
-            </a:r>
-          </a:p>
-        </p:txBody>
-      </p:sp>
-      <p:sp>
-        <p:nvSpPr>
-          <p:cNvPr id="7" name="diagram-arrow">
-            <a:extLst>
-              <a:ext uri="{FF2B5EF4-FFF2-40B4-BE49-F238E27FC236}">
-                <a16:creationId xmlns:a16="http://schemas.microsoft.com/office/drawing/2014/main" id="{17558265-0665-4F16-894A-26197485AE6E}"/>
-              </a:ext>
-            </a:extLst>
-          </p:cNvPr>
-          <p:cNvSpPr>
-            <a:spLocks noGrp="1"/>
-          </p:cNvSpPr>
-          <p:nvPr/>
-        </p:nvSpPr>
-        <p:spPr>
-          <a:xfrm>
-            <a:off x="1914525" y="2543175"/>
-            <a:ext cx="190500" cy="190500"/>
-          </a:xfrm>
-          <a:prstGeom prst="rightArrow">
-            <a:avLst/>
-          </a:prstGeom>
-          <a:solidFill>
-            <a:srgbClr val="565557"/>
-          </a:solidFill>
-          <a:ln w="0">
-            <a:solidFill>
-              <a:srgbClr val="565557"/>
-            </a:solidFill>
-            <a:prstDash val="solid"/>
-          </a:ln>
-        </p:spPr>
-      </p:sp>
-      <p:sp>
-        <p:nvSpPr>
-          <p:cNvPr id="8" name="diagram-node">
-            <a:extLst>
-              <a:ext uri="{FF2B5EF4-FFF2-40B4-BE49-F238E27FC236}">
-                <a16:creationId xmlns:a16="http://schemas.microsoft.com/office/drawing/2014/main" id="{4FB9A26B-A3A4-47DC-9BB0-066695CAED96}"/>
-              </a:ext>
-            </a:extLst>
-          </p:cNvPr>
-          <p:cNvSpPr>
-            <a:spLocks noGrp="1"/>
-          </p:cNvSpPr>
-          <p:nvPr/>
-        </p:nvSpPr>
-        <p:spPr>
-          <a:xfrm>
-            <a:off x="2143125" y="2381250"/>
-            <a:ext cx="1285875" cy="514350"/>
-          </a:xfrm>
-          <a:prstGeom prst="roundRect">
-            <a:avLst>
-              <a:gd name="adj" fmla="val 14815"/>
-            </a:avLst>
-          </a:prstGeom>
-          <a:solidFill>
-            <a:srgbClr val="FFCC01"/>
-          </a:solidFill>
-          <a:ln w="9525">
-            <a:solidFill>
-              <a:srgbClr val="FFCC01"/>
-            </a:solidFill>
-            <a:prstDash val="solid"/>
-          </a:ln>
-        </p:spPr>
-        <p:txBody>
-          <a:bodyPr wrap="square" lIns="76200" tIns="95250" rIns="76200" bIns="76200" anchor="t">
-            <a:normAutofit/>
-          </a:bodyPr>
-          <a:lstStyle/>
-          <a:p>
-            <a:pPr algn="ctr">
-              <a:defRPr sz="1050" b="1" u="none">
-                <a:solidFill>
-                  <a:srgbClr val="221F20"/>
-                </a:solidFill>
-                <a:latin typeface="Arial"/>
-                <a:ea typeface="Arial"/>
-                <a:cs typeface="Arial"/>
-              </a:defRPr>
-            </a:pPr>
-            <a:r>
-              <a:rPr sz="1050" b="1" u="none">
-                <a:solidFill>
-                  <a:srgbClr val="221F20"/>
-                </a:solidFill>
-                <a:latin typeface="Arial"/>
-                <a:ea typeface="Arial"/>
-                <a:cs typeface="Arial"/>
-              </a:rPr>
-              <a:t>Check</a:t>
-            </a:r>
-          </a:p>
-        </p:txBody>
-      </p:sp>
-      <p:sp>
-        <p:nvSpPr>
-          <p:cNvPr id="9" name="diagram-arrow">
-            <a:extLst>
-              <a:ext uri="{FF2B5EF4-FFF2-40B4-BE49-F238E27FC236}">
-                <a16:creationId xmlns:a16="http://schemas.microsoft.com/office/drawing/2014/main" id="{107B7623-104B-480C-8233-D192B8A8EFD2}"/>
-              </a:ext>
-            </a:extLst>
-          </p:cNvPr>
-          <p:cNvSpPr>
-            <a:spLocks noGrp="1"/>
-          </p:cNvSpPr>
-          <p:nvPr/>
-        </p:nvSpPr>
-        <p:spPr>
-          <a:xfrm>
-            <a:off x="3467100" y="2543175"/>
-            <a:ext cx="190500" cy="190500"/>
-          </a:xfrm>
-          <a:prstGeom prst="rightArrow">
-            <a:avLst/>
-          </a:prstGeom>
-          <a:solidFill>
-            <a:srgbClr val="565557"/>
-          </a:solidFill>
-          <a:ln w="0">
-            <a:solidFill>
-              <a:srgbClr val="565557"/>
-            </a:solidFill>
-            <a:prstDash val="solid"/>
-          </a:ln>
-        </p:spPr>
-      </p:sp>
-      <p:sp>
-        <p:nvSpPr>
-          <p:cNvPr id="10" name="diagram-node">
-            <a:extLst>
-              <a:ext uri="{FF2B5EF4-FFF2-40B4-BE49-F238E27FC236}">
-                <a16:creationId xmlns:a16="http://schemas.microsoft.com/office/drawing/2014/main" id="{45012DE2-B6C4-4519-82F5-116FD360D1E2}"/>
-              </a:ext>
-            </a:extLst>
-          </p:cNvPr>
-          <p:cNvSpPr>
-            <a:spLocks noGrp="1"/>
-          </p:cNvSpPr>
-          <p:nvPr/>
-        </p:nvSpPr>
-        <p:spPr>
-          <a:xfrm>
-            <a:off x="3695700" y="2381250"/>
-            <a:ext cx="1285875" cy="514350"/>
-          </a:xfrm>
-          <a:prstGeom prst="roundRect">
-            <a:avLst>
-              <a:gd name="adj" fmla="val 14815"/>
-            </a:avLst>
-          </a:prstGeom>
-          <a:solidFill>
-            <a:srgbClr val="221F20"/>
-          </a:solidFill>
-          <a:ln w="9525">
-            <a:solidFill>
-              <a:srgbClr val="221F20"/>
-            </a:solidFill>
-            <a:prstDash val="solid"/>
-          </a:ln>
-        </p:spPr>
-        <p:txBody>
-          <a:bodyPr wrap="square" lIns="76200" tIns="95250" rIns="76200" bIns="76200" anchor="t">
-            <a:normAutofit/>
-          </a:bodyPr>
-          <a:lstStyle/>
-          <a:p>
-            <a:pPr algn="ctr">
-              <a:defRPr sz="1050" b="1" u="none">
-                <a:solidFill>
-                  <a:srgbClr val="FFFFFF"/>
-                </a:solidFill>
-                <a:latin typeface="Arial"/>
-                <a:ea typeface="Arial"/>
-                <a:cs typeface="Arial"/>
-              </a:defRPr>
-            </a:pPr>
-            <a:r>
-              <a:rPr sz="1050" b="1" u="none">
-                <a:solidFill>
-                  <a:srgbClr val="FFFFFF"/>
-                </a:solidFill>
-                <a:latin typeface="Arial"/>
-                <a:ea typeface="Arial"/>
-                <a:cs typeface="Arial"/>
-              </a:rPr>
-              <a:t>Plan</a:t>
-            </a:r>
-          </a:p>
-        </p:txBody>
-      </p:sp>
-      <p:sp>
-        <p:nvSpPr>
-          <p:cNvPr id="11" name="diagram-arrow">
-            <a:extLst>
-              <a:ext uri="{FF2B5EF4-FFF2-40B4-BE49-F238E27FC236}">
-                <a16:creationId xmlns:a16="http://schemas.microsoft.com/office/drawing/2014/main" id="{E952116C-3655-4200-8AA3-B50C24CDBFE1}"/>
-              </a:ext>
-            </a:extLst>
-          </p:cNvPr>
-          <p:cNvSpPr>
-            <a:spLocks noGrp="1"/>
-          </p:cNvSpPr>
-          <p:nvPr/>
-        </p:nvSpPr>
-        <p:spPr>
-          <a:xfrm>
-            <a:off x="5019675" y="2543175"/>
-            <a:ext cx="190500" cy="190500"/>
-          </a:xfrm>
-          <a:prstGeom prst="rightArrow">
-            <a:avLst/>
-          </a:prstGeom>
-          <a:solidFill>
-            <a:srgbClr val="565557"/>
-          </a:solidFill>
-          <a:ln w="0">
-            <a:solidFill>
-              <a:srgbClr val="565557"/>
-            </a:solidFill>
-            <a:prstDash val="solid"/>
-          </a:ln>
-        </p:spPr>
-      </p:sp>
-      <p:sp>
-        <p:nvSpPr>
-          <p:cNvPr id="12" name="diagram-node">
-            <a:extLst>
-              <a:ext uri="{FF2B5EF4-FFF2-40B4-BE49-F238E27FC236}">
-                <a16:creationId xmlns:a16="http://schemas.microsoft.com/office/drawing/2014/main" id="{C31EADF5-A4F4-410F-AF48-BDF2B6151321}"/>
-              </a:ext>
-            </a:extLst>
-          </p:cNvPr>
-          <p:cNvSpPr>
-            <a:spLocks noGrp="1"/>
-          </p:cNvSpPr>
-          <p:nvPr/>
-        </p:nvSpPr>
-        <p:spPr>
-          <a:xfrm>
-            <a:off x="5248275" y="2381250"/>
-            <a:ext cx="1285875" cy="514350"/>
-          </a:xfrm>
-          <a:prstGeom prst="roundRect">
-            <a:avLst>
-              <a:gd name="adj" fmla="val 14815"/>
-            </a:avLst>
-          </a:prstGeom>
-          <a:solidFill>
-            <a:srgbClr val="FFCC01"/>
-          </a:solidFill>
-          <a:ln w="9525">
-            <a:solidFill>
-              <a:srgbClr val="FFCC01"/>
-            </a:solidFill>
-            <a:prstDash val="solid"/>
-          </a:ln>
-        </p:spPr>
-        <p:txBody>
-          <a:bodyPr wrap="square" lIns="76200" tIns="95250" rIns="76200" bIns="76200" anchor="t">
-            <a:normAutofit/>
-          </a:bodyPr>
-          <a:lstStyle/>
-          <a:p>
-            <a:pPr algn="ctr">
-              <a:defRPr sz="1050" b="1" u="none">
-                <a:solidFill>
-                  <a:srgbClr val="221F20"/>
-                </a:solidFill>
-                <a:latin typeface="Arial"/>
-                <a:ea typeface="Arial"/>
-                <a:cs typeface="Arial"/>
-              </a:defRPr>
-            </a:pPr>
-            <a:r>
-              <a:rPr sz="1050" b="1" u="none">
-                <a:solidFill>
-                  <a:srgbClr val="221F20"/>
-                </a:solidFill>
-                <a:latin typeface="Arial"/>
-                <a:ea typeface="Arial"/>
-                <a:cs typeface="Arial"/>
-              </a:rPr>
-              <a:t>Review</a:t>
-            </a:r>
-          </a:p>
-        </p:txBody>
-      </p:sp>
-      <p:sp>
-        <p:nvSpPr>
-          <p:cNvPr id="13" name="diagram-arrow">
-            <a:extLst>
-              <a:ext uri="{FF2B5EF4-FFF2-40B4-BE49-F238E27FC236}">
-                <a16:creationId xmlns:a16="http://schemas.microsoft.com/office/drawing/2014/main" id="{0CB68582-025D-47A5-B042-C2708CE746AA}"/>
-              </a:ext>
-            </a:extLst>
-          </p:cNvPr>
-          <p:cNvSpPr>
-            <a:spLocks noGrp="1"/>
-          </p:cNvSpPr>
-          <p:nvPr/>
-        </p:nvSpPr>
-        <p:spPr>
-          <a:xfrm>
-            <a:off x="6572250" y="2543175"/>
-            <a:ext cx="190500" cy="190500"/>
-          </a:xfrm>
-          <a:prstGeom prst="rightArrow">
-            <a:avLst/>
-          </a:prstGeom>
-          <a:solidFill>
-            <a:srgbClr val="565557"/>
-          </a:solidFill>
-          <a:ln w="0">
-            <a:solidFill>
-              <a:srgbClr val="565557"/>
-            </a:solidFill>
-            <a:prstDash val="solid"/>
-          </a:ln>
-        </p:spPr>
-      </p:sp>
-      <p:sp>
-        <p:nvSpPr>
-          <p:cNvPr id="14" name="diagram-node">
-            <a:extLst>
-              <a:ext uri="{FF2B5EF4-FFF2-40B4-BE49-F238E27FC236}">
-                <a16:creationId xmlns:a16="http://schemas.microsoft.com/office/drawing/2014/main" id="{CE4C5F51-2F07-4329-A499-22739EB9DD20}"/>
-              </a:ext>
-            </a:extLst>
-          </p:cNvPr>
-          <p:cNvSpPr>
-            <a:spLocks noGrp="1"/>
-          </p:cNvSpPr>
-          <p:nvPr/>
-        </p:nvSpPr>
-        <p:spPr>
-          <a:xfrm>
-            <a:off x="6800850" y="2381250"/>
-            <a:ext cx="1285875" cy="514350"/>
-          </a:xfrm>
-          <a:prstGeom prst="roundRect">
-            <a:avLst>
-              <a:gd name="adj" fmla="val 14815"/>
-            </a:avLst>
-          </a:prstGeom>
-          <a:solidFill>
-            <a:srgbClr val="221F20"/>
-          </a:solidFill>
-          <a:ln w="9525">
-            <a:solidFill>
-              <a:srgbClr val="221F20"/>
-            </a:solidFill>
-            <a:prstDash val="solid"/>
-          </a:ln>
-        </p:spPr>
-        <p:txBody>
-          <a:bodyPr wrap="square" lIns="76200" tIns="95250" rIns="76200" bIns="76200" anchor="t">
-            <a:normAutofit/>
-          </a:bodyPr>
-          <a:lstStyle/>
-          <a:p>
-            <a:pPr algn="ctr">
-              <a:defRPr sz="1050" b="1" u="none">
-                <a:solidFill>
-                  <a:srgbClr val="FFFFFF"/>
-                </a:solidFill>
-                <a:latin typeface="Arial"/>
-                <a:ea typeface="Arial"/>
-                <a:cs typeface="Arial"/>
-              </a:defRPr>
-            </a:pPr>
-            <a:r>
-              <a:rPr sz="1050" b="1" u="none">
-                <a:solidFill>
-                  <a:srgbClr val="FFFFFF"/>
-                </a:solidFill>
-                <a:latin typeface="Arial"/>
-                <a:ea typeface="Arial"/>
-                <a:cs typeface="Arial"/>
-              </a:rPr>
-              <a:t>Apply</a:t>
+              <a:t>Make one hypothesis, fix one thing, and run again.</a:t>
             </a:r>
           </a:p>
         </p:txBody>
@@ -41045,7 +40624,7 @@
         </p:spPr>
         <p:txBody>
           <a:bodyPr wrap="square" lIns="0" tIns="0" rIns="38100" bIns="0" anchor="t">
-            <a:normAutofit/>
+            <a:normAutofit fontScale="92593"/>
           </a:bodyPr>
           <a:lstStyle/>
           <a:p>
@@ -41069,7 +40648,7 @@
                 <a:ea typeface="Arial"/>
                 <a:cs typeface="Arial"/>
               </a:rPr>
-              <a:t>References and lab resources</a:t>
+              <a:t>Transition: code checks and infrastructure plans are both evidence</a:t>
             </a:r>
           </a:p>
         </p:txBody>
@@ -41128,7 +40707,7 @@
                 <a:ea typeface="Arial"/>
                 <a:cs typeface="Arial"/>
               </a:rPr>
-              <a:t>GitHub Actions documentation: docs.github.com/actions</a:t>
+              <a:t>GitHub Actions answers: did the application change pass the required checks?</a:t>
             </a:r>
           </a:p>
           <a:p>
@@ -41158,7 +40737,7 @@
                 <a:ea typeface="Arial"/>
                 <a:cs typeface="Arial"/>
               </a:rPr>
-              <a:t>Workflow syntax: docs.github.com/actions/using-workflows/workflow-syntax-for-github-actions</a:t>
+              <a:t>Terraform plan answers: what infrastructure-like state would change if we apply this?</a:t>
             </a:r>
           </a:p>
           <a:p>
@@ -41188,7 +40767,7 @@
                 <a:ea typeface="Arial"/>
                 <a:cs typeface="Arial"/>
               </a:rPr>
-              <a:t>GitHub Skills lab: github.com/skills/test-with-actions</a:t>
+              <a:t>The second class reuses the same habit from the first class:</a:t>
             </a:r>
           </a:p>
           <a:p>
@@ -41218,67 +40797,7 @@
                 <a:ea typeface="Arial"/>
                 <a:cs typeface="Arial"/>
               </a:rPr>
-              <a:t>Terraform CLI commands: developer.hashicorp.com/terraform/cli/commands</a:t>
-            </a:r>
-          </a:p>
-          <a:p>
-            <a:pPr marL="0" indent="0" algn="l">
-              <a:spcBef>
-                <a:spcPts val="0"/>
-              </a:spcBef>
-              <a:spcAft>
-                <a:spcPts val="650"/>
-              </a:spcAft>
-              <a:buNone/>
-              <a:defRPr sz="1350" b="0" u="none">
-                <a:solidFill>
-                  <a:srgbClr val="221F20"/>
-                </a:solidFill>
-                <a:latin typeface="Arial"/>
-                <a:ea typeface="Arial"/>
-                <a:cs typeface="Arial"/>
-              </a:defRPr>
-            </a:pPr>
-            <a:r>
-              <a:rPr sz="1350" b="0" u="none">
-                <a:solidFill>
-                  <a:srgbClr val="221F20"/>
-                </a:solidFill>
-                <a:latin typeface="Arial"/>
-                <a:ea typeface="Arial"/>
-                <a:cs typeface="Arial"/>
-              </a:rPr>
-              <a:t>terraform_data resource: developer.hashicorp.com/terraform/language/resources/terraform-data</a:t>
-            </a:r>
-          </a:p>
-          <a:p>
-            <a:pPr marL="0" indent="0" algn="l">
-              <a:spcBef>
-                <a:spcPts val="0"/>
-              </a:spcBef>
-              <a:spcAft>
-                <a:spcPts val="650"/>
-              </a:spcAft>
-              <a:buNone/>
-              <a:defRPr sz="1350" b="0" u="none">
-                <a:solidFill>
-                  <a:srgbClr val="221F20"/>
-                </a:solidFill>
-                <a:latin typeface="Arial"/>
-                <a:ea typeface="Arial"/>
-                <a:cs typeface="Arial"/>
-              </a:defRPr>
-            </a:pPr>
-            <a:r>
-              <a:rPr sz="1350" b="0" u="none">
-                <a:solidFill>
-                  <a:srgbClr val="221F20"/>
-                </a:solidFill>
-                <a:latin typeface="Arial"/>
-                <a:ea typeface="Arial"/>
-                <a:cs typeface="Arial"/>
-              </a:rPr>
-              <a:t>Terraform values and modules: developer.hashicorp.com/terraform/language/values</a:t>
+              <a:t>small change -&gt; automated check -&gt; readable difference -&gt; review -&gt; controlled apply</a:t>
             </a:r>
           </a:p>
         </p:txBody>
@@ -41288,7 +40807,7 @@
           <p:cNvPr id="4" name="modern-gold-rule">
             <a:extLst>
               <a:ext uri="{FF2B5EF4-FFF2-40B4-BE49-F238E27FC236}">
-                <a16:creationId xmlns:a16="http://schemas.microsoft.com/office/drawing/2014/main" id="{34A19E58-5CB6-498E-B283-D624D280BDEC}"/>
+                <a16:creationId xmlns:a16="http://schemas.microsoft.com/office/drawing/2014/main" id="{A41F9E2E-0AB4-4384-897C-E745E68F6A4A}"/>
               </a:ext>
             </a:extLst>
           </p:cNvPr>
@@ -41315,13 +40834,20 @@
             <a:prstDash val="solid"/>
           </a:ln>
         </p:spPr>
+        <p:txBody>
+          <a:bodyPr/>
+          <a:lstStyle/>
+          <a:p>
+            <a:endParaRPr lang="en-US"/>
+          </a:p>
+        </p:txBody>
       </p:sp>
       <p:sp>
         <p:nvSpPr>
           <p:cNvPr id="5" name="section-label">
             <a:extLst>
               <a:ext uri="{FF2B5EF4-FFF2-40B4-BE49-F238E27FC236}">
-                <a16:creationId xmlns:a16="http://schemas.microsoft.com/office/drawing/2014/main" id="{0B0D2113-13E7-49E6-A1F1-DDC22359F2E4}"/>
+                <a16:creationId xmlns:a16="http://schemas.microsoft.com/office/drawing/2014/main" id="{840F7FC5-8044-4D8A-BD68-AC3F101FAABC}"/>
               </a:ext>
             </a:extLst>
           </p:cNvPr>
@@ -41369,7 +40895,487 @@
                 <a:ea typeface="Arial"/>
                 <a:cs typeface="Arial"/>
               </a:rPr>
-              <a:t>RESOURCES</a:t>
+              <a:t>BRIDGE BETWEEN CLASSES</a:t>
+            </a:r>
+          </a:p>
+        </p:txBody>
+      </p:sp>
+      <p:sp>
+        <p:nvSpPr>
+          <p:cNvPr id="6" name="diagram-node">
+            <a:extLst>
+              <a:ext uri="{FF2B5EF4-FFF2-40B4-BE49-F238E27FC236}">
+                <a16:creationId xmlns:a16="http://schemas.microsoft.com/office/drawing/2014/main" id="{56377B15-823B-469F-844F-63481D4C89DC}"/>
+              </a:ext>
+            </a:extLst>
+          </p:cNvPr>
+          <p:cNvSpPr>
+            <a:spLocks noGrp="1"/>
+          </p:cNvSpPr>
+          <p:nvPr/>
+        </p:nvSpPr>
+        <p:spPr>
+          <a:xfrm>
+            <a:off x="590550" y="2381250"/>
+            <a:ext cx="1285875" cy="514350"/>
+          </a:xfrm>
+          <a:prstGeom prst="roundRect">
+            <a:avLst>
+              <a:gd name="adj" fmla="val 14815"/>
+            </a:avLst>
+          </a:prstGeom>
+          <a:solidFill>
+            <a:srgbClr val="221F20"/>
+          </a:solidFill>
+          <a:ln w="9525">
+            <a:solidFill>
+              <a:srgbClr val="221F20"/>
+            </a:solidFill>
+            <a:prstDash val="solid"/>
+          </a:ln>
+        </p:spPr>
+        <p:txBody>
+          <a:bodyPr wrap="square" lIns="76200" tIns="95250" rIns="76200" bIns="76200" anchor="t">
+            <a:normAutofit/>
+          </a:bodyPr>
+          <a:lstStyle/>
+          <a:p>
+            <a:pPr algn="ctr">
+              <a:defRPr sz="1050" b="1" u="none">
+                <a:solidFill>
+                  <a:srgbClr val="FFFFFF"/>
+                </a:solidFill>
+                <a:latin typeface="Arial"/>
+                <a:ea typeface="Arial"/>
+                <a:cs typeface="Arial"/>
+              </a:defRPr>
+            </a:pPr>
+            <a:r>
+              <a:rPr sz="1050" b="1" u="none">
+                <a:solidFill>
+                  <a:srgbClr val="FFFFFF"/>
+                </a:solidFill>
+                <a:latin typeface="Arial"/>
+                <a:ea typeface="Arial"/>
+                <a:cs typeface="Arial"/>
+              </a:rPr>
+              <a:t>Change</a:t>
+            </a:r>
+          </a:p>
+        </p:txBody>
+      </p:sp>
+      <p:sp>
+        <p:nvSpPr>
+          <p:cNvPr id="7" name="diagram-arrow">
+            <a:extLst>
+              <a:ext uri="{FF2B5EF4-FFF2-40B4-BE49-F238E27FC236}">
+                <a16:creationId xmlns:a16="http://schemas.microsoft.com/office/drawing/2014/main" id="{17558265-0665-4F16-894A-26197485AE6E}"/>
+              </a:ext>
+            </a:extLst>
+          </p:cNvPr>
+          <p:cNvSpPr>
+            <a:spLocks noGrp="1"/>
+          </p:cNvSpPr>
+          <p:nvPr/>
+        </p:nvSpPr>
+        <p:spPr>
+          <a:xfrm>
+            <a:off x="1914525" y="2543175"/>
+            <a:ext cx="190500" cy="190500"/>
+          </a:xfrm>
+          <a:prstGeom prst="rightArrow">
+            <a:avLst/>
+          </a:prstGeom>
+          <a:solidFill>
+            <a:srgbClr val="565557"/>
+          </a:solidFill>
+          <a:ln w="0">
+            <a:solidFill>
+              <a:srgbClr val="565557"/>
+            </a:solidFill>
+            <a:prstDash val="solid"/>
+          </a:ln>
+        </p:spPr>
+        <p:txBody>
+          <a:bodyPr/>
+          <a:lstStyle/>
+          <a:p>
+            <a:endParaRPr lang="en-US"/>
+          </a:p>
+        </p:txBody>
+      </p:sp>
+      <p:sp>
+        <p:nvSpPr>
+          <p:cNvPr id="8" name="diagram-node">
+            <a:extLst>
+              <a:ext uri="{FF2B5EF4-FFF2-40B4-BE49-F238E27FC236}">
+                <a16:creationId xmlns:a16="http://schemas.microsoft.com/office/drawing/2014/main" id="{4FB9A26B-A3A4-47DC-9BB0-066695CAED96}"/>
+              </a:ext>
+            </a:extLst>
+          </p:cNvPr>
+          <p:cNvSpPr>
+            <a:spLocks noGrp="1"/>
+          </p:cNvSpPr>
+          <p:nvPr/>
+        </p:nvSpPr>
+        <p:spPr>
+          <a:xfrm>
+            <a:off x="2143125" y="2381250"/>
+            <a:ext cx="1285875" cy="514350"/>
+          </a:xfrm>
+          <a:prstGeom prst="roundRect">
+            <a:avLst>
+              <a:gd name="adj" fmla="val 14815"/>
+            </a:avLst>
+          </a:prstGeom>
+          <a:solidFill>
+            <a:srgbClr val="FFCC01"/>
+          </a:solidFill>
+          <a:ln w="9525">
+            <a:solidFill>
+              <a:srgbClr val="FFCC01"/>
+            </a:solidFill>
+            <a:prstDash val="solid"/>
+          </a:ln>
+        </p:spPr>
+        <p:txBody>
+          <a:bodyPr wrap="square" lIns="76200" tIns="95250" rIns="76200" bIns="76200" anchor="t">
+            <a:normAutofit/>
+          </a:bodyPr>
+          <a:lstStyle/>
+          <a:p>
+            <a:pPr algn="ctr">
+              <a:defRPr sz="1050" b="1" u="none">
+                <a:solidFill>
+                  <a:srgbClr val="221F20"/>
+                </a:solidFill>
+                <a:latin typeface="Arial"/>
+                <a:ea typeface="Arial"/>
+                <a:cs typeface="Arial"/>
+              </a:defRPr>
+            </a:pPr>
+            <a:r>
+              <a:rPr sz="1050" b="1" u="none">
+                <a:solidFill>
+                  <a:srgbClr val="221F20"/>
+                </a:solidFill>
+                <a:latin typeface="Arial"/>
+                <a:ea typeface="Arial"/>
+                <a:cs typeface="Arial"/>
+              </a:rPr>
+              <a:t>Check</a:t>
+            </a:r>
+          </a:p>
+        </p:txBody>
+      </p:sp>
+      <p:sp>
+        <p:nvSpPr>
+          <p:cNvPr id="9" name="diagram-arrow">
+            <a:extLst>
+              <a:ext uri="{FF2B5EF4-FFF2-40B4-BE49-F238E27FC236}">
+                <a16:creationId xmlns:a16="http://schemas.microsoft.com/office/drawing/2014/main" id="{107B7623-104B-480C-8233-D192B8A8EFD2}"/>
+              </a:ext>
+            </a:extLst>
+          </p:cNvPr>
+          <p:cNvSpPr>
+            <a:spLocks noGrp="1"/>
+          </p:cNvSpPr>
+          <p:nvPr/>
+        </p:nvSpPr>
+        <p:spPr>
+          <a:xfrm>
+            <a:off x="3467100" y="2543175"/>
+            <a:ext cx="190500" cy="190500"/>
+          </a:xfrm>
+          <a:prstGeom prst="rightArrow">
+            <a:avLst/>
+          </a:prstGeom>
+          <a:solidFill>
+            <a:srgbClr val="565557"/>
+          </a:solidFill>
+          <a:ln w="0">
+            <a:solidFill>
+              <a:srgbClr val="565557"/>
+            </a:solidFill>
+            <a:prstDash val="solid"/>
+          </a:ln>
+        </p:spPr>
+        <p:txBody>
+          <a:bodyPr/>
+          <a:lstStyle/>
+          <a:p>
+            <a:endParaRPr lang="en-US"/>
+          </a:p>
+        </p:txBody>
+      </p:sp>
+      <p:sp>
+        <p:nvSpPr>
+          <p:cNvPr id="10" name="diagram-node">
+            <a:extLst>
+              <a:ext uri="{FF2B5EF4-FFF2-40B4-BE49-F238E27FC236}">
+                <a16:creationId xmlns:a16="http://schemas.microsoft.com/office/drawing/2014/main" id="{45012DE2-B6C4-4519-82F5-116FD360D1E2}"/>
+              </a:ext>
+            </a:extLst>
+          </p:cNvPr>
+          <p:cNvSpPr>
+            <a:spLocks noGrp="1"/>
+          </p:cNvSpPr>
+          <p:nvPr/>
+        </p:nvSpPr>
+        <p:spPr>
+          <a:xfrm>
+            <a:off x="3695700" y="2381250"/>
+            <a:ext cx="1285875" cy="514350"/>
+          </a:xfrm>
+          <a:prstGeom prst="roundRect">
+            <a:avLst>
+              <a:gd name="adj" fmla="val 14815"/>
+            </a:avLst>
+          </a:prstGeom>
+          <a:solidFill>
+            <a:srgbClr val="221F20"/>
+          </a:solidFill>
+          <a:ln w="9525">
+            <a:solidFill>
+              <a:srgbClr val="221F20"/>
+            </a:solidFill>
+            <a:prstDash val="solid"/>
+          </a:ln>
+        </p:spPr>
+        <p:txBody>
+          <a:bodyPr wrap="square" lIns="76200" tIns="95250" rIns="76200" bIns="76200" anchor="t">
+            <a:normAutofit/>
+          </a:bodyPr>
+          <a:lstStyle/>
+          <a:p>
+            <a:pPr algn="ctr">
+              <a:defRPr sz="1050" b="1" u="none">
+                <a:solidFill>
+                  <a:srgbClr val="FFFFFF"/>
+                </a:solidFill>
+                <a:latin typeface="Arial"/>
+                <a:ea typeface="Arial"/>
+                <a:cs typeface="Arial"/>
+              </a:defRPr>
+            </a:pPr>
+            <a:r>
+              <a:rPr sz="1050" b="1" u="none">
+                <a:solidFill>
+                  <a:srgbClr val="FFFFFF"/>
+                </a:solidFill>
+                <a:latin typeface="Arial"/>
+                <a:ea typeface="Arial"/>
+                <a:cs typeface="Arial"/>
+              </a:rPr>
+              <a:t>Plan</a:t>
+            </a:r>
+          </a:p>
+        </p:txBody>
+      </p:sp>
+      <p:sp>
+        <p:nvSpPr>
+          <p:cNvPr id="11" name="diagram-arrow">
+            <a:extLst>
+              <a:ext uri="{FF2B5EF4-FFF2-40B4-BE49-F238E27FC236}">
+                <a16:creationId xmlns:a16="http://schemas.microsoft.com/office/drawing/2014/main" id="{E952116C-3655-4200-8AA3-B50C24CDBFE1}"/>
+              </a:ext>
+            </a:extLst>
+          </p:cNvPr>
+          <p:cNvSpPr>
+            <a:spLocks noGrp="1"/>
+          </p:cNvSpPr>
+          <p:nvPr/>
+        </p:nvSpPr>
+        <p:spPr>
+          <a:xfrm>
+            <a:off x="5019675" y="2543175"/>
+            <a:ext cx="190500" cy="190500"/>
+          </a:xfrm>
+          <a:prstGeom prst="rightArrow">
+            <a:avLst/>
+          </a:prstGeom>
+          <a:solidFill>
+            <a:srgbClr val="565557"/>
+          </a:solidFill>
+          <a:ln w="0">
+            <a:solidFill>
+              <a:srgbClr val="565557"/>
+            </a:solidFill>
+            <a:prstDash val="solid"/>
+          </a:ln>
+        </p:spPr>
+        <p:txBody>
+          <a:bodyPr/>
+          <a:lstStyle/>
+          <a:p>
+            <a:endParaRPr lang="en-US"/>
+          </a:p>
+        </p:txBody>
+      </p:sp>
+      <p:sp>
+        <p:nvSpPr>
+          <p:cNvPr id="12" name="diagram-node">
+            <a:extLst>
+              <a:ext uri="{FF2B5EF4-FFF2-40B4-BE49-F238E27FC236}">
+                <a16:creationId xmlns:a16="http://schemas.microsoft.com/office/drawing/2014/main" id="{C31EADF5-A4F4-410F-AF48-BDF2B6151321}"/>
+              </a:ext>
+            </a:extLst>
+          </p:cNvPr>
+          <p:cNvSpPr>
+            <a:spLocks noGrp="1"/>
+          </p:cNvSpPr>
+          <p:nvPr/>
+        </p:nvSpPr>
+        <p:spPr>
+          <a:xfrm>
+            <a:off x="5248275" y="2381250"/>
+            <a:ext cx="1285875" cy="514350"/>
+          </a:xfrm>
+          <a:prstGeom prst="roundRect">
+            <a:avLst>
+              <a:gd name="adj" fmla="val 14815"/>
+            </a:avLst>
+          </a:prstGeom>
+          <a:solidFill>
+            <a:srgbClr val="FFCC01"/>
+          </a:solidFill>
+          <a:ln w="9525">
+            <a:solidFill>
+              <a:srgbClr val="FFCC01"/>
+            </a:solidFill>
+            <a:prstDash val="solid"/>
+          </a:ln>
+        </p:spPr>
+        <p:txBody>
+          <a:bodyPr wrap="square" lIns="76200" tIns="95250" rIns="76200" bIns="76200" anchor="t">
+            <a:normAutofit/>
+          </a:bodyPr>
+          <a:lstStyle/>
+          <a:p>
+            <a:pPr algn="ctr">
+              <a:defRPr sz="1050" b="1" u="none">
+                <a:solidFill>
+                  <a:srgbClr val="221F20"/>
+                </a:solidFill>
+                <a:latin typeface="Arial"/>
+                <a:ea typeface="Arial"/>
+                <a:cs typeface="Arial"/>
+              </a:defRPr>
+            </a:pPr>
+            <a:r>
+              <a:rPr sz="1050" b="1" u="none">
+                <a:solidFill>
+                  <a:srgbClr val="221F20"/>
+                </a:solidFill>
+                <a:latin typeface="Arial"/>
+                <a:ea typeface="Arial"/>
+                <a:cs typeface="Arial"/>
+              </a:rPr>
+              <a:t>Review</a:t>
+            </a:r>
+          </a:p>
+        </p:txBody>
+      </p:sp>
+      <p:sp>
+        <p:nvSpPr>
+          <p:cNvPr id="13" name="diagram-arrow">
+            <a:extLst>
+              <a:ext uri="{FF2B5EF4-FFF2-40B4-BE49-F238E27FC236}">
+                <a16:creationId xmlns:a16="http://schemas.microsoft.com/office/drawing/2014/main" id="{0CB68582-025D-47A5-B042-C2708CE746AA}"/>
+              </a:ext>
+            </a:extLst>
+          </p:cNvPr>
+          <p:cNvSpPr>
+            <a:spLocks noGrp="1"/>
+          </p:cNvSpPr>
+          <p:nvPr/>
+        </p:nvSpPr>
+        <p:spPr>
+          <a:xfrm>
+            <a:off x="6572250" y="2543175"/>
+            <a:ext cx="190500" cy="190500"/>
+          </a:xfrm>
+          <a:prstGeom prst="rightArrow">
+            <a:avLst/>
+          </a:prstGeom>
+          <a:solidFill>
+            <a:srgbClr val="565557"/>
+          </a:solidFill>
+          <a:ln w="0">
+            <a:solidFill>
+              <a:srgbClr val="565557"/>
+            </a:solidFill>
+            <a:prstDash val="solid"/>
+          </a:ln>
+        </p:spPr>
+        <p:txBody>
+          <a:bodyPr/>
+          <a:lstStyle/>
+          <a:p>
+            <a:endParaRPr lang="en-US"/>
+          </a:p>
+        </p:txBody>
+      </p:sp>
+      <p:sp>
+        <p:nvSpPr>
+          <p:cNvPr id="14" name="diagram-node">
+            <a:extLst>
+              <a:ext uri="{FF2B5EF4-FFF2-40B4-BE49-F238E27FC236}">
+                <a16:creationId xmlns:a16="http://schemas.microsoft.com/office/drawing/2014/main" id="{CE4C5F51-2F07-4329-A499-22739EB9DD20}"/>
+              </a:ext>
+            </a:extLst>
+          </p:cNvPr>
+          <p:cNvSpPr>
+            <a:spLocks noGrp="1"/>
+          </p:cNvSpPr>
+          <p:nvPr/>
+        </p:nvSpPr>
+        <p:spPr>
+          <a:xfrm>
+            <a:off x="6800850" y="2381250"/>
+            <a:ext cx="1285875" cy="514350"/>
+          </a:xfrm>
+          <a:prstGeom prst="roundRect">
+            <a:avLst>
+              <a:gd name="adj" fmla="val 14815"/>
+            </a:avLst>
+          </a:prstGeom>
+          <a:solidFill>
+            <a:srgbClr val="221F20"/>
+          </a:solidFill>
+          <a:ln w="9525">
+            <a:solidFill>
+              <a:srgbClr val="221F20"/>
+            </a:solidFill>
+            <a:prstDash val="solid"/>
+          </a:ln>
+        </p:spPr>
+        <p:txBody>
+          <a:bodyPr wrap="square" lIns="76200" tIns="95250" rIns="76200" bIns="76200" anchor="t">
+            <a:normAutofit/>
+          </a:bodyPr>
+          <a:lstStyle/>
+          <a:p>
+            <a:pPr algn="ctr">
+              <a:defRPr sz="1050" b="1" u="none">
+                <a:solidFill>
+                  <a:srgbClr val="FFFFFF"/>
+                </a:solidFill>
+                <a:latin typeface="Arial"/>
+                <a:ea typeface="Arial"/>
+                <a:cs typeface="Arial"/>
+              </a:defRPr>
+            </a:pPr>
+            <a:r>
+              <a:rPr sz="1050" b="1" u="none">
+                <a:solidFill>
+                  <a:srgbClr val="FFFFFF"/>
+                </a:solidFill>
+                <a:latin typeface="Arial"/>
+                <a:ea typeface="Arial"/>
+                <a:cs typeface="Arial"/>
+              </a:rPr>
+              <a:t>Apply</a:t>
             </a:r>
           </a:p>
         </p:txBody>
@@ -41452,7 +41458,7 @@
                 <a:ea typeface="Arial"/>
                 <a:cs typeface="Arial"/>
               </a:rPr>
-              <a:t>The habit is the same across both classes</a:t>
+              <a:t>References and lab resources</a:t>
             </a:r>
           </a:p>
         </p:txBody>
@@ -41511,7 +41517,7 @@
                 <a:ea typeface="Arial"/>
                 <a:cs typeface="Arial"/>
               </a:rPr>
-              <a:t>Write the intended change in code.</a:t>
+              <a:t>GitHub Actions documentation: docs.github.com/actions</a:t>
             </a:r>
           </a:p>
           <a:p>
@@ -41541,7 +41547,7 @@
                 <a:ea typeface="Arial"/>
                 <a:cs typeface="Arial"/>
               </a:rPr>
-              <a:t>Run automated checks.</a:t>
+              <a:t>Workflow syntax: docs.github.com/actions/using-workflows/workflow-syntax-for-github-actions</a:t>
             </a:r>
           </a:p>
           <a:p>
@@ -41571,7 +41577,7 @@
                 <a:ea typeface="Arial"/>
                 <a:cs typeface="Arial"/>
               </a:rPr>
-              <a:t>Preview the difference.</a:t>
+              <a:t>GitHub Skills lab: github.com/skills/test-with-actions</a:t>
             </a:r>
           </a:p>
           <a:p>
@@ -41601,7 +41607,7 @@
                 <a:ea typeface="Arial"/>
                 <a:cs typeface="Arial"/>
               </a:rPr>
-              <a:t>Review before merge or apply.</a:t>
+              <a:t>Terraform CLI commands: developer.hashicorp.com/terraform/cli/commands</a:t>
             </a:r>
           </a:p>
           <a:p>
@@ -41631,7 +41637,37 @@
                 <a:ea typeface="Arial"/>
                 <a:cs typeface="Arial"/>
               </a:rPr>
-              <a:t>Keep the path repeatable enough that the next change is safer.</a:t>
+              <a:t>terraform_data resource: developer.hashicorp.com/terraform/language/resources/terraform-data</a:t>
+            </a:r>
+          </a:p>
+          <a:p>
+            <a:pPr marL="0" indent="0" algn="l">
+              <a:spcBef>
+                <a:spcPts val="0"/>
+              </a:spcBef>
+              <a:spcAft>
+                <a:spcPts val="650"/>
+              </a:spcAft>
+              <a:buNone/>
+              <a:defRPr sz="1350" b="0" u="none">
+                <a:solidFill>
+                  <a:srgbClr val="221F20"/>
+                </a:solidFill>
+                <a:latin typeface="Arial"/>
+                <a:ea typeface="Arial"/>
+                <a:cs typeface="Arial"/>
+              </a:defRPr>
+            </a:pPr>
+            <a:r>
+              <a:rPr sz="1350" b="0" u="none">
+                <a:solidFill>
+                  <a:srgbClr val="221F20"/>
+                </a:solidFill>
+                <a:latin typeface="Arial"/>
+                <a:ea typeface="Arial"/>
+                <a:cs typeface="Arial"/>
+              </a:rPr>
+              <a:t>Terraform values and modules: developer.hashicorp.com/terraform/language/values</a:t>
             </a:r>
           </a:p>
         </p:txBody>
@@ -41641,7 +41677,7 @@
           <p:cNvPr id="4" name="modern-gold-rule">
             <a:extLst>
               <a:ext uri="{FF2B5EF4-FFF2-40B4-BE49-F238E27FC236}">
-                <a16:creationId xmlns:a16="http://schemas.microsoft.com/office/drawing/2014/main" id="{51110244-C29C-41BA-93C1-D38AB8FBC6AA}"/>
+                <a16:creationId xmlns:a16="http://schemas.microsoft.com/office/drawing/2014/main" id="{34A19E58-5CB6-498E-B283-D624D280BDEC}"/>
               </a:ext>
             </a:extLst>
           </p:cNvPr>
@@ -41668,13 +41704,20 @@
             <a:prstDash val="solid"/>
           </a:ln>
         </p:spPr>
+        <p:txBody>
+          <a:bodyPr/>
+          <a:lstStyle/>
+          <a:p>
+            <a:endParaRPr lang="en-US"/>
+          </a:p>
+        </p:txBody>
       </p:sp>
       <p:sp>
         <p:nvSpPr>
           <p:cNvPr id="5" name="section-label">
             <a:extLst>
               <a:ext uri="{FF2B5EF4-FFF2-40B4-BE49-F238E27FC236}">
-                <a16:creationId xmlns:a16="http://schemas.microsoft.com/office/drawing/2014/main" id="{3E5535FF-6075-473F-8627-6ACD5400E9C4}"/>
+                <a16:creationId xmlns:a16="http://schemas.microsoft.com/office/drawing/2014/main" id="{0B0D2113-13E7-49E6-A1F1-DDC22359F2E4}"/>
               </a:ext>
             </a:extLst>
           </p:cNvPr>
@@ -41722,7 +41765,7 @@
                 <a:ea typeface="Arial"/>
                 <a:cs typeface="Arial"/>
               </a:rPr>
-              <a:t>CLOSE</a:t>
+              <a:t>RESOURCES</a:t>
             </a:r>
           </a:p>
         </p:txBody>
@@ -41805,7 +41848,7 @@
                 <a:ea typeface="Arial"/>
                 <a:cs typeface="Arial"/>
               </a:rPr>
-              <a:t>Capstone: one pull request, two safety nets</a:t>
+              <a:t>The habit is the same across both classes</a:t>
             </a:r>
           </a:p>
         </p:txBody>
@@ -41829,7 +41872,7 @@
         <p:spPr>
           <a:xfrm>
             <a:off x="552450" y="1181100"/>
-            <a:ext cx="7677150" cy="2333625"/>
+            <a:ext cx="7677150" cy="3048000"/>
           </a:xfrm>
         </p:spPr>
         <p:txBody>
@@ -41856,7 +41899,7 @@
               </a:defRPr>
             </a:pPr>
             <a:r>
-              <a:rPr sz="1350" b="0" u="none" dirty="0">
+              <a:rPr sz="1350" b="0" u="none">
                 <a:solidFill>
                   <a:srgbClr val="221F20"/>
                 </a:solidFill>
@@ -41864,7 +41907,7 @@
                 <a:ea typeface="Arial"/>
                 <a:cs typeface="Arial"/>
               </a:rPr>
-              <a:t>Students make one pull request that includes:</a:t>
+              <a:t>Write the intended change in code.</a:t>
             </a:r>
           </a:p>
           <a:p>
@@ -41886,7 +41929,7 @@
               </a:defRPr>
             </a:pPr>
             <a:r>
-              <a:rPr sz="1350" b="0" u="none" dirty="0">
+              <a:rPr sz="1350" b="0" u="none">
                 <a:solidFill>
                   <a:srgbClr val="221F20"/>
                 </a:solidFill>
@@ -41894,7 +41937,7 @@
                 <a:ea typeface="Arial"/>
                 <a:cs typeface="Arial"/>
               </a:rPr>
-              <a:t>An application change that must pass CI.</a:t>
+              <a:t>Run automated checks.</a:t>
             </a:r>
           </a:p>
           <a:p>
@@ -41916,7 +41959,7 @@
               </a:defRPr>
             </a:pPr>
             <a:r>
-              <a:rPr sz="1350" b="0" u="none" dirty="0">
+              <a:rPr sz="1350" b="0" u="none">
                 <a:solidFill>
                   <a:srgbClr val="221F20"/>
                 </a:solidFill>
@@ -41924,35 +41967,8 @@
                 <a:ea typeface="Arial"/>
                 <a:cs typeface="Arial"/>
               </a:rPr>
-              <a:t>A Terraform change that must pass format, validate, and test or plan review.</a:t>
+              <a:t>Preview the difference.</a:t>
             </a:r>
-          </a:p>
-          <a:p>
-            <a:pPr marL="0" indent="0" algn="l">
-              <a:spcBef>
-                <a:spcPts val="0"/>
-              </a:spcBef>
-              <a:spcAft>
-                <a:spcPts val="650"/>
-              </a:spcAft>
-              <a:buNone/>
-              <a:defRPr sz="1350" b="0" u="none">
-                <a:solidFill>
-                  <a:srgbClr val="221F20"/>
-                </a:solidFill>
-                <a:latin typeface="Arial"/>
-                <a:ea typeface="Arial"/>
-                <a:cs typeface="Arial"/>
-              </a:defRPr>
-            </a:pPr>
-            <a:endParaRPr sz="1350" b="0" u="none" dirty="0">
-              <a:solidFill>
-                <a:srgbClr val="221F20"/>
-              </a:solidFill>
-              <a:latin typeface="Arial"/>
-              <a:ea typeface="Arial"/>
-              <a:cs typeface="Arial"/>
-            </a:endParaRPr>
           </a:p>
           <a:p>
             <a:pPr marL="0" indent="0" algn="l">
@@ -41973,7 +41989,7 @@
               </a:defRPr>
             </a:pPr>
             <a:r>
-              <a:rPr sz="1350" b="0" u="none" dirty="0">
+              <a:rPr sz="1350" b="0" u="none">
                 <a:solidFill>
                   <a:srgbClr val="221F20"/>
                 </a:solidFill>
@@ -41981,7 +41997,37 @@
                 <a:ea typeface="Arial"/>
                 <a:cs typeface="Arial"/>
               </a:rPr>
-              <a:t>The merge decision uses both signals.</a:t>
+              <a:t>Review before merge or apply.</a:t>
+            </a:r>
+          </a:p>
+          <a:p>
+            <a:pPr marL="0" indent="0" algn="l">
+              <a:spcBef>
+                <a:spcPts val="0"/>
+              </a:spcBef>
+              <a:spcAft>
+                <a:spcPts val="650"/>
+              </a:spcAft>
+              <a:buNone/>
+              <a:defRPr sz="1350" b="0" u="none">
+                <a:solidFill>
+                  <a:srgbClr val="221F20"/>
+                </a:solidFill>
+                <a:latin typeface="Arial"/>
+                <a:ea typeface="Arial"/>
+                <a:cs typeface="Arial"/>
+              </a:defRPr>
+            </a:pPr>
+            <a:r>
+              <a:rPr sz="1350" b="0" u="none">
+                <a:solidFill>
+                  <a:srgbClr val="221F20"/>
+                </a:solidFill>
+                <a:latin typeface="Arial"/>
+                <a:ea typeface="Arial"/>
+                <a:cs typeface="Arial"/>
+              </a:rPr>
+              <a:t>Keep the path repeatable enough that the next change is safer.</a:t>
             </a:r>
           </a:p>
         </p:txBody>
@@ -41991,7 +42037,7 @@
           <p:cNvPr id="4" name="modern-gold-rule">
             <a:extLst>
               <a:ext uri="{FF2B5EF4-FFF2-40B4-BE49-F238E27FC236}">
-                <a16:creationId xmlns:a16="http://schemas.microsoft.com/office/drawing/2014/main" id="{7A2A091E-45DA-428B-8BC2-D0886AA7E5D1}"/>
+                <a16:creationId xmlns:a16="http://schemas.microsoft.com/office/drawing/2014/main" id="{51110244-C29C-41BA-93C1-D38AB8FBC6AA}"/>
               </a:ext>
             </a:extLst>
           </p:cNvPr>
@@ -42018,13 +42064,20 @@
             <a:prstDash val="solid"/>
           </a:ln>
         </p:spPr>
+        <p:txBody>
+          <a:bodyPr/>
+          <a:lstStyle/>
+          <a:p>
+            <a:endParaRPr lang="en-US"/>
+          </a:p>
+        </p:txBody>
       </p:sp>
       <p:sp>
         <p:nvSpPr>
           <p:cNvPr id="5" name="section-label">
             <a:extLst>
               <a:ext uri="{FF2B5EF4-FFF2-40B4-BE49-F238E27FC236}">
-                <a16:creationId xmlns:a16="http://schemas.microsoft.com/office/drawing/2014/main" id="{437780D5-177E-4202-875E-603C680B9AFA}"/>
+                <a16:creationId xmlns:a16="http://schemas.microsoft.com/office/drawing/2014/main" id="{3E5535FF-6075-473F-8627-6ACD5400E9C4}"/>
               </a:ext>
             </a:extLst>
           </p:cNvPr>
@@ -42072,459 +42125,7 @@
                 <a:ea typeface="Arial"/>
                 <a:cs typeface="Arial"/>
               </a:rPr>
-              <a:t>INTEGRATED EXERCISE</a:t>
-            </a:r>
-          </a:p>
-        </p:txBody>
-      </p:sp>
-      <p:sp>
-        <p:nvSpPr>
-          <p:cNvPr id="6" name="diagram-node">
-            <a:extLst>
-              <a:ext uri="{FF2B5EF4-FFF2-40B4-BE49-F238E27FC236}">
-                <a16:creationId xmlns:a16="http://schemas.microsoft.com/office/drawing/2014/main" id="{8F472EE6-4EF6-4E5C-A62D-88289B41198F}"/>
-              </a:ext>
-            </a:extLst>
-          </p:cNvPr>
-          <p:cNvSpPr>
-            <a:spLocks noGrp="1"/>
-          </p:cNvSpPr>
-          <p:nvPr/>
-        </p:nvSpPr>
-        <p:spPr>
-          <a:xfrm>
-            <a:off x="670063" y="3714750"/>
-            <a:ext cx="1285875" cy="514350"/>
-          </a:xfrm>
-          <a:prstGeom prst="roundRect">
-            <a:avLst>
-              <a:gd name="adj" fmla="val 14815"/>
-            </a:avLst>
-          </a:prstGeom>
-          <a:solidFill>
-            <a:srgbClr val="221F20"/>
-          </a:solidFill>
-          <a:ln w="9525">
-            <a:solidFill>
-              <a:srgbClr val="221F20"/>
-            </a:solidFill>
-            <a:prstDash val="solid"/>
-          </a:ln>
-        </p:spPr>
-        <p:txBody>
-          <a:bodyPr wrap="square" lIns="76200" tIns="95250" rIns="76200" bIns="76200" anchor="t">
-            <a:normAutofit/>
-          </a:bodyPr>
-          <a:lstStyle/>
-          <a:p>
-            <a:pPr algn="ctr">
-              <a:defRPr sz="1050" b="1" u="none">
-                <a:solidFill>
-                  <a:srgbClr val="FFFFFF"/>
-                </a:solidFill>
-                <a:latin typeface="Arial"/>
-                <a:ea typeface="Arial"/>
-                <a:cs typeface="Arial"/>
-              </a:defRPr>
-            </a:pPr>
-            <a:r>
-              <a:rPr sz="1050" b="1" u="none">
-                <a:solidFill>
-                  <a:srgbClr val="FFFFFF"/>
-                </a:solidFill>
-                <a:latin typeface="Arial"/>
-                <a:ea typeface="Arial"/>
-                <a:cs typeface="Arial"/>
-              </a:rPr>
-              <a:t>PR</a:t>
-            </a:r>
-          </a:p>
-        </p:txBody>
-      </p:sp>
-      <p:sp>
-        <p:nvSpPr>
-          <p:cNvPr id="7" name="diagram-arrow">
-            <a:extLst>
-              <a:ext uri="{FF2B5EF4-FFF2-40B4-BE49-F238E27FC236}">
-                <a16:creationId xmlns:a16="http://schemas.microsoft.com/office/drawing/2014/main" id="{2BBB1A00-2B0B-4ECE-9A66-C268D59D352A}"/>
-              </a:ext>
-            </a:extLst>
-          </p:cNvPr>
-          <p:cNvSpPr>
-            <a:spLocks noGrp="1"/>
-          </p:cNvSpPr>
-          <p:nvPr/>
-        </p:nvSpPr>
-        <p:spPr>
-          <a:xfrm>
-            <a:off x="1994038" y="3876675"/>
-            <a:ext cx="190500" cy="190500"/>
-          </a:xfrm>
-          <a:prstGeom prst="rightArrow">
-            <a:avLst/>
-          </a:prstGeom>
-          <a:solidFill>
-            <a:srgbClr val="565557"/>
-          </a:solidFill>
-          <a:ln w="0">
-            <a:solidFill>
-              <a:srgbClr val="565557"/>
-            </a:solidFill>
-            <a:prstDash val="solid"/>
-          </a:ln>
-        </p:spPr>
-      </p:sp>
-      <p:sp>
-        <p:nvSpPr>
-          <p:cNvPr id="8" name="diagram-node">
-            <a:extLst>
-              <a:ext uri="{FF2B5EF4-FFF2-40B4-BE49-F238E27FC236}">
-                <a16:creationId xmlns:a16="http://schemas.microsoft.com/office/drawing/2014/main" id="{0DA19C85-B8BD-45F8-B0F0-FE544907BDAE}"/>
-              </a:ext>
-            </a:extLst>
-          </p:cNvPr>
-          <p:cNvSpPr>
-            <a:spLocks noGrp="1"/>
-          </p:cNvSpPr>
-          <p:nvPr/>
-        </p:nvSpPr>
-        <p:spPr>
-          <a:xfrm>
-            <a:off x="2222638" y="3714750"/>
-            <a:ext cx="1285875" cy="514350"/>
-          </a:xfrm>
-          <a:prstGeom prst="roundRect">
-            <a:avLst>
-              <a:gd name="adj" fmla="val 14815"/>
-            </a:avLst>
-          </a:prstGeom>
-          <a:solidFill>
-            <a:srgbClr val="FFCC01"/>
-          </a:solidFill>
-          <a:ln w="9525">
-            <a:solidFill>
-              <a:srgbClr val="FFCC01"/>
-            </a:solidFill>
-            <a:prstDash val="solid"/>
-          </a:ln>
-        </p:spPr>
-        <p:txBody>
-          <a:bodyPr wrap="square" lIns="76200" tIns="95250" rIns="76200" bIns="76200" anchor="t">
-            <a:normAutofit/>
-          </a:bodyPr>
-          <a:lstStyle/>
-          <a:p>
-            <a:pPr algn="ctr">
-              <a:defRPr sz="1050" b="1" u="none">
-                <a:solidFill>
-                  <a:srgbClr val="221F20"/>
-                </a:solidFill>
-                <a:latin typeface="Arial"/>
-                <a:ea typeface="Arial"/>
-                <a:cs typeface="Arial"/>
-              </a:defRPr>
-            </a:pPr>
-            <a:r>
-              <a:rPr sz="1050" b="1" u="none">
-                <a:solidFill>
-                  <a:srgbClr val="221F20"/>
-                </a:solidFill>
-                <a:latin typeface="Arial"/>
-                <a:ea typeface="Arial"/>
-                <a:cs typeface="Arial"/>
-              </a:rPr>
-              <a:t>App CI</a:t>
-            </a:r>
-          </a:p>
-        </p:txBody>
-      </p:sp>
-      <p:sp>
-        <p:nvSpPr>
-          <p:cNvPr id="9" name="diagram-arrow">
-            <a:extLst>
-              <a:ext uri="{FF2B5EF4-FFF2-40B4-BE49-F238E27FC236}">
-                <a16:creationId xmlns:a16="http://schemas.microsoft.com/office/drawing/2014/main" id="{9D4F7738-9DC3-4A7F-B1F8-D2FC25009BAB}"/>
-              </a:ext>
-            </a:extLst>
-          </p:cNvPr>
-          <p:cNvSpPr>
-            <a:spLocks noGrp="1"/>
-          </p:cNvSpPr>
-          <p:nvPr/>
-        </p:nvSpPr>
-        <p:spPr>
-          <a:xfrm>
-            <a:off x="3546613" y="3876675"/>
-            <a:ext cx="190500" cy="190500"/>
-          </a:xfrm>
-          <a:prstGeom prst="rightArrow">
-            <a:avLst/>
-          </a:prstGeom>
-          <a:solidFill>
-            <a:srgbClr val="565557"/>
-          </a:solidFill>
-          <a:ln w="0">
-            <a:solidFill>
-              <a:srgbClr val="565557"/>
-            </a:solidFill>
-            <a:prstDash val="solid"/>
-          </a:ln>
-        </p:spPr>
-      </p:sp>
-      <p:sp>
-        <p:nvSpPr>
-          <p:cNvPr id="10" name="diagram-node">
-            <a:extLst>
-              <a:ext uri="{FF2B5EF4-FFF2-40B4-BE49-F238E27FC236}">
-                <a16:creationId xmlns:a16="http://schemas.microsoft.com/office/drawing/2014/main" id="{633E360C-21A8-4F35-BD11-13A9BC5D827D}"/>
-              </a:ext>
-            </a:extLst>
-          </p:cNvPr>
-          <p:cNvSpPr>
-            <a:spLocks noGrp="1"/>
-          </p:cNvSpPr>
-          <p:nvPr/>
-        </p:nvSpPr>
-        <p:spPr>
-          <a:xfrm>
-            <a:off x="3775213" y="3714750"/>
-            <a:ext cx="1285875" cy="514350"/>
-          </a:xfrm>
-          <a:prstGeom prst="roundRect">
-            <a:avLst>
-              <a:gd name="adj" fmla="val 14815"/>
-            </a:avLst>
-          </a:prstGeom>
-          <a:solidFill>
-            <a:srgbClr val="221F20"/>
-          </a:solidFill>
-          <a:ln w="9525">
-            <a:solidFill>
-              <a:srgbClr val="221F20"/>
-            </a:solidFill>
-            <a:prstDash val="solid"/>
-          </a:ln>
-        </p:spPr>
-        <p:txBody>
-          <a:bodyPr wrap="square" lIns="76200" tIns="95250" rIns="76200" bIns="76200" anchor="t">
-            <a:normAutofit/>
-          </a:bodyPr>
-          <a:lstStyle/>
-          <a:p>
-            <a:pPr algn="ctr">
-              <a:defRPr sz="1050" b="1" u="none">
-                <a:solidFill>
-                  <a:srgbClr val="FFFFFF"/>
-                </a:solidFill>
-                <a:latin typeface="Arial"/>
-                <a:ea typeface="Arial"/>
-                <a:cs typeface="Arial"/>
-              </a:defRPr>
-            </a:pPr>
-            <a:r>
-              <a:rPr sz="1050" b="1" u="none">
-                <a:solidFill>
-                  <a:srgbClr val="FFFFFF"/>
-                </a:solidFill>
-                <a:latin typeface="Arial"/>
-                <a:ea typeface="Arial"/>
-                <a:cs typeface="Arial"/>
-              </a:rPr>
-              <a:t>TF checks</a:t>
-            </a:r>
-          </a:p>
-        </p:txBody>
-      </p:sp>
-      <p:sp>
-        <p:nvSpPr>
-          <p:cNvPr id="11" name="diagram-arrow">
-            <a:extLst>
-              <a:ext uri="{FF2B5EF4-FFF2-40B4-BE49-F238E27FC236}">
-                <a16:creationId xmlns:a16="http://schemas.microsoft.com/office/drawing/2014/main" id="{4373F37B-8285-4135-985E-A19D2198A4B0}"/>
-              </a:ext>
-            </a:extLst>
-          </p:cNvPr>
-          <p:cNvSpPr>
-            <a:spLocks noGrp="1"/>
-          </p:cNvSpPr>
-          <p:nvPr/>
-        </p:nvSpPr>
-        <p:spPr>
-          <a:xfrm>
-            <a:off x="5099188" y="3876675"/>
-            <a:ext cx="190500" cy="190500"/>
-          </a:xfrm>
-          <a:prstGeom prst="rightArrow">
-            <a:avLst/>
-          </a:prstGeom>
-          <a:solidFill>
-            <a:srgbClr val="565557"/>
-          </a:solidFill>
-          <a:ln w="0">
-            <a:solidFill>
-              <a:srgbClr val="565557"/>
-            </a:solidFill>
-            <a:prstDash val="solid"/>
-          </a:ln>
-        </p:spPr>
-      </p:sp>
-      <p:sp>
-        <p:nvSpPr>
-          <p:cNvPr id="12" name="diagram-node">
-            <a:extLst>
-              <a:ext uri="{FF2B5EF4-FFF2-40B4-BE49-F238E27FC236}">
-                <a16:creationId xmlns:a16="http://schemas.microsoft.com/office/drawing/2014/main" id="{70098876-B343-4865-9273-2844D2C110EB}"/>
-              </a:ext>
-            </a:extLst>
-          </p:cNvPr>
-          <p:cNvSpPr>
-            <a:spLocks noGrp="1"/>
-          </p:cNvSpPr>
-          <p:nvPr/>
-        </p:nvSpPr>
-        <p:spPr>
-          <a:xfrm>
-            <a:off x="5327788" y="3714750"/>
-            <a:ext cx="1285875" cy="514350"/>
-          </a:xfrm>
-          <a:prstGeom prst="roundRect">
-            <a:avLst>
-              <a:gd name="adj" fmla="val 14815"/>
-            </a:avLst>
-          </a:prstGeom>
-          <a:solidFill>
-            <a:srgbClr val="FFCC01"/>
-          </a:solidFill>
-          <a:ln w="9525">
-            <a:solidFill>
-              <a:srgbClr val="FFCC01"/>
-            </a:solidFill>
-            <a:prstDash val="solid"/>
-          </a:ln>
-        </p:spPr>
-        <p:txBody>
-          <a:bodyPr wrap="square" lIns="76200" tIns="95250" rIns="76200" bIns="76200" anchor="t">
-            <a:normAutofit/>
-          </a:bodyPr>
-          <a:lstStyle/>
-          <a:p>
-            <a:pPr algn="ctr">
-              <a:defRPr sz="1050" b="1" u="none">
-                <a:solidFill>
-                  <a:srgbClr val="221F20"/>
-                </a:solidFill>
-                <a:latin typeface="Arial"/>
-                <a:ea typeface="Arial"/>
-                <a:cs typeface="Arial"/>
-              </a:defRPr>
-            </a:pPr>
-            <a:r>
-              <a:rPr sz="1050" b="1" u="none">
-                <a:solidFill>
-                  <a:srgbClr val="221F20"/>
-                </a:solidFill>
-                <a:latin typeface="Arial"/>
-                <a:ea typeface="Arial"/>
-                <a:cs typeface="Arial"/>
-              </a:rPr>
-              <a:t>Review</a:t>
-            </a:r>
-          </a:p>
-        </p:txBody>
-      </p:sp>
-      <p:sp>
-        <p:nvSpPr>
-          <p:cNvPr id="13" name="diagram-arrow">
-            <a:extLst>
-              <a:ext uri="{FF2B5EF4-FFF2-40B4-BE49-F238E27FC236}">
-                <a16:creationId xmlns:a16="http://schemas.microsoft.com/office/drawing/2014/main" id="{3A2B9819-02C1-4BAE-861F-584F618DD964}"/>
-              </a:ext>
-            </a:extLst>
-          </p:cNvPr>
-          <p:cNvSpPr>
-            <a:spLocks noGrp="1"/>
-          </p:cNvSpPr>
-          <p:nvPr/>
-        </p:nvSpPr>
-        <p:spPr>
-          <a:xfrm>
-            <a:off x="6651763" y="3876675"/>
-            <a:ext cx="190500" cy="190500"/>
-          </a:xfrm>
-          <a:prstGeom prst="rightArrow">
-            <a:avLst/>
-          </a:prstGeom>
-          <a:solidFill>
-            <a:srgbClr val="565557"/>
-          </a:solidFill>
-          <a:ln w="0">
-            <a:solidFill>
-              <a:srgbClr val="565557"/>
-            </a:solidFill>
-            <a:prstDash val="solid"/>
-          </a:ln>
-        </p:spPr>
-      </p:sp>
-      <p:sp>
-        <p:nvSpPr>
-          <p:cNvPr id="14" name="diagram-node">
-            <a:extLst>
-              <a:ext uri="{FF2B5EF4-FFF2-40B4-BE49-F238E27FC236}">
-                <a16:creationId xmlns:a16="http://schemas.microsoft.com/office/drawing/2014/main" id="{7E13B329-E8DF-42CD-8753-62D7C049A263}"/>
-              </a:ext>
-            </a:extLst>
-          </p:cNvPr>
-          <p:cNvSpPr>
-            <a:spLocks noGrp="1"/>
-          </p:cNvSpPr>
-          <p:nvPr/>
-        </p:nvSpPr>
-        <p:spPr>
-          <a:xfrm>
-            <a:off x="6880363" y="3714750"/>
-            <a:ext cx="1285875" cy="514350"/>
-          </a:xfrm>
-          <a:prstGeom prst="roundRect">
-            <a:avLst>
-              <a:gd name="adj" fmla="val 14815"/>
-            </a:avLst>
-          </a:prstGeom>
-          <a:solidFill>
-            <a:srgbClr val="221F20"/>
-          </a:solidFill>
-          <a:ln w="9525">
-            <a:solidFill>
-              <a:srgbClr val="221F20"/>
-            </a:solidFill>
-            <a:prstDash val="solid"/>
-          </a:ln>
-        </p:spPr>
-        <p:txBody>
-          <a:bodyPr wrap="square" lIns="76200" tIns="95250" rIns="76200" bIns="76200" anchor="t">
-            <a:normAutofit/>
-          </a:bodyPr>
-          <a:lstStyle/>
-          <a:p>
-            <a:pPr algn="ctr">
-              <a:defRPr sz="1050" b="1" u="none">
-                <a:solidFill>
-                  <a:srgbClr val="FFFFFF"/>
-                </a:solidFill>
-                <a:latin typeface="Arial"/>
-                <a:ea typeface="Arial"/>
-                <a:cs typeface="Arial"/>
-              </a:defRPr>
-            </a:pPr>
-            <a:r>
-              <a:rPr sz="1050" b="1" u="none">
-                <a:solidFill>
-                  <a:srgbClr val="FFFFFF"/>
-                </a:solidFill>
-                <a:latin typeface="Arial"/>
-                <a:ea typeface="Arial"/>
-                <a:cs typeface="Arial"/>
-              </a:rPr>
-              <a:t>Merge</a:t>
+              <a:t>CLOSE</a:t>
             </a:r>
           </a:p>
         </p:txBody>
@@ -42607,7 +42208,7 @@
                 <a:ea typeface="Arial"/>
                 <a:cs typeface="Arial"/>
               </a:rPr>
-              <a:t>Terraform checks fit naturally into GitHub Actions</a:t>
+              <a:t>Capstone: one pull request, two safety nets</a:t>
             </a:r>
           </a:p>
         </p:txBody>
@@ -42631,7 +42232,7 @@
         <p:spPr>
           <a:xfrm>
             <a:off x="552450" y="1181100"/>
-            <a:ext cx="7677150" cy="3048000"/>
+            <a:ext cx="7677150" cy="2333625"/>
           </a:xfrm>
         </p:spPr>
         <p:txBody>
@@ -42648,7 +42249,7 @@
                 <a:spcPts val="650"/>
               </a:spcAft>
               <a:buNone/>
-              <a:defRPr sz="1238" b="0" u="none">
+              <a:defRPr sz="1350" b="0" u="none">
                 <a:solidFill>
                   <a:srgbClr val="221F20"/>
                 </a:solidFill>
@@ -42658,7 +42259,7 @@
               </a:defRPr>
             </a:pPr>
             <a:r>
-              <a:rPr sz="1238" b="0" u="none">
+              <a:rPr sz="1350" b="0" u="none" dirty="0">
                 <a:solidFill>
                   <a:srgbClr val="221F20"/>
                 </a:solidFill>
@@ -42666,7 +42267,7 @@
                 <a:ea typeface="Arial"/>
                 <a:cs typeface="Arial"/>
               </a:rPr>
-              <a:t>Pull request checks:</a:t>
+              <a:t>Students make one pull request that includes:</a:t>
             </a:r>
           </a:p>
           <a:p>
@@ -42678,7 +42279,7 @@
                 <a:spcPts val="650"/>
               </a:spcAft>
               <a:buNone/>
-              <a:defRPr sz="1238" b="0" u="none">
+              <a:defRPr sz="1350" b="0" u="none">
                 <a:solidFill>
                   <a:srgbClr val="221F20"/>
                 </a:solidFill>
@@ -42688,7 +42289,7 @@
               </a:defRPr>
             </a:pPr>
             <a:r>
-              <a:rPr sz="1238" b="0" u="none">
+              <a:rPr sz="1350" b="0" u="none" dirty="0">
                 <a:solidFill>
                   <a:srgbClr val="221F20"/>
                 </a:solidFill>
@@ -42696,7 +42297,7 @@
                 <a:ea typeface="Arial"/>
                 <a:cs typeface="Arial"/>
               </a:rPr>
-              <a:t>terraform fmt -check</a:t>
+              <a:t>An application change that must pass CI.</a:t>
             </a:r>
           </a:p>
           <a:p>
@@ -42708,7 +42309,7 @@
                 <a:spcPts val="650"/>
               </a:spcAft>
               <a:buNone/>
-              <a:defRPr sz="1238" b="0" u="none">
+              <a:defRPr sz="1350" b="0" u="none">
                 <a:solidFill>
                   <a:srgbClr val="221F20"/>
                 </a:solidFill>
@@ -42718,7 +42319,7 @@
               </a:defRPr>
             </a:pPr>
             <a:r>
-              <a:rPr sz="1238" b="0" u="none">
+              <a:rPr sz="1350" b="0" u="none" dirty="0">
                 <a:solidFill>
                   <a:srgbClr val="221F20"/>
                 </a:solidFill>
@@ -42726,7 +42327,7 @@
                 <a:ea typeface="Arial"/>
                 <a:cs typeface="Arial"/>
               </a:rPr>
-              <a:t>terraform validate</a:t>
+              <a:t>A Terraform change that must pass format, validate, and test or plan review.</a:t>
             </a:r>
           </a:p>
           <a:p>
@@ -42738,7 +42339,7 @@
                 <a:spcPts val="650"/>
               </a:spcAft>
               <a:buNone/>
-              <a:defRPr sz="1238" b="0" u="none">
+              <a:defRPr sz="1350" b="0" u="none">
                 <a:solidFill>
                   <a:srgbClr val="221F20"/>
                 </a:solidFill>
@@ -42747,37 +42348,7 @@
                 <a:cs typeface="Arial"/>
               </a:defRPr>
             </a:pPr>
-            <a:r>
-              <a:rPr sz="1238" b="0" u="none">
-                <a:solidFill>
-                  <a:srgbClr val="221F20"/>
-                </a:solidFill>
-                <a:latin typeface="Arial"/>
-                <a:ea typeface="Arial"/>
-                <a:cs typeface="Arial"/>
-              </a:rPr>
-              <a:t>terraform plan or terraform test</a:t>
-            </a:r>
-          </a:p>
-          <a:p>
-            <a:pPr marL="0" indent="0" algn="l">
-              <a:spcBef>
-                <a:spcPts val="0"/>
-              </a:spcBef>
-              <a:spcAft>
-                <a:spcPts val="650"/>
-              </a:spcAft>
-              <a:buNone/>
-              <a:defRPr sz="1350" b="0" u="none">
-                <a:solidFill>
-                  <a:srgbClr val="221F20"/>
-                </a:solidFill>
-                <a:latin typeface="Arial"/>
-                <a:ea typeface="Arial"/>
-                <a:cs typeface="Arial"/>
-              </a:defRPr>
-            </a:pPr>
-            <a:endParaRPr sz="1238" b="0" u="none">
+            <a:endParaRPr sz="1350" b="0" u="none" dirty="0">
               <a:solidFill>
                 <a:srgbClr val="221F20"/>
               </a:solidFill>
@@ -42795,7 +42366,7 @@
                 <a:spcPts val="650"/>
               </a:spcAft>
               <a:buNone/>
-              <a:defRPr sz="1238" b="0" u="none">
+              <a:defRPr sz="1350" b="0" u="none">
                 <a:solidFill>
                   <a:srgbClr val="221F20"/>
                 </a:solidFill>
@@ -42805,7 +42376,7 @@
               </a:defRPr>
             </a:pPr>
             <a:r>
-              <a:rPr sz="1238" b="0" u="none">
+              <a:rPr sz="1350" b="0" u="none" dirty="0">
                 <a:solidFill>
                   <a:srgbClr val="221F20"/>
                 </a:solidFill>
@@ -42813,37 +42384,7 @@
                 <a:ea typeface="Arial"/>
                 <a:cs typeface="Arial"/>
               </a:rPr>
-              <a:t>Merge/apply path:</a:t>
-            </a:r>
-          </a:p>
-          <a:p>
-            <a:pPr marL="0" indent="0" algn="l">
-              <a:spcBef>
-                <a:spcPts val="0"/>
-              </a:spcBef>
-              <a:spcAft>
-                <a:spcPts val="650"/>
-              </a:spcAft>
-              <a:buNone/>
-              <a:defRPr sz="1238" b="0" u="none">
-                <a:solidFill>
-                  <a:srgbClr val="221F20"/>
-                </a:solidFill>
-                <a:latin typeface="Arial"/>
-                <a:ea typeface="Arial"/>
-                <a:cs typeface="Arial"/>
-              </a:defRPr>
-            </a:pPr>
-            <a:r>
-              <a:rPr sz="1238" b="0" u="none">
-                <a:solidFill>
-                  <a:srgbClr val="221F20"/>
-                </a:solidFill>
-                <a:latin typeface="Arial"/>
-                <a:ea typeface="Arial"/>
-                <a:cs typeface="Arial"/>
-              </a:rPr>
-              <a:t>controlled branch, protected environment, approval, and state backend</a:t>
+              <a:t>The merge decision uses both signals.</a:t>
             </a:r>
           </a:p>
         </p:txBody>
@@ -42853,7 +42394,7 @@
           <p:cNvPr id="4" name="modern-gold-rule">
             <a:extLst>
               <a:ext uri="{FF2B5EF4-FFF2-40B4-BE49-F238E27FC236}">
-                <a16:creationId xmlns:a16="http://schemas.microsoft.com/office/drawing/2014/main" id="{1F7CA161-5C03-4904-BD24-B12A7675D902}"/>
+                <a16:creationId xmlns:a16="http://schemas.microsoft.com/office/drawing/2014/main" id="{7A2A091E-45DA-428B-8BC2-D0886AA7E5D1}"/>
               </a:ext>
             </a:extLst>
           </p:cNvPr>
@@ -42880,13 +42421,20 @@
             <a:prstDash val="solid"/>
           </a:ln>
         </p:spPr>
+        <p:txBody>
+          <a:bodyPr/>
+          <a:lstStyle/>
+          <a:p>
+            <a:endParaRPr lang="en-US"/>
+          </a:p>
+        </p:txBody>
       </p:sp>
       <p:sp>
         <p:nvSpPr>
           <p:cNvPr id="5" name="section-label">
             <a:extLst>
               <a:ext uri="{FF2B5EF4-FFF2-40B4-BE49-F238E27FC236}">
-                <a16:creationId xmlns:a16="http://schemas.microsoft.com/office/drawing/2014/main" id="{595E4000-6A59-400F-B823-3ECB8E99EF24}"/>
+                <a16:creationId xmlns:a16="http://schemas.microsoft.com/office/drawing/2014/main" id="{437780D5-177E-4202-875E-603C680B9AFA}"/>
               </a:ext>
             </a:extLst>
           </p:cNvPr>
@@ -42934,17 +42482,17 @@
                 <a:ea typeface="Arial"/>
                 <a:cs typeface="Arial"/>
               </a:rPr>
-              <a:t>CI/CD BRIDGE</a:t>
+              <a:t>INTEGRATED EXERCISE</a:t>
             </a:r>
           </a:p>
         </p:txBody>
       </p:sp>
       <p:sp>
         <p:nvSpPr>
-          <p:cNvPr id="6" name="code-snippet">
+          <p:cNvPr id="6" name="diagram-node">
             <a:extLst>
               <a:ext uri="{FF2B5EF4-FFF2-40B4-BE49-F238E27FC236}">
-                <a16:creationId xmlns:a16="http://schemas.microsoft.com/office/drawing/2014/main" id="{774444D9-38F5-486C-8B7B-E0B2F14A9F6B}"/>
+                <a16:creationId xmlns:a16="http://schemas.microsoft.com/office/drawing/2014/main" id="{8F472EE6-4EF6-4E5C-A62D-88289B41198F}"/>
               </a:ext>
             </a:extLst>
           </p:cNvPr>
@@ -42955,117 +42503,466 @@
         </p:nvSpPr>
         <p:spPr>
           <a:xfrm>
-            <a:off x="552450" y="3213155"/>
-            <a:ext cx="7620000" cy="1695450"/>
+            <a:off x="670063" y="3714750"/>
+            <a:ext cx="1285875" cy="514350"/>
           </a:xfrm>
-          <a:prstGeom prst="rect">
-            <a:avLst/>
+          <a:prstGeom prst="roundRect">
+            <a:avLst>
+              <a:gd name="adj" fmla="val 14815"/>
+            </a:avLst>
           </a:prstGeom>
           <a:solidFill>
-            <a:srgbClr val="F7F7F5"/>
+            <a:srgbClr val="221F20"/>
           </a:solidFill>
           <a:ln w="9525">
             <a:solidFill>
-              <a:srgbClr val="D5D5D7"/>
+              <a:srgbClr val="221F20"/>
             </a:solidFill>
             <a:prstDash val="solid"/>
           </a:ln>
         </p:spPr>
         <p:txBody>
-          <a:bodyPr wrap="square" lIns="133350" tIns="114300" rIns="133350" bIns="95250">
+          <a:bodyPr wrap="square" lIns="76200" tIns="95250" rIns="76200" bIns="76200" anchor="t">
             <a:normAutofit/>
           </a:bodyPr>
           <a:lstStyle/>
           <a:p>
-            <a:pPr>
-              <a:defRPr sz="975">
-                <a:solidFill>
-                  <a:srgbClr val="221F20"/>
-                </a:solidFill>
-                <a:latin typeface="Courier New"/>
-                <a:ea typeface="Courier New"/>
-                <a:cs typeface="Courier New"/>
+            <a:pPr algn="ctr">
+              <a:defRPr sz="1050" b="1" u="none">
+                <a:solidFill>
+                  <a:srgbClr val="FFFFFF"/>
+                </a:solidFill>
+                <a:latin typeface="Arial"/>
+                <a:ea typeface="Arial"/>
+                <a:cs typeface="Arial"/>
               </a:defRPr>
             </a:pPr>
             <a:r>
-              <a:rPr sz="975">
+              <a:rPr sz="1050" b="1" u="none">
+                <a:solidFill>
+                  <a:srgbClr val="FFFFFF"/>
+                </a:solidFill>
+                <a:latin typeface="Arial"/>
+                <a:ea typeface="Arial"/>
+                <a:cs typeface="Arial"/>
+              </a:rPr>
+              <a:t>PR</a:t>
+            </a:r>
+          </a:p>
+        </p:txBody>
+      </p:sp>
+      <p:sp>
+        <p:nvSpPr>
+          <p:cNvPr id="7" name="diagram-arrow">
+            <a:extLst>
+              <a:ext uri="{FF2B5EF4-FFF2-40B4-BE49-F238E27FC236}">
+                <a16:creationId xmlns:a16="http://schemas.microsoft.com/office/drawing/2014/main" id="{2BBB1A00-2B0B-4ECE-9A66-C268D59D352A}"/>
+              </a:ext>
+            </a:extLst>
+          </p:cNvPr>
+          <p:cNvSpPr>
+            <a:spLocks noGrp="1"/>
+          </p:cNvSpPr>
+          <p:nvPr/>
+        </p:nvSpPr>
+        <p:spPr>
+          <a:xfrm>
+            <a:off x="1994038" y="3876675"/>
+            <a:ext cx="190500" cy="190500"/>
+          </a:xfrm>
+          <a:prstGeom prst="rightArrow">
+            <a:avLst/>
+          </a:prstGeom>
+          <a:solidFill>
+            <a:srgbClr val="565557"/>
+          </a:solidFill>
+          <a:ln w="0">
+            <a:solidFill>
+              <a:srgbClr val="565557"/>
+            </a:solidFill>
+            <a:prstDash val="solid"/>
+          </a:ln>
+        </p:spPr>
+        <p:txBody>
+          <a:bodyPr/>
+          <a:lstStyle/>
+          <a:p>
+            <a:endParaRPr lang="en-US"/>
+          </a:p>
+        </p:txBody>
+      </p:sp>
+      <p:sp>
+        <p:nvSpPr>
+          <p:cNvPr id="8" name="diagram-node">
+            <a:extLst>
+              <a:ext uri="{FF2B5EF4-FFF2-40B4-BE49-F238E27FC236}">
+                <a16:creationId xmlns:a16="http://schemas.microsoft.com/office/drawing/2014/main" id="{0DA19C85-B8BD-45F8-B0F0-FE544907BDAE}"/>
+              </a:ext>
+            </a:extLst>
+          </p:cNvPr>
+          <p:cNvSpPr>
+            <a:spLocks noGrp="1"/>
+          </p:cNvSpPr>
+          <p:nvPr/>
+        </p:nvSpPr>
+        <p:spPr>
+          <a:xfrm>
+            <a:off x="2222638" y="3714750"/>
+            <a:ext cx="1285875" cy="514350"/>
+          </a:xfrm>
+          <a:prstGeom prst="roundRect">
+            <a:avLst>
+              <a:gd name="adj" fmla="val 14815"/>
+            </a:avLst>
+          </a:prstGeom>
+          <a:solidFill>
+            <a:srgbClr val="FFCC01"/>
+          </a:solidFill>
+          <a:ln w="9525">
+            <a:solidFill>
+              <a:srgbClr val="FFCC01"/>
+            </a:solidFill>
+            <a:prstDash val="solid"/>
+          </a:ln>
+        </p:spPr>
+        <p:txBody>
+          <a:bodyPr wrap="square" lIns="76200" tIns="95250" rIns="76200" bIns="76200" anchor="t">
+            <a:normAutofit/>
+          </a:bodyPr>
+          <a:lstStyle/>
+          <a:p>
+            <a:pPr algn="ctr">
+              <a:defRPr sz="1050" b="1" u="none">
                 <a:solidFill>
                   <a:srgbClr val="221F20"/>
                 </a:solidFill>
-                <a:latin typeface="Courier New"/>
-                <a:ea typeface="Courier New"/>
-                <a:cs typeface="Courier New"/>
-              </a:rPr>
-              <a:t>terraform init</a:t>
-            </a:r>
-          </a:p>
-          <a:p>
-            <a:pPr>
-              <a:defRPr sz="975">
-                <a:solidFill>
-                  <a:srgbClr val="221F20"/>
-                </a:solidFill>
-                <a:latin typeface="Courier New"/>
-                <a:ea typeface="Courier New"/>
-                <a:cs typeface="Courier New"/>
+                <a:latin typeface="Arial"/>
+                <a:ea typeface="Arial"/>
+                <a:cs typeface="Arial"/>
               </a:defRPr>
             </a:pPr>
             <a:r>
-              <a:rPr sz="975">
+              <a:rPr sz="1050" b="1" u="none">
                 <a:solidFill>
                   <a:srgbClr val="221F20"/>
                 </a:solidFill>
-                <a:latin typeface="Courier New"/>
-                <a:ea typeface="Courier New"/>
-                <a:cs typeface="Courier New"/>
+                <a:latin typeface="Arial"/>
+                <a:ea typeface="Arial"/>
+                <a:cs typeface="Arial"/>
               </a:rPr>
-              <a:t>terraform fmt -check</a:t>
+              <a:t>App CI</a:t>
             </a:r>
           </a:p>
-          <a:p>
-            <a:pPr>
-              <a:defRPr sz="975">
-                <a:solidFill>
-                  <a:srgbClr val="221F20"/>
-                </a:solidFill>
-                <a:latin typeface="Courier New"/>
-                <a:ea typeface="Courier New"/>
-                <a:cs typeface="Courier New"/>
+        </p:txBody>
+      </p:sp>
+      <p:sp>
+        <p:nvSpPr>
+          <p:cNvPr id="9" name="diagram-arrow">
+            <a:extLst>
+              <a:ext uri="{FF2B5EF4-FFF2-40B4-BE49-F238E27FC236}">
+                <a16:creationId xmlns:a16="http://schemas.microsoft.com/office/drawing/2014/main" id="{9D4F7738-9DC3-4A7F-B1F8-D2FC25009BAB}"/>
+              </a:ext>
+            </a:extLst>
+          </p:cNvPr>
+          <p:cNvSpPr>
+            <a:spLocks noGrp="1"/>
+          </p:cNvSpPr>
+          <p:nvPr/>
+        </p:nvSpPr>
+        <p:spPr>
+          <a:xfrm>
+            <a:off x="3546613" y="3876675"/>
+            <a:ext cx="190500" cy="190500"/>
+          </a:xfrm>
+          <a:prstGeom prst="rightArrow">
+            <a:avLst/>
+          </a:prstGeom>
+          <a:solidFill>
+            <a:srgbClr val="565557"/>
+          </a:solidFill>
+          <a:ln w="0">
+            <a:solidFill>
+              <a:srgbClr val="565557"/>
+            </a:solidFill>
+            <a:prstDash val="solid"/>
+          </a:ln>
+        </p:spPr>
+        <p:txBody>
+          <a:bodyPr/>
+          <a:lstStyle/>
+          <a:p>
+            <a:endParaRPr lang="en-US"/>
+          </a:p>
+        </p:txBody>
+      </p:sp>
+      <p:sp>
+        <p:nvSpPr>
+          <p:cNvPr id="10" name="diagram-node">
+            <a:extLst>
+              <a:ext uri="{FF2B5EF4-FFF2-40B4-BE49-F238E27FC236}">
+                <a16:creationId xmlns:a16="http://schemas.microsoft.com/office/drawing/2014/main" id="{633E360C-21A8-4F35-BD11-13A9BC5D827D}"/>
+              </a:ext>
+            </a:extLst>
+          </p:cNvPr>
+          <p:cNvSpPr>
+            <a:spLocks noGrp="1"/>
+          </p:cNvSpPr>
+          <p:nvPr/>
+        </p:nvSpPr>
+        <p:spPr>
+          <a:xfrm>
+            <a:off x="3775213" y="3714750"/>
+            <a:ext cx="1285875" cy="514350"/>
+          </a:xfrm>
+          <a:prstGeom prst="roundRect">
+            <a:avLst>
+              <a:gd name="adj" fmla="val 14815"/>
+            </a:avLst>
+          </a:prstGeom>
+          <a:solidFill>
+            <a:srgbClr val="221F20"/>
+          </a:solidFill>
+          <a:ln w="9525">
+            <a:solidFill>
+              <a:srgbClr val="221F20"/>
+            </a:solidFill>
+            <a:prstDash val="solid"/>
+          </a:ln>
+        </p:spPr>
+        <p:txBody>
+          <a:bodyPr wrap="square" lIns="76200" tIns="95250" rIns="76200" bIns="76200" anchor="t">
+            <a:normAutofit/>
+          </a:bodyPr>
+          <a:lstStyle/>
+          <a:p>
+            <a:pPr algn="ctr">
+              <a:defRPr sz="1050" b="1" u="none">
+                <a:solidFill>
+                  <a:srgbClr val="FFFFFF"/>
+                </a:solidFill>
+                <a:latin typeface="Arial"/>
+                <a:ea typeface="Arial"/>
+                <a:cs typeface="Arial"/>
               </a:defRPr>
             </a:pPr>
             <a:r>
-              <a:rPr sz="975">
+              <a:rPr sz="1050" b="1" u="none">
+                <a:solidFill>
+                  <a:srgbClr val="FFFFFF"/>
+                </a:solidFill>
+                <a:latin typeface="Arial"/>
+                <a:ea typeface="Arial"/>
+                <a:cs typeface="Arial"/>
+              </a:rPr>
+              <a:t>TF checks</a:t>
+            </a:r>
+          </a:p>
+        </p:txBody>
+      </p:sp>
+      <p:sp>
+        <p:nvSpPr>
+          <p:cNvPr id="11" name="diagram-arrow">
+            <a:extLst>
+              <a:ext uri="{FF2B5EF4-FFF2-40B4-BE49-F238E27FC236}">
+                <a16:creationId xmlns:a16="http://schemas.microsoft.com/office/drawing/2014/main" id="{4373F37B-8285-4135-985E-A19D2198A4B0}"/>
+              </a:ext>
+            </a:extLst>
+          </p:cNvPr>
+          <p:cNvSpPr>
+            <a:spLocks noGrp="1"/>
+          </p:cNvSpPr>
+          <p:nvPr/>
+        </p:nvSpPr>
+        <p:spPr>
+          <a:xfrm>
+            <a:off x="5099188" y="3876675"/>
+            <a:ext cx="190500" cy="190500"/>
+          </a:xfrm>
+          <a:prstGeom prst="rightArrow">
+            <a:avLst/>
+          </a:prstGeom>
+          <a:solidFill>
+            <a:srgbClr val="565557"/>
+          </a:solidFill>
+          <a:ln w="0">
+            <a:solidFill>
+              <a:srgbClr val="565557"/>
+            </a:solidFill>
+            <a:prstDash val="solid"/>
+          </a:ln>
+        </p:spPr>
+        <p:txBody>
+          <a:bodyPr/>
+          <a:lstStyle/>
+          <a:p>
+            <a:endParaRPr lang="en-US"/>
+          </a:p>
+        </p:txBody>
+      </p:sp>
+      <p:sp>
+        <p:nvSpPr>
+          <p:cNvPr id="12" name="diagram-node">
+            <a:extLst>
+              <a:ext uri="{FF2B5EF4-FFF2-40B4-BE49-F238E27FC236}">
+                <a16:creationId xmlns:a16="http://schemas.microsoft.com/office/drawing/2014/main" id="{70098876-B343-4865-9273-2844D2C110EB}"/>
+              </a:ext>
+            </a:extLst>
+          </p:cNvPr>
+          <p:cNvSpPr>
+            <a:spLocks noGrp="1"/>
+          </p:cNvSpPr>
+          <p:nvPr/>
+        </p:nvSpPr>
+        <p:spPr>
+          <a:xfrm>
+            <a:off x="5327788" y="3714750"/>
+            <a:ext cx="1285875" cy="514350"/>
+          </a:xfrm>
+          <a:prstGeom prst="roundRect">
+            <a:avLst>
+              <a:gd name="adj" fmla="val 14815"/>
+            </a:avLst>
+          </a:prstGeom>
+          <a:solidFill>
+            <a:srgbClr val="FFCC01"/>
+          </a:solidFill>
+          <a:ln w="9525">
+            <a:solidFill>
+              <a:srgbClr val="FFCC01"/>
+            </a:solidFill>
+            <a:prstDash val="solid"/>
+          </a:ln>
+        </p:spPr>
+        <p:txBody>
+          <a:bodyPr wrap="square" lIns="76200" tIns="95250" rIns="76200" bIns="76200" anchor="t">
+            <a:normAutofit/>
+          </a:bodyPr>
+          <a:lstStyle/>
+          <a:p>
+            <a:pPr algn="ctr">
+              <a:defRPr sz="1050" b="1" u="none">
                 <a:solidFill>
                   <a:srgbClr val="221F20"/>
                 </a:solidFill>
-                <a:latin typeface="Courier New"/>
-                <a:ea typeface="Courier New"/>
-                <a:cs typeface="Courier New"/>
-              </a:rPr>
-              <a:t>terraform validate</a:t>
-            </a:r>
-          </a:p>
-          <a:p>
-            <a:pPr>
-              <a:defRPr sz="975">
-                <a:solidFill>
-                  <a:srgbClr val="221F20"/>
-                </a:solidFill>
-                <a:latin typeface="Courier New"/>
-                <a:ea typeface="Courier New"/>
-                <a:cs typeface="Courier New"/>
+                <a:latin typeface="Arial"/>
+                <a:ea typeface="Arial"/>
+                <a:cs typeface="Arial"/>
               </a:defRPr>
             </a:pPr>
             <a:r>
-              <a:rPr sz="975">
+              <a:rPr sz="1050" b="1" u="none">
                 <a:solidFill>
                   <a:srgbClr val="221F20"/>
                 </a:solidFill>
-                <a:latin typeface="Courier New"/>
-                <a:ea typeface="Courier New"/>
-                <a:cs typeface="Courier New"/>
+                <a:latin typeface="Arial"/>
+                <a:ea typeface="Arial"/>
+                <a:cs typeface="Arial"/>
               </a:rPr>
-              <a:t>terraform test</a:t>
+              <a:t>Review</a:t>
+            </a:r>
+          </a:p>
+        </p:txBody>
+      </p:sp>
+      <p:sp>
+        <p:nvSpPr>
+          <p:cNvPr id="13" name="diagram-arrow">
+            <a:extLst>
+              <a:ext uri="{FF2B5EF4-FFF2-40B4-BE49-F238E27FC236}">
+                <a16:creationId xmlns:a16="http://schemas.microsoft.com/office/drawing/2014/main" id="{3A2B9819-02C1-4BAE-861F-584F618DD964}"/>
+              </a:ext>
+            </a:extLst>
+          </p:cNvPr>
+          <p:cNvSpPr>
+            <a:spLocks noGrp="1"/>
+          </p:cNvSpPr>
+          <p:nvPr/>
+        </p:nvSpPr>
+        <p:spPr>
+          <a:xfrm>
+            <a:off x="6651763" y="3876675"/>
+            <a:ext cx="190500" cy="190500"/>
+          </a:xfrm>
+          <a:prstGeom prst="rightArrow">
+            <a:avLst/>
+          </a:prstGeom>
+          <a:solidFill>
+            <a:srgbClr val="565557"/>
+          </a:solidFill>
+          <a:ln w="0">
+            <a:solidFill>
+              <a:srgbClr val="565557"/>
+            </a:solidFill>
+            <a:prstDash val="solid"/>
+          </a:ln>
+        </p:spPr>
+        <p:txBody>
+          <a:bodyPr/>
+          <a:lstStyle/>
+          <a:p>
+            <a:endParaRPr lang="en-US"/>
+          </a:p>
+        </p:txBody>
+      </p:sp>
+      <p:sp>
+        <p:nvSpPr>
+          <p:cNvPr id="14" name="diagram-node">
+            <a:extLst>
+              <a:ext uri="{FF2B5EF4-FFF2-40B4-BE49-F238E27FC236}">
+                <a16:creationId xmlns:a16="http://schemas.microsoft.com/office/drawing/2014/main" id="{7E13B329-E8DF-42CD-8753-62D7C049A263}"/>
+              </a:ext>
+            </a:extLst>
+          </p:cNvPr>
+          <p:cNvSpPr>
+            <a:spLocks noGrp="1"/>
+          </p:cNvSpPr>
+          <p:nvPr/>
+        </p:nvSpPr>
+        <p:spPr>
+          <a:xfrm>
+            <a:off x="6880363" y="3714750"/>
+            <a:ext cx="1285875" cy="514350"/>
+          </a:xfrm>
+          <a:prstGeom prst="roundRect">
+            <a:avLst>
+              <a:gd name="adj" fmla="val 14815"/>
+            </a:avLst>
+          </a:prstGeom>
+          <a:solidFill>
+            <a:srgbClr val="221F20"/>
+          </a:solidFill>
+          <a:ln w="9525">
+            <a:solidFill>
+              <a:srgbClr val="221F20"/>
+            </a:solidFill>
+            <a:prstDash val="solid"/>
+          </a:ln>
+        </p:spPr>
+        <p:txBody>
+          <a:bodyPr wrap="square" lIns="76200" tIns="95250" rIns="76200" bIns="76200" anchor="t">
+            <a:normAutofit/>
+          </a:bodyPr>
+          <a:lstStyle/>
+          <a:p>
+            <a:pPr algn="ctr">
+              <a:defRPr sz="1050" b="1" u="none">
+                <a:solidFill>
+                  <a:srgbClr val="FFFFFF"/>
+                </a:solidFill>
+                <a:latin typeface="Arial"/>
+                <a:ea typeface="Arial"/>
+                <a:cs typeface="Arial"/>
+              </a:defRPr>
+            </a:pPr>
+            <a:r>
+              <a:rPr sz="1050" b="1" u="none">
+                <a:solidFill>
+                  <a:srgbClr val="FFFFFF"/>
+                </a:solidFill>
+                <a:latin typeface="Arial"/>
+                <a:ea typeface="Arial"/>
+                <a:cs typeface="Arial"/>
+              </a:rPr>
+              <a:t>Merge</a:t>
             </a:r>
           </a:p>
         </p:txBody>
@@ -43148,7 +43045,7 @@
                 <a:ea typeface="Arial"/>
                 <a:cs typeface="Arial"/>
               </a:rPr>
-              <a:t>State is Terraform's memory</a:t>
+              <a:t>Terraform checks fit naturally into GitHub Actions</a:t>
             </a:r>
           </a:p>
         </p:txBody>
@@ -43207,7 +43104,7 @@
                 <a:ea typeface="Arial"/>
                 <a:cs typeface="Arial"/>
               </a:rPr>
-              <a:t>State records Terraform's last known object data.</a:t>
+              <a:t>Pull request checks:</a:t>
             </a:r>
           </a:p>
           <a:p>
@@ -43237,7 +43134,7 @@
                 <a:ea typeface="Arial"/>
                 <a:cs typeface="Arial"/>
               </a:rPr>
-              <a:t>The plan compares configuration with state.</a:t>
+              <a:t>terraform fmt -check</a:t>
             </a:r>
           </a:p>
           <a:p>
@@ -43267,7 +43164,7 @@
                 <a:ea typeface="Arial"/>
                 <a:cs typeface="Arial"/>
               </a:rPr>
-              <a:t>Outputs help humans and automation read useful results.</a:t>
+              <a:t>terraform validate</a:t>
             </a:r>
           </a:p>
           <a:p>
@@ -43297,8 +43194,35 @@
                 <a:ea typeface="Arial"/>
                 <a:cs typeface="Arial"/>
               </a:rPr>
-              <a:t>Destroy cleans up managed objects from state and the target system.</a:t>
+              <a:t>terraform plan or terraform test</a:t>
             </a:r>
+          </a:p>
+          <a:p>
+            <a:pPr marL="0" indent="0" algn="l">
+              <a:spcBef>
+                <a:spcPts val="0"/>
+              </a:spcBef>
+              <a:spcAft>
+                <a:spcPts val="650"/>
+              </a:spcAft>
+              <a:buNone/>
+              <a:defRPr sz="1350" b="0" u="none">
+                <a:solidFill>
+                  <a:srgbClr val="221F20"/>
+                </a:solidFill>
+                <a:latin typeface="Arial"/>
+                <a:ea typeface="Arial"/>
+                <a:cs typeface="Arial"/>
+              </a:defRPr>
+            </a:pPr>
+            <a:endParaRPr sz="1238" b="0" u="none">
+              <a:solidFill>
+                <a:srgbClr val="221F20"/>
+              </a:solidFill>
+              <a:latin typeface="Arial"/>
+              <a:ea typeface="Arial"/>
+              <a:cs typeface="Arial"/>
+            </a:endParaRPr>
           </a:p>
           <a:p>
             <a:pPr marL="0" indent="0" algn="l">
@@ -43327,7 +43251,37 @@
                 <a:ea typeface="Arial"/>
                 <a:cs typeface="Arial"/>
               </a:rPr>
-              <a:t>Never treat state casually when real providers and secrets are involved.</a:t>
+              <a:t>Merge/apply path:</a:t>
+            </a:r>
+          </a:p>
+          <a:p>
+            <a:pPr marL="0" indent="0" algn="l">
+              <a:spcBef>
+                <a:spcPts val="0"/>
+              </a:spcBef>
+              <a:spcAft>
+                <a:spcPts val="650"/>
+              </a:spcAft>
+              <a:buNone/>
+              <a:defRPr sz="1238" b="0" u="none">
+                <a:solidFill>
+                  <a:srgbClr val="221F20"/>
+                </a:solidFill>
+                <a:latin typeface="Arial"/>
+                <a:ea typeface="Arial"/>
+                <a:cs typeface="Arial"/>
+              </a:defRPr>
+            </a:pPr>
+            <a:r>
+              <a:rPr sz="1238" b="0" u="none">
+                <a:solidFill>
+                  <a:srgbClr val="221F20"/>
+                </a:solidFill>
+                <a:latin typeface="Arial"/>
+                <a:ea typeface="Arial"/>
+                <a:cs typeface="Arial"/>
+              </a:rPr>
+              <a:t>controlled branch, protected environment, approval, and state backend</a:t>
             </a:r>
           </a:p>
         </p:txBody>
@@ -43337,7 +43291,7 @@
           <p:cNvPr id="4" name="modern-gold-rule">
             <a:extLst>
               <a:ext uri="{FF2B5EF4-FFF2-40B4-BE49-F238E27FC236}">
-                <a16:creationId xmlns:a16="http://schemas.microsoft.com/office/drawing/2014/main" id="{22C2543E-7EF5-4397-893F-C73A74D56949}"/>
+                <a16:creationId xmlns:a16="http://schemas.microsoft.com/office/drawing/2014/main" id="{1F7CA161-5C03-4904-BD24-B12A7675D902}"/>
               </a:ext>
             </a:extLst>
           </p:cNvPr>
@@ -43364,13 +43318,20 @@
             <a:prstDash val="solid"/>
           </a:ln>
         </p:spPr>
+        <p:txBody>
+          <a:bodyPr/>
+          <a:lstStyle/>
+          <a:p>
+            <a:endParaRPr lang="en-US"/>
+          </a:p>
+        </p:txBody>
       </p:sp>
       <p:sp>
         <p:nvSpPr>
           <p:cNvPr id="5" name="section-label">
             <a:extLst>
               <a:ext uri="{FF2B5EF4-FFF2-40B4-BE49-F238E27FC236}">
-                <a16:creationId xmlns:a16="http://schemas.microsoft.com/office/drawing/2014/main" id="{D71F0DCB-2C44-438F-BF13-868AAA374838}"/>
+                <a16:creationId xmlns:a16="http://schemas.microsoft.com/office/drawing/2014/main" id="{595E4000-6A59-400F-B823-3ECB8E99EF24}"/>
               </a:ext>
             </a:extLst>
           </p:cNvPr>
@@ -43418,7 +43379,7 @@
                 <a:ea typeface="Arial"/>
                 <a:cs typeface="Arial"/>
               </a:rPr>
-              <a:t>STATE AND CLEANUP</a:t>
+              <a:t>CI/CD BRIDGE</a:t>
             </a:r>
           </a:p>
         </p:txBody>
@@ -43428,7 +43389,7 @@
           <p:cNvPr id="6" name="code-snippet">
             <a:extLst>
               <a:ext uri="{FF2B5EF4-FFF2-40B4-BE49-F238E27FC236}">
-                <a16:creationId xmlns:a16="http://schemas.microsoft.com/office/drawing/2014/main" id="{FB105FDB-0CC0-4B8E-961E-FB1A460EE67B}"/>
+                <a16:creationId xmlns:a16="http://schemas.microsoft.com/office/drawing/2014/main" id="{774444D9-38F5-486C-8B7B-E0B2F14A9F6B}"/>
               </a:ext>
             </a:extLst>
           </p:cNvPr>
@@ -43439,7 +43400,7 @@
         </p:nvSpPr>
         <p:spPr>
           <a:xfrm>
-            <a:off x="552450" y="2705100"/>
+            <a:off x="552450" y="3213155"/>
             <a:ext cx="7620000" cy="1695450"/>
           </a:xfrm>
           <a:prstGeom prst="rect">
@@ -43480,7 +43441,7 @@
                 <a:ea typeface="Courier New"/>
                 <a:cs typeface="Courier New"/>
               </a:rPr>
-              <a:t>terraform state list</a:t>
+              <a:t>terraform init</a:t>
             </a:r>
           </a:p>
           <a:p>
@@ -43503,7 +43464,7 @@
                 <a:ea typeface="Courier New"/>
                 <a:cs typeface="Courier New"/>
               </a:rPr>
-              <a:t>terraform state show terraform_data.release</a:t>
+              <a:t>terraform fmt -check</a:t>
             </a:r>
           </a:p>
           <a:p>
@@ -43526,7 +43487,7 @@
                 <a:ea typeface="Courier New"/>
                 <a:cs typeface="Courier New"/>
               </a:rPr>
-              <a:t>terraform output -json</a:t>
+              <a:t>terraform validate</a:t>
             </a:r>
           </a:p>
           <a:p>
@@ -43549,7 +43510,7 @@
                 <a:ea typeface="Courier New"/>
                 <a:cs typeface="Courier New"/>
               </a:rPr>
-              <a:t>terraform destroy</a:t>
+              <a:t>terraform test</a:t>
             </a:r>
           </a:p>
         </p:txBody>
@@ -43856,7 +43817,7 @@
               </a:defRPr>
             </a:pPr>
             <a:r>
-              <a:rPr sz="2175" b="1" u="none" dirty="0">
+              <a:rPr sz="2175" b="1" u="none">
                 <a:solidFill>
                   <a:srgbClr val="221F20"/>
                 </a:solidFill>
@@ -43864,29 +43825,7 @@
                 <a:ea typeface="Arial"/>
                 <a:cs typeface="Arial"/>
               </a:rPr>
-              <a:t>Lab </a:t>
-            </a:r>
-            <a:r>
-              <a:rPr lang="en-US" sz="2175" b="1" u="none" dirty="0">
-                <a:solidFill>
-                  <a:srgbClr val="221F20"/>
-                </a:solidFill>
-                <a:latin typeface="Arial"/>
-                <a:ea typeface="Arial"/>
-                <a:cs typeface="Arial"/>
-              </a:rPr>
-              <a:t>1</a:t>
-            </a:r>
-            <a:r>
-              <a:rPr sz="2175" b="1" u="none" dirty="0">
-                <a:solidFill>
-                  <a:srgbClr val="221F20"/>
-                </a:solidFill>
-                <a:latin typeface="Arial"/>
-                <a:ea typeface="Arial"/>
-                <a:cs typeface="Arial"/>
-              </a:rPr>
-              <a:t>: modules turn repeated logic into an interface</a:t>
+              <a:t>State is Terraform's memory</a:t>
             </a:r>
           </a:p>
         </p:txBody>
@@ -43945,7 +43884,7 @@
                 <a:ea typeface="Arial"/>
                 <a:cs typeface="Arial"/>
               </a:rPr>
-              <a:t>Goal: move service-release logic into a child module.</a:t>
+              <a:t>State records Terraform's last known object data.</a:t>
             </a:r>
           </a:p>
           <a:p>
@@ -43975,7 +43914,7 @@
                 <a:ea typeface="Arial"/>
                 <a:cs typeface="Arial"/>
               </a:rPr>
-              <a:t>Inputs define what the module needs.</a:t>
+              <a:t>The plan compares configuration with state.</a:t>
             </a:r>
           </a:p>
           <a:p>
@@ -44005,7 +43944,7 @@
                 <a:ea typeface="Arial"/>
                 <a:cs typeface="Arial"/>
               </a:rPr>
-              <a:t>Outputs define what the caller receives.</a:t>
+              <a:t>Outputs help humans and automation read useful results.</a:t>
             </a:r>
           </a:p>
           <a:p>
@@ -44035,7 +43974,37 @@
                 <a:ea typeface="Arial"/>
                 <a:cs typeface="Arial"/>
               </a:rPr>
-              <a:t>The root module calls the child module with a source path.</a:t>
+              <a:t>Destroy cleans up managed objects from state and the target system.</a:t>
+            </a:r>
+          </a:p>
+          <a:p>
+            <a:pPr marL="0" indent="0" algn="l">
+              <a:spcBef>
+                <a:spcPts val="0"/>
+              </a:spcBef>
+              <a:spcAft>
+                <a:spcPts val="650"/>
+              </a:spcAft>
+              <a:buNone/>
+              <a:defRPr sz="1238" b="0" u="none">
+                <a:solidFill>
+                  <a:srgbClr val="221F20"/>
+                </a:solidFill>
+                <a:latin typeface="Arial"/>
+                <a:ea typeface="Arial"/>
+                <a:cs typeface="Arial"/>
+              </a:defRPr>
+            </a:pPr>
+            <a:r>
+              <a:rPr sz="1238" b="0" u="none">
+                <a:solidFill>
+                  <a:srgbClr val="221F20"/>
+                </a:solidFill>
+                <a:latin typeface="Arial"/>
+                <a:ea typeface="Arial"/>
+                <a:cs typeface="Arial"/>
+              </a:rPr>
+              <a:t>Never treat state casually when real providers and secrets are involved.</a:t>
             </a:r>
           </a:p>
         </p:txBody>
@@ -44045,7 +44014,7 @@
           <p:cNvPr id="4" name="modern-gold-rule">
             <a:extLst>
               <a:ext uri="{FF2B5EF4-FFF2-40B4-BE49-F238E27FC236}">
-                <a16:creationId xmlns:a16="http://schemas.microsoft.com/office/drawing/2014/main" id="{FCD32004-065D-44AA-AEB7-5120B4B203E2}"/>
+                <a16:creationId xmlns:a16="http://schemas.microsoft.com/office/drawing/2014/main" id="{22C2543E-7EF5-4397-893F-C73A74D56949}"/>
               </a:ext>
             </a:extLst>
           </p:cNvPr>
@@ -44072,13 +44041,20 @@
             <a:prstDash val="solid"/>
           </a:ln>
         </p:spPr>
+        <p:txBody>
+          <a:bodyPr/>
+          <a:lstStyle/>
+          <a:p>
+            <a:endParaRPr lang="en-US"/>
+          </a:p>
+        </p:txBody>
       </p:sp>
       <p:sp>
         <p:nvSpPr>
           <p:cNvPr id="5" name="section-label">
             <a:extLst>
               <a:ext uri="{FF2B5EF4-FFF2-40B4-BE49-F238E27FC236}">
-                <a16:creationId xmlns:a16="http://schemas.microsoft.com/office/drawing/2014/main" id="{E115EB48-C9A5-4C84-9ABE-8D19A8B490C8}"/>
+                <a16:creationId xmlns:a16="http://schemas.microsoft.com/office/drawing/2014/main" id="{D71F0DCB-2C44-438F-BF13-868AAA374838}"/>
               </a:ext>
             </a:extLst>
           </p:cNvPr>
@@ -44126,7 +44102,7 @@
                 <a:ea typeface="Arial"/>
                 <a:cs typeface="Arial"/>
               </a:rPr>
-              <a:t>MODULES</a:t>
+              <a:t>STATE AND CLEANUP</a:t>
             </a:r>
           </a:p>
         </p:txBody>
@@ -44136,7 +44112,7 @@
           <p:cNvPr id="6" name="code-snippet">
             <a:extLst>
               <a:ext uri="{FF2B5EF4-FFF2-40B4-BE49-F238E27FC236}">
-                <a16:creationId xmlns:a16="http://schemas.microsoft.com/office/drawing/2014/main" id="{FDE8F916-06A9-4B00-95E8-AB13690CC52E}"/>
+                <a16:creationId xmlns:a16="http://schemas.microsoft.com/office/drawing/2014/main" id="{FB105FDB-0CC0-4B8E-961E-FB1A460EE67B}"/>
               </a:ext>
             </a:extLst>
           </p:cNvPr>
@@ -44147,7 +44123,7 @@
         </p:nvSpPr>
         <p:spPr>
           <a:xfrm>
-            <a:off x="581025" y="2705100"/>
+            <a:off x="552450" y="2705100"/>
             <a:ext cx="7620000" cy="1695450"/>
           </a:xfrm>
           <a:prstGeom prst="rect">
@@ -44188,7 +44164,7 @@
                 <a:ea typeface="Courier New"/>
                 <a:cs typeface="Courier New"/>
               </a:rPr>
-              <a:t>module "checkout" {</a:t>
+              <a:t>terraform state list</a:t>
             </a:r>
           </a:p>
           <a:p>
@@ -44211,7 +44187,7 @@
                 <a:ea typeface="Courier New"/>
                 <a:cs typeface="Courier New"/>
               </a:rPr>
-              <a:t>  source      = "./modules/service"</a:t>
+              <a:t>terraform state show terraform_data.release</a:t>
             </a:r>
           </a:p>
           <a:p>
@@ -44234,7 +44210,7 @@
                 <a:ea typeface="Courier New"/>
                 <a:cs typeface="Courier New"/>
               </a:rPr>
-              <a:t>  name        = "checkout"</a:t>
+              <a:t>terraform output -json</a:t>
             </a:r>
           </a:p>
           <a:p>
@@ -44257,109 +44233,7 @@
                 <a:ea typeface="Courier New"/>
                 <a:cs typeface="Courier New"/>
               </a:rPr>
-              <a:t>  environment = var.environment</a:t>
-            </a:r>
-          </a:p>
-          <a:p>
-            <a:pPr>
-              <a:defRPr sz="975">
-                <a:solidFill>
-                  <a:srgbClr val="221F20"/>
-                </a:solidFill>
-                <a:latin typeface="Courier New"/>
-                <a:ea typeface="Courier New"/>
-                <a:cs typeface="Courier New"/>
-              </a:defRPr>
-            </a:pPr>
-            <a:r>
-              <a:rPr sz="975">
-                <a:solidFill>
-                  <a:srgbClr val="221F20"/>
-                </a:solidFill>
-                <a:latin typeface="Courier New"/>
-                <a:ea typeface="Courier New"/>
-                <a:cs typeface="Courier New"/>
-              </a:rPr>
-              <a:t>}</a:t>
-            </a:r>
-          </a:p>
-          <a:p>
-            <a:endParaRPr sz="975">
-              <a:solidFill>
-                <a:srgbClr val="221F20"/>
-              </a:solidFill>
-              <a:latin typeface="Courier New"/>
-              <a:ea typeface="Courier New"/>
-              <a:cs typeface="Courier New"/>
-            </a:endParaRPr>
-          </a:p>
-          <a:p>
-            <a:pPr>
-              <a:defRPr sz="975">
-                <a:solidFill>
-                  <a:srgbClr val="221F20"/>
-                </a:solidFill>
-                <a:latin typeface="Courier New"/>
-                <a:ea typeface="Courier New"/>
-                <a:cs typeface="Courier New"/>
-              </a:defRPr>
-            </a:pPr>
-            <a:r>
-              <a:rPr sz="975">
-                <a:solidFill>
-                  <a:srgbClr val="221F20"/>
-                </a:solidFill>
-                <a:latin typeface="Courier New"/>
-                <a:ea typeface="Courier New"/>
-                <a:cs typeface="Courier New"/>
-              </a:rPr>
-              <a:t>output "checkout_service" {</a:t>
-            </a:r>
-          </a:p>
-          <a:p>
-            <a:pPr>
-              <a:defRPr sz="975">
-                <a:solidFill>
-                  <a:srgbClr val="221F20"/>
-                </a:solidFill>
-                <a:latin typeface="Courier New"/>
-                <a:ea typeface="Courier New"/>
-                <a:cs typeface="Courier New"/>
-              </a:defRPr>
-            </a:pPr>
-            <a:r>
-              <a:rPr sz="975">
-                <a:solidFill>
-                  <a:srgbClr val="221F20"/>
-                </a:solidFill>
-                <a:latin typeface="Courier New"/>
-                <a:ea typeface="Courier New"/>
-                <a:cs typeface="Courier New"/>
-              </a:rPr>
-              <a:t>  value = module.checkout.service</a:t>
-            </a:r>
-          </a:p>
-          <a:p>
-            <a:pPr>
-              <a:defRPr sz="975">
-                <a:solidFill>
-                  <a:srgbClr val="221F20"/>
-                </a:solidFill>
-                <a:latin typeface="Courier New"/>
-                <a:ea typeface="Courier New"/>
-                <a:cs typeface="Courier New"/>
-              </a:defRPr>
-            </a:pPr>
-            <a:r>
-              <a:rPr sz="975">
-                <a:solidFill>
-                  <a:srgbClr val="221F20"/>
-                </a:solidFill>
-                <a:latin typeface="Courier New"/>
-                <a:ea typeface="Courier New"/>
-                <a:cs typeface="Courier New"/>
-              </a:rPr>
-              <a:t>}</a:t>
+              <a:t>terraform destroy</a:t>
             </a:r>
           </a:p>
         </p:txBody>
@@ -44434,7 +44308,7 @@
               </a:defRPr>
             </a:pPr>
             <a:r>
-              <a:rPr sz="2175" b="1" u="none">
+              <a:rPr sz="2175" b="1" u="none" dirty="0">
                 <a:solidFill>
                   <a:srgbClr val="221F20"/>
                 </a:solidFill>
@@ -44442,7 +44316,29 @@
                 <a:ea typeface="Arial"/>
                 <a:cs typeface="Arial"/>
               </a:rPr>
-              <a:t>Lab 2: change, re-plan, and explain the difference</a:t>
+              <a:t>Lab </a:t>
+            </a:r>
+            <a:r>
+              <a:rPr lang="en-US" sz="2175" b="1" u="none" dirty="0">
+                <a:solidFill>
+                  <a:srgbClr val="221F20"/>
+                </a:solidFill>
+                <a:latin typeface="Arial"/>
+                <a:ea typeface="Arial"/>
+                <a:cs typeface="Arial"/>
+              </a:rPr>
+              <a:t>1</a:t>
+            </a:r>
+            <a:r>
+              <a:rPr sz="2175" b="1" u="none" dirty="0">
+                <a:solidFill>
+                  <a:srgbClr val="221F20"/>
+                </a:solidFill>
+                <a:latin typeface="Arial"/>
+                <a:ea typeface="Arial"/>
+                <a:cs typeface="Arial"/>
+              </a:rPr>
+              <a:t>: modules turn repeated logic into an interface</a:t>
             </a:r>
           </a:p>
         </p:txBody>
@@ -44501,7 +44397,7 @@
                 <a:ea typeface="Arial"/>
                 <a:cs typeface="Arial"/>
               </a:rPr>
-              <a:t>Goal: see Terraform detect a configuration change.</a:t>
+              <a:t>Goal: move service-release logic into a child module.</a:t>
             </a:r>
           </a:p>
           <a:p>
@@ -44531,7 +44427,7 @@
                 <a:ea typeface="Arial"/>
                 <a:cs typeface="Arial"/>
               </a:rPr>
-              <a:t>Change app_version from 1.0.0 to 1.0.1.</a:t>
+              <a:t>Inputs define what the module needs.</a:t>
             </a:r>
           </a:p>
           <a:p>
@@ -44561,7 +44457,7 @@
                 <a:ea typeface="Arial"/>
                 <a:cs typeface="Arial"/>
               </a:rPr>
-              <a:t>Run plan before apply.</a:t>
+              <a:t>Outputs define what the caller receives.</a:t>
             </a:r>
           </a:p>
           <a:p>
@@ -44591,7 +44487,7 @@
                 <a:ea typeface="Arial"/>
                 <a:cs typeface="Arial"/>
               </a:rPr>
-              <a:t>Explain what changed, what stayed the same, and where Terraform remembered the old value.</a:t>
+              <a:t>The root module calls the child module with a source path.</a:t>
             </a:r>
           </a:p>
         </p:txBody>
@@ -44601,7 +44497,7 @@
           <p:cNvPr id="4" name="modern-gold-rule">
             <a:extLst>
               <a:ext uri="{FF2B5EF4-FFF2-40B4-BE49-F238E27FC236}">
-                <a16:creationId xmlns:a16="http://schemas.microsoft.com/office/drawing/2014/main" id="{90F040A3-2306-4DC0-893C-6733D2320C72}"/>
+                <a16:creationId xmlns:a16="http://schemas.microsoft.com/office/drawing/2014/main" id="{FCD32004-065D-44AA-AEB7-5120B4B203E2}"/>
               </a:ext>
             </a:extLst>
           </p:cNvPr>
@@ -44628,13 +44524,20 @@
             <a:prstDash val="solid"/>
           </a:ln>
         </p:spPr>
+        <p:txBody>
+          <a:bodyPr/>
+          <a:lstStyle/>
+          <a:p>
+            <a:endParaRPr lang="en-US"/>
+          </a:p>
+        </p:txBody>
       </p:sp>
       <p:sp>
         <p:nvSpPr>
           <p:cNvPr id="5" name="section-label">
             <a:extLst>
               <a:ext uri="{FF2B5EF4-FFF2-40B4-BE49-F238E27FC236}">
-                <a16:creationId xmlns:a16="http://schemas.microsoft.com/office/drawing/2014/main" id="{630EDAA5-0101-43AA-8E6D-EA239F21AE0B}"/>
+                <a16:creationId xmlns:a16="http://schemas.microsoft.com/office/drawing/2014/main" id="{E115EB48-C9A5-4C84-9ABE-8D19A8B490C8}"/>
               </a:ext>
             </a:extLst>
           </p:cNvPr>
@@ -44682,7 +44585,7 @@
                 <a:ea typeface="Arial"/>
                 <a:cs typeface="Arial"/>
               </a:rPr>
-              <a:t>CHANGE MANAGEMENT</a:t>
+              <a:t>MODULES</a:t>
             </a:r>
           </a:p>
         </p:txBody>
@@ -44692,7 +44595,7 @@
           <p:cNvPr id="6" name="code-snippet">
             <a:extLst>
               <a:ext uri="{FF2B5EF4-FFF2-40B4-BE49-F238E27FC236}">
-                <a16:creationId xmlns:a16="http://schemas.microsoft.com/office/drawing/2014/main" id="{F51ADC2D-47F6-4DA6-BEA9-16324E9EED14}"/>
+                <a16:creationId xmlns:a16="http://schemas.microsoft.com/office/drawing/2014/main" id="{FDE8F916-06A9-4B00-95E8-AB13690CC52E}"/>
               </a:ext>
             </a:extLst>
           </p:cNvPr>
@@ -44703,7 +44606,7 @@
         </p:nvSpPr>
         <p:spPr>
           <a:xfrm>
-            <a:off x="552450" y="2705100"/>
+            <a:off x="581025" y="2705100"/>
             <a:ext cx="7620000" cy="1695450"/>
           </a:xfrm>
           <a:prstGeom prst="rect">
@@ -44744,7 +44647,7 @@
                 <a:ea typeface="Courier New"/>
                 <a:cs typeface="Courier New"/>
               </a:rPr>
-              <a:t>terraform plan -var="app_version=1.0.1"</a:t>
+              <a:t>module "checkout" {</a:t>
             </a:r>
           </a:p>
           <a:p>
@@ -44767,7 +44670,7 @@
                 <a:ea typeface="Courier New"/>
                 <a:cs typeface="Courier New"/>
               </a:rPr>
-              <a:t>terraform apply -var="app_version=1.0.1"</a:t>
+              <a:t>  source      = "./modules/service"</a:t>
             </a:r>
           </a:p>
           <a:p>
@@ -44790,7 +44693,132 @@
                 <a:ea typeface="Courier New"/>
                 <a:cs typeface="Courier New"/>
               </a:rPr>
-              <a:t>terraform show</a:t>
+              <a:t>  name        = "checkout"</a:t>
+            </a:r>
+          </a:p>
+          <a:p>
+            <a:pPr>
+              <a:defRPr sz="975">
+                <a:solidFill>
+                  <a:srgbClr val="221F20"/>
+                </a:solidFill>
+                <a:latin typeface="Courier New"/>
+                <a:ea typeface="Courier New"/>
+                <a:cs typeface="Courier New"/>
+              </a:defRPr>
+            </a:pPr>
+            <a:r>
+              <a:rPr sz="975">
+                <a:solidFill>
+                  <a:srgbClr val="221F20"/>
+                </a:solidFill>
+                <a:latin typeface="Courier New"/>
+                <a:ea typeface="Courier New"/>
+                <a:cs typeface="Courier New"/>
+              </a:rPr>
+              <a:t>  environment = var.environment</a:t>
+            </a:r>
+          </a:p>
+          <a:p>
+            <a:pPr>
+              <a:defRPr sz="975">
+                <a:solidFill>
+                  <a:srgbClr val="221F20"/>
+                </a:solidFill>
+                <a:latin typeface="Courier New"/>
+                <a:ea typeface="Courier New"/>
+                <a:cs typeface="Courier New"/>
+              </a:defRPr>
+            </a:pPr>
+            <a:r>
+              <a:rPr sz="975">
+                <a:solidFill>
+                  <a:srgbClr val="221F20"/>
+                </a:solidFill>
+                <a:latin typeface="Courier New"/>
+                <a:ea typeface="Courier New"/>
+                <a:cs typeface="Courier New"/>
+              </a:rPr>
+              <a:t>}</a:t>
+            </a:r>
+          </a:p>
+          <a:p>
+            <a:endParaRPr sz="975">
+              <a:solidFill>
+                <a:srgbClr val="221F20"/>
+              </a:solidFill>
+              <a:latin typeface="Courier New"/>
+              <a:ea typeface="Courier New"/>
+              <a:cs typeface="Courier New"/>
+            </a:endParaRPr>
+          </a:p>
+          <a:p>
+            <a:pPr>
+              <a:defRPr sz="975">
+                <a:solidFill>
+                  <a:srgbClr val="221F20"/>
+                </a:solidFill>
+                <a:latin typeface="Courier New"/>
+                <a:ea typeface="Courier New"/>
+                <a:cs typeface="Courier New"/>
+              </a:defRPr>
+            </a:pPr>
+            <a:r>
+              <a:rPr sz="975">
+                <a:solidFill>
+                  <a:srgbClr val="221F20"/>
+                </a:solidFill>
+                <a:latin typeface="Courier New"/>
+                <a:ea typeface="Courier New"/>
+                <a:cs typeface="Courier New"/>
+              </a:rPr>
+              <a:t>output "checkout_service" {</a:t>
+            </a:r>
+          </a:p>
+          <a:p>
+            <a:pPr>
+              <a:defRPr sz="975">
+                <a:solidFill>
+                  <a:srgbClr val="221F20"/>
+                </a:solidFill>
+                <a:latin typeface="Courier New"/>
+                <a:ea typeface="Courier New"/>
+                <a:cs typeface="Courier New"/>
+              </a:defRPr>
+            </a:pPr>
+            <a:r>
+              <a:rPr sz="975">
+                <a:solidFill>
+                  <a:srgbClr val="221F20"/>
+                </a:solidFill>
+                <a:latin typeface="Courier New"/>
+                <a:ea typeface="Courier New"/>
+                <a:cs typeface="Courier New"/>
+              </a:rPr>
+              <a:t>  value = module.checkout.service</a:t>
+            </a:r>
+          </a:p>
+          <a:p>
+            <a:pPr>
+              <a:defRPr sz="975">
+                <a:solidFill>
+                  <a:srgbClr val="221F20"/>
+                </a:solidFill>
+                <a:latin typeface="Courier New"/>
+                <a:ea typeface="Courier New"/>
+                <a:cs typeface="Courier New"/>
+              </a:defRPr>
+            </a:pPr>
+            <a:r>
+              <a:rPr sz="975">
+                <a:solidFill>
+                  <a:srgbClr val="221F20"/>
+                </a:solidFill>
+                <a:latin typeface="Courier New"/>
+                <a:ea typeface="Courier New"/>
+                <a:cs typeface="Courier New"/>
+              </a:rPr>
+              <a:t>}</a:t>
             </a:r>
           </a:p>
         </p:txBody>
@@ -44865,7 +44893,7 @@
               </a:defRPr>
             </a:pPr>
             <a:r>
-              <a:rPr sz="2175" b="1" u="none" dirty="0">
+              <a:rPr sz="2175" b="1" u="none">
                 <a:solidFill>
                   <a:srgbClr val="221F20"/>
                 </a:solidFill>
@@ -44873,29 +44901,7 @@
                 <a:ea typeface="Arial"/>
                 <a:cs typeface="Arial"/>
               </a:rPr>
-              <a:t>Lab </a:t>
-            </a:r>
-            <a:r>
-              <a:rPr lang="en-US" sz="2175" b="1" u="none" dirty="0">
-                <a:solidFill>
-                  <a:srgbClr val="221F20"/>
-                </a:solidFill>
-                <a:latin typeface="Arial"/>
-                <a:ea typeface="Arial"/>
-                <a:cs typeface="Arial"/>
-              </a:rPr>
-              <a:t>3</a:t>
-            </a:r>
-            <a:r>
-              <a:rPr sz="2175" b="1" u="none" dirty="0">
-                <a:solidFill>
-                  <a:srgbClr val="221F20"/>
-                </a:solidFill>
-                <a:latin typeface="Arial"/>
-                <a:ea typeface="Arial"/>
-                <a:cs typeface="Arial"/>
-              </a:rPr>
-              <a:t>: create a local release record</a:t>
+              <a:t>Lab 2: change, re-plan, and explain the difference</a:t>
             </a:r>
           </a:p>
         </p:txBody>
@@ -44954,7 +44960,7 @@
                 <a:ea typeface="Arial"/>
                 <a:cs typeface="Arial"/>
               </a:rPr>
-              <a:t>Goal: create one managed training object and inspect the output.</a:t>
+              <a:t>Goal: see Terraform detect a configuration change.</a:t>
             </a:r>
           </a:p>
           <a:p>
@@ -44984,7 +44990,7 @@
                 <a:ea typeface="Arial"/>
                 <a:cs typeface="Arial"/>
               </a:rPr>
-              <a:t>Students create main.tf with variables, locals, terraform_data, and an output.</a:t>
+              <a:t>Change app_version from 1.0.0 to 1.0.1.</a:t>
             </a:r>
           </a:p>
           <a:p>
@@ -45014,7 +45020,37 @@
                 <a:ea typeface="Arial"/>
                 <a:cs typeface="Arial"/>
               </a:rPr>
-              <a:t>Then they run init, validate, plan, apply, and output.</a:t>
+              <a:t>Run plan before apply.</a:t>
+            </a:r>
+          </a:p>
+          <a:p>
+            <a:pPr marL="0" indent="0" algn="l">
+              <a:spcBef>
+                <a:spcPts val="0"/>
+              </a:spcBef>
+              <a:spcAft>
+                <a:spcPts val="650"/>
+              </a:spcAft>
+              <a:buNone/>
+              <a:defRPr sz="1238" b="0" u="none">
+                <a:solidFill>
+                  <a:srgbClr val="221F20"/>
+                </a:solidFill>
+                <a:latin typeface="Arial"/>
+                <a:ea typeface="Arial"/>
+                <a:cs typeface="Arial"/>
+              </a:defRPr>
+            </a:pPr>
+            <a:r>
+              <a:rPr sz="1238" b="0" u="none">
+                <a:solidFill>
+                  <a:srgbClr val="221F20"/>
+                </a:solidFill>
+                <a:latin typeface="Arial"/>
+                <a:ea typeface="Arial"/>
+                <a:cs typeface="Arial"/>
+              </a:rPr>
+              <a:t>Explain what changed, what stayed the same, and where Terraform remembered the old value.</a:t>
             </a:r>
           </a:p>
         </p:txBody>
@@ -45024,7 +45060,7 @@
           <p:cNvPr id="4" name="modern-gold-rule">
             <a:extLst>
               <a:ext uri="{FF2B5EF4-FFF2-40B4-BE49-F238E27FC236}">
-                <a16:creationId xmlns:a16="http://schemas.microsoft.com/office/drawing/2014/main" id="{E6C6E99F-9D0B-4FF3-89DE-2A783580F099}"/>
+                <a16:creationId xmlns:a16="http://schemas.microsoft.com/office/drawing/2014/main" id="{90F040A3-2306-4DC0-893C-6733D2320C72}"/>
               </a:ext>
             </a:extLst>
           </p:cNvPr>
@@ -45051,13 +45087,20 @@
             <a:prstDash val="solid"/>
           </a:ln>
         </p:spPr>
+        <p:txBody>
+          <a:bodyPr/>
+          <a:lstStyle/>
+          <a:p>
+            <a:endParaRPr lang="en-US"/>
+          </a:p>
+        </p:txBody>
       </p:sp>
       <p:sp>
         <p:nvSpPr>
           <p:cNvPr id="5" name="section-label">
             <a:extLst>
               <a:ext uri="{FF2B5EF4-FFF2-40B4-BE49-F238E27FC236}">
-                <a16:creationId xmlns:a16="http://schemas.microsoft.com/office/drawing/2014/main" id="{5DD9288A-9D5C-4F7A-A9E9-5450F269ACA5}"/>
+                <a16:creationId xmlns:a16="http://schemas.microsoft.com/office/drawing/2014/main" id="{630EDAA5-0101-43AA-8E6D-EA239F21AE0B}"/>
               </a:ext>
             </a:extLst>
           </p:cNvPr>
@@ -45105,7 +45148,7 @@
                 <a:ea typeface="Arial"/>
                 <a:cs typeface="Arial"/>
               </a:rPr>
-              <a:t>NO-CLOUD LAB</a:t>
+              <a:t>CHANGE MANAGEMENT</a:t>
             </a:r>
           </a:p>
         </p:txBody>
@@ -45115,7 +45158,7 @@
           <p:cNvPr id="6" name="code-snippet">
             <a:extLst>
               <a:ext uri="{FF2B5EF4-FFF2-40B4-BE49-F238E27FC236}">
-                <a16:creationId xmlns:a16="http://schemas.microsoft.com/office/drawing/2014/main" id="{B2333ECA-1EE1-4573-9A98-E2900E2CF038}"/>
+                <a16:creationId xmlns:a16="http://schemas.microsoft.com/office/drawing/2014/main" id="{F51ADC2D-47F6-4DA6-BEA9-16324E9EED14}"/>
               </a:ext>
             </a:extLst>
           </p:cNvPr>
@@ -45126,7 +45169,7 @@
         </p:nvSpPr>
         <p:spPr>
           <a:xfrm>
-            <a:off x="590550" y="2266950"/>
+            <a:off x="552450" y="2705100"/>
             <a:ext cx="7620000" cy="1695450"/>
           </a:xfrm>
           <a:prstGeom prst="rect">
@@ -45144,7 +45187,7 @@
         </p:spPr>
         <p:txBody>
           <a:bodyPr wrap="square" lIns="133350" tIns="114300" rIns="133350" bIns="95250">
-            <a:normAutofit fontScale="90909" lnSpcReduction="10000"/>
+            <a:normAutofit/>
           </a:bodyPr>
           <a:lstStyle/>
           <a:p>
@@ -45167,7 +45210,7 @@
                 <a:ea typeface="Courier New"/>
                 <a:cs typeface="Courier New"/>
               </a:rPr>
-              <a:t>resource "terraform_data" "release" {</a:t>
+              <a:t>terraform plan -var="app_version=1.0.1"</a:t>
             </a:r>
           </a:p>
           <a:p>
@@ -45190,7 +45233,7 @@
                 <a:ea typeface="Courier New"/>
                 <a:cs typeface="Courier New"/>
               </a:rPr>
-              <a:t>  input = {</a:t>
+              <a:t>terraform apply -var="app_version=1.0.1"</a:t>
             </a:r>
           </a:p>
           <a:p>
@@ -45213,178 +45256,7 @@
                 <a:ea typeface="Courier New"/>
                 <a:cs typeface="Courier New"/>
               </a:rPr>
-              <a:t>    name        = local.service_name</a:t>
-            </a:r>
-          </a:p>
-          <a:p>
-            <a:pPr>
-              <a:defRPr sz="975">
-                <a:solidFill>
-                  <a:srgbClr val="221F20"/>
-                </a:solidFill>
-                <a:latin typeface="Courier New"/>
-                <a:ea typeface="Courier New"/>
-                <a:cs typeface="Courier New"/>
-              </a:defRPr>
-            </a:pPr>
-            <a:r>
-              <a:rPr sz="975">
-                <a:solidFill>
-                  <a:srgbClr val="221F20"/>
-                </a:solidFill>
-                <a:latin typeface="Courier New"/>
-                <a:ea typeface="Courier New"/>
-                <a:cs typeface="Courier New"/>
-              </a:rPr>
-              <a:t>    environment = var.environment</a:t>
-            </a:r>
-          </a:p>
-          <a:p>
-            <a:pPr>
-              <a:defRPr sz="975">
-                <a:solidFill>
-                  <a:srgbClr val="221F20"/>
-                </a:solidFill>
-                <a:latin typeface="Courier New"/>
-                <a:ea typeface="Courier New"/>
-                <a:cs typeface="Courier New"/>
-              </a:defRPr>
-            </a:pPr>
-            <a:r>
-              <a:rPr sz="975">
-                <a:solidFill>
-                  <a:srgbClr val="221F20"/>
-                </a:solidFill>
-                <a:latin typeface="Courier New"/>
-                <a:ea typeface="Courier New"/>
-                <a:cs typeface="Courier New"/>
-              </a:rPr>
-              <a:t>    version     = var.app_version</a:t>
-            </a:r>
-          </a:p>
-          <a:p>
-            <a:pPr>
-              <a:defRPr sz="975">
-                <a:solidFill>
-                  <a:srgbClr val="221F20"/>
-                </a:solidFill>
-                <a:latin typeface="Courier New"/>
-                <a:ea typeface="Courier New"/>
-                <a:cs typeface="Courier New"/>
-              </a:defRPr>
-            </a:pPr>
-            <a:r>
-              <a:rPr sz="975">
-                <a:solidFill>
-                  <a:srgbClr val="221F20"/>
-                </a:solidFill>
-                <a:latin typeface="Courier New"/>
-                <a:ea typeface="Courier New"/>
-                <a:cs typeface="Courier New"/>
-              </a:rPr>
-              <a:t>  }</a:t>
-            </a:r>
-          </a:p>
-          <a:p>
-            <a:pPr>
-              <a:defRPr sz="975">
-                <a:solidFill>
-                  <a:srgbClr val="221F20"/>
-                </a:solidFill>
-                <a:latin typeface="Courier New"/>
-                <a:ea typeface="Courier New"/>
-                <a:cs typeface="Courier New"/>
-              </a:defRPr>
-            </a:pPr>
-            <a:r>
-              <a:rPr sz="975">
-                <a:solidFill>
-                  <a:srgbClr val="221F20"/>
-                </a:solidFill>
-                <a:latin typeface="Courier New"/>
-                <a:ea typeface="Courier New"/>
-                <a:cs typeface="Courier New"/>
-              </a:rPr>
-              <a:t>}</a:t>
-            </a:r>
-          </a:p>
-          <a:p>
-            <a:endParaRPr sz="975">
-              <a:solidFill>
-                <a:srgbClr val="221F20"/>
-              </a:solidFill>
-              <a:latin typeface="Courier New"/>
-              <a:ea typeface="Courier New"/>
-              <a:cs typeface="Courier New"/>
-            </a:endParaRPr>
-          </a:p>
-          <a:p>
-            <a:pPr>
-              <a:defRPr sz="975">
-                <a:solidFill>
-                  <a:srgbClr val="221F20"/>
-                </a:solidFill>
-                <a:latin typeface="Courier New"/>
-                <a:ea typeface="Courier New"/>
-                <a:cs typeface="Courier New"/>
-              </a:defRPr>
-            </a:pPr>
-            <a:r>
-              <a:rPr sz="975">
-                <a:solidFill>
-                  <a:srgbClr val="221F20"/>
-                </a:solidFill>
-                <a:latin typeface="Courier New"/>
-                <a:ea typeface="Courier New"/>
-                <a:cs typeface="Courier New"/>
-              </a:rPr>
-              <a:t>output "release_record" {</a:t>
-            </a:r>
-          </a:p>
-          <a:p>
-            <a:pPr>
-              <a:defRPr sz="975">
-                <a:solidFill>
-                  <a:srgbClr val="221F20"/>
-                </a:solidFill>
-                <a:latin typeface="Courier New"/>
-                <a:ea typeface="Courier New"/>
-                <a:cs typeface="Courier New"/>
-              </a:defRPr>
-            </a:pPr>
-            <a:r>
-              <a:rPr sz="975">
-                <a:solidFill>
-                  <a:srgbClr val="221F20"/>
-                </a:solidFill>
-                <a:latin typeface="Courier New"/>
-                <a:ea typeface="Courier New"/>
-                <a:cs typeface="Courier New"/>
-              </a:rPr>
-              <a:t>  value = terraform_data.release.output</a:t>
-            </a:r>
-          </a:p>
-          <a:p>
-            <a:pPr>
-              <a:defRPr sz="975">
-                <a:solidFill>
-                  <a:srgbClr val="221F20"/>
-                </a:solidFill>
-                <a:latin typeface="Courier New"/>
-                <a:ea typeface="Courier New"/>
-                <a:cs typeface="Courier New"/>
-              </a:defRPr>
-            </a:pPr>
-            <a:r>
-              <a:rPr sz="975">
-                <a:solidFill>
-                  <a:srgbClr val="221F20"/>
-                </a:solidFill>
-                <a:latin typeface="Courier New"/>
-                <a:ea typeface="Courier New"/>
-                <a:cs typeface="Courier New"/>
-              </a:rPr>
-              <a:t>}</a:t>
+              <a:t>terraform show</a:t>
             </a:r>
           </a:p>
         </p:txBody>
@@ -45459,7 +45331,7 @@
               </a:defRPr>
             </a:pPr>
             <a:r>
-              <a:rPr sz="2175" b="1" u="none">
+              <a:rPr sz="2175" b="1" u="none" dirty="0">
                 <a:solidFill>
                   <a:srgbClr val="221F20"/>
                 </a:solidFill>
@@ -45467,7 +45339,29 @@
                 <a:ea typeface="Arial"/>
                 <a:cs typeface="Arial"/>
               </a:rPr>
-              <a:t>HCL gives Terraform a readable contract</a:t>
+              <a:t>Lab </a:t>
+            </a:r>
+            <a:r>
+              <a:rPr lang="en-US" sz="2175" b="1" u="none" dirty="0">
+                <a:solidFill>
+                  <a:srgbClr val="221F20"/>
+                </a:solidFill>
+                <a:latin typeface="Arial"/>
+                <a:ea typeface="Arial"/>
+                <a:cs typeface="Arial"/>
+              </a:rPr>
+              <a:t>3</a:t>
+            </a:r>
+            <a:r>
+              <a:rPr sz="2175" b="1" u="none" dirty="0">
+                <a:solidFill>
+                  <a:srgbClr val="221F20"/>
+                </a:solidFill>
+                <a:latin typeface="Arial"/>
+                <a:ea typeface="Arial"/>
+                <a:cs typeface="Arial"/>
+              </a:rPr>
+              <a:t>: create a local release record</a:t>
             </a:r>
           </a:p>
         </p:txBody>
@@ -45526,7 +45420,7 @@
                 <a:ea typeface="Arial"/>
                 <a:cs typeface="Arial"/>
               </a:rPr>
-              <a:t>Blocks group configuration.</a:t>
+              <a:t>Goal: create one managed training object and inspect the output.</a:t>
             </a:r>
           </a:p>
           <a:p>
@@ -45556,7 +45450,7 @@
                 <a:ea typeface="Arial"/>
                 <a:cs typeface="Arial"/>
               </a:rPr>
-              <a:t>Arguments assign values.</a:t>
+              <a:t>Students create main.tf with variables, locals, terraform_data, and an output.</a:t>
             </a:r>
           </a:p>
           <a:p>
@@ -45586,67 +45480,7 @@
                 <a:ea typeface="Arial"/>
                 <a:cs typeface="Arial"/>
               </a:rPr>
-              <a:t>Variables define inputs.</a:t>
-            </a:r>
-          </a:p>
-          <a:p>
-            <a:pPr marL="0" indent="0" algn="l">
-              <a:spcBef>
-                <a:spcPts val="0"/>
-              </a:spcBef>
-              <a:spcAft>
-                <a:spcPts val="650"/>
-              </a:spcAft>
-              <a:buNone/>
-              <a:defRPr sz="1238" b="0" u="none">
-                <a:solidFill>
-                  <a:srgbClr val="221F20"/>
-                </a:solidFill>
-                <a:latin typeface="Arial"/>
-                <a:ea typeface="Arial"/>
-                <a:cs typeface="Arial"/>
-              </a:defRPr>
-            </a:pPr>
-            <a:r>
-              <a:rPr sz="1238" b="0" u="none">
-                <a:solidFill>
-                  <a:srgbClr val="221F20"/>
-                </a:solidFill>
-                <a:latin typeface="Arial"/>
-                <a:ea typeface="Arial"/>
-                <a:cs typeface="Arial"/>
-              </a:rPr>
-              <a:t>Locals name reusable expressions.</a:t>
-            </a:r>
-          </a:p>
-          <a:p>
-            <a:pPr marL="0" indent="0" algn="l">
-              <a:spcBef>
-                <a:spcPts val="0"/>
-              </a:spcBef>
-              <a:spcAft>
-                <a:spcPts val="650"/>
-              </a:spcAft>
-              <a:buNone/>
-              <a:defRPr sz="1238" b="0" u="none">
-                <a:solidFill>
-                  <a:srgbClr val="221F20"/>
-                </a:solidFill>
-                <a:latin typeface="Arial"/>
-                <a:ea typeface="Arial"/>
-                <a:cs typeface="Arial"/>
-              </a:defRPr>
-            </a:pPr>
-            <a:r>
-              <a:rPr sz="1238" b="0" u="none">
-                <a:solidFill>
-                  <a:srgbClr val="221F20"/>
-                </a:solidFill>
-                <a:latin typeface="Arial"/>
-                <a:ea typeface="Arial"/>
-                <a:cs typeface="Arial"/>
-              </a:rPr>
-              <a:t>Outputs expose useful results.</a:t>
+              <a:t>Then they run init, validate, plan, apply, and output.</a:t>
             </a:r>
           </a:p>
         </p:txBody>
@@ -45656,7 +45490,7 @@
           <p:cNvPr id="4" name="modern-gold-rule">
             <a:extLst>
               <a:ext uri="{FF2B5EF4-FFF2-40B4-BE49-F238E27FC236}">
-                <a16:creationId xmlns:a16="http://schemas.microsoft.com/office/drawing/2014/main" id="{ADE1AA7D-FE6D-4A89-95D5-88E8CD5E9A5B}"/>
+                <a16:creationId xmlns:a16="http://schemas.microsoft.com/office/drawing/2014/main" id="{E6C6E99F-9D0B-4FF3-89DE-2A783580F099}"/>
               </a:ext>
             </a:extLst>
           </p:cNvPr>
@@ -45683,13 +45517,20 @@
             <a:prstDash val="solid"/>
           </a:ln>
         </p:spPr>
+        <p:txBody>
+          <a:bodyPr/>
+          <a:lstStyle/>
+          <a:p>
+            <a:endParaRPr lang="en-US"/>
+          </a:p>
+        </p:txBody>
       </p:sp>
       <p:sp>
         <p:nvSpPr>
           <p:cNvPr id="5" name="section-label">
             <a:extLst>
               <a:ext uri="{FF2B5EF4-FFF2-40B4-BE49-F238E27FC236}">
-                <a16:creationId xmlns:a16="http://schemas.microsoft.com/office/drawing/2014/main" id="{B8B2056A-F73B-4FEA-8DB4-B69CD30D86EF}"/>
+                <a16:creationId xmlns:a16="http://schemas.microsoft.com/office/drawing/2014/main" id="{5DD9288A-9D5C-4F7A-A9E9-5450F269ACA5}"/>
               </a:ext>
             </a:extLst>
           </p:cNvPr>
@@ -45737,7 +45578,7 @@
                 <a:ea typeface="Arial"/>
                 <a:cs typeface="Arial"/>
               </a:rPr>
-              <a:t>CONFIGURATION LANGUAGE</a:t>
+              <a:t>NO-CLOUD LAB</a:t>
             </a:r>
           </a:p>
         </p:txBody>
@@ -45747,7 +45588,7 @@
           <p:cNvPr id="6" name="code-snippet">
             <a:extLst>
               <a:ext uri="{FF2B5EF4-FFF2-40B4-BE49-F238E27FC236}">
-                <a16:creationId xmlns:a16="http://schemas.microsoft.com/office/drawing/2014/main" id="{57E2E528-1065-49D3-B349-35CF9E5D0581}"/>
+                <a16:creationId xmlns:a16="http://schemas.microsoft.com/office/drawing/2014/main" id="{B2333ECA-1EE1-4573-9A98-E2900E2CF038}"/>
               </a:ext>
             </a:extLst>
           </p:cNvPr>
@@ -45758,7 +45599,7 @@
         </p:nvSpPr>
         <p:spPr>
           <a:xfrm>
-            <a:off x="581025" y="2705100"/>
+            <a:off x="590550" y="2266950"/>
             <a:ext cx="7620000" cy="1695450"/>
           </a:xfrm>
           <a:prstGeom prst="rect">
@@ -45776,7 +45617,7 @@
         </p:spPr>
         <p:txBody>
           <a:bodyPr wrap="square" lIns="133350" tIns="114300" rIns="133350" bIns="95250">
-            <a:normAutofit fontScale="90833" lnSpcReduction="10000"/>
+            <a:normAutofit fontScale="90909" lnSpcReduction="10000"/>
           </a:bodyPr>
           <a:lstStyle/>
           <a:p>
@@ -45799,7 +45640,7 @@
                 <a:ea typeface="Courier New"/>
                 <a:cs typeface="Courier New"/>
               </a:rPr>
-              <a:t>variable "environment" {</a:t>
+              <a:t>resource "terraform_data" "release" {</a:t>
             </a:r>
           </a:p>
           <a:p>
@@ -45822,7 +45663,7 @@
                 <a:ea typeface="Courier New"/>
                 <a:cs typeface="Courier New"/>
               </a:rPr>
-              <a:t>  type    = string</a:t>
+              <a:t>  input = {</a:t>
             </a:r>
           </a:p>
           <a:p>
@@ -45845,7 +45686,76 @@
                 <a:ea typeface="Courier New"/>
                 <a:cs typeface="Courier New"/>
               </a:rPr>
-              <a:t>  default = "dev"</a:t>
+              <a:t>    name        = local.service_name</a:t>
+            </a:r>
+          </a:p>
+          <a:p>
+            <a:pPr>
+              <a:defRPr sz="975">
+                <a:solidFill>
+                  <a:srgbClr val="221F20"/>
+                </a:solidFill>
+                <a:latin typeface="Courier New"/>
+                <a:ea typeface="Courier New"/>
+                <a:cs typeface="Courier New"/>
+              </a:defRPr>
+            </a:pPr>
+            <a:r>
+              <a:rPr sz="975">
+                <a:solidFill>
+                  <a:srgbClr val="221F20"/>
+                </a:solidFill>
+                <a:latin typeface="Courier New"/>
+                <a:ea typeface="Courier New"/>
+                <a:cs typeface="Courier New"/>
+              </a:rPr>
+              <a:t>    environment = var.environment</a:t>
+            </a:r>
+          </a:p>
+          <a:p>
+            <a:pPr>
+              <a:defRPr sz="975">
+                <a:solidFill>
+                  <a:srgbClr val="221F20"/>
+                </a:solidFill>
+                <a:latin typeface="Courier New"/>
+                <a:ea typeface="Courier New"/>
+                <a:cs typeface="Courier New"/>
+              </a:defRPr>
+            </a:pPr>
+            <a:r>
+              <a:rPr sz="975">
+                <a:solidFill>
+                  <a:srgbClr val="221F20"/>
+                </a:solidFill>
+                <a:latin typeface="Courier New"/>
+                <a:ea typeface="Courier New"/>
+                <a:cs typeface="Courier New"/>
+              </a:rPr>
+              <a:t>    version     = var.app_version</a:t>
+            </a:r>
+          </a:p>
+          <a:p>
+            <a:pPr>
+              <a:defRPr sz="975">
+                <a:solidFill>
+                  <a:srgbClr val="221F20"/>
+                </a:solidFill>
+                <a:latin typeface="Courier New"/>
+                <a:ea typeface="Courier New"/>
+                <a:cs typeface="Courier New"/>
+              </a:defRPr>
+            </a:pPr>
+            <a:r>
+              <a:rPr sz="975">
+                <a:solidFill>
+                  <a:srgbClr val="221F20"/>
+                </a:solidFill>
+                <a:latin typeface="Courier New"/>
+                <a:ea typeface="Courier New"/>
+                <a:cs typeface="Courier New"/>
+              </a:rPr>
+              <a:t>  }</a:t>
             </a:r>
           </a:p>
           <a:p>
@@ -45901,7 +45811,7 @@
                 <a:ea typeface="Courier New"/>
                 <a:cs typeface="Courier New"/>
               </a:rPr>
-              <a:t>locals {</a:t>
+              <a:t>output "release_record" {</a:t>
             </a:r>
           </a:p>
           <a:p>
@@ -45924,86 +45834,7 @@
                 <a:ea typeface="Courier New"/>
                 <a:cs typeface="Courier New"/>
               </a:rPr>
-              <a:t>  service_name = "checkout-${var.environment}"</a:t>
-            </a:r>
-          </a:p>
-          <a:p>
-            <a:pPr>
-              <a:defRPr sz="975">
-                <a:solidFill>
-                  <a:srgbClr val="221F20"/>
-                </a:solidFill>
-                <a:latin typeface="Courier New"/>
-                <a:ea typeface="Courier New"/>
-                <a:cs typeface="Courier New"/>
-              </a:defRPr>
-            </a:pPr>
-            <a:r>
-              <a:rPr sz="975">
-                <a:solidFill>
-                  <a:srgbClr val="221F20"/>
-                </a:solidFill>
-                <a:latin typeface="Courier New"/>
-                <a:ea typeface="Courier New"/>
-                <a:cs typeface="Courier New"/>
-              </a:rPr>
-              <a:t>}</a:t>
-            </a:r>
-          </a:p>
-          <a:p>
-            <a:endParaRPr sz="975">
-              <a:solidFill>
-                <a:srgbClr val="221F20"/>
-              </a:solidFill>
-              <a:latin typeface="Courier New"/>
-              <a:ea typeface="Courier New"/>
-              <a:cs typeface="Courier New"/>
-            </a:endParaRPr>
-          </a:p>
-          <a:p>
-            <a:pPr>
-              <a:defRPr sz="975">
-                <a:solidFill>
-                  <a:srgbClr val="221F20"/>
-                </a:solidFill>
-                <a:latin typeface="Courier New"/>
-                <a:ea typeface="Courier New"/>
-                <a:cs typeface="Courier New"/>
-              </a:defRPr>
-            </a:pPr>
-            <a:r>
-              <a:rPr sz="975">
-                <a:solidFill>
-                  <a:srgbClr val="221F20"/>
-                </a:solidFill>
-                <a:latin typeface="Courier New"/>
-                <a:ea typeface="Courier New"/>
-                <a:cs typeface="Courier New"/>
-              </a:rPr>
-              <a:t>output "service_name" {</a:t>
-            </a:r>
-          </a:p>
-          <a:p>
-            <a:pPr>
-              <a:defRPr sz="975">
-                <a:solidFill>
-                  <a:srgbClr val="221F20"/>
-                </a:solidFill>
-                <a:latin typeface="Courier New"/>
-                <a:ea typeface="Courier New"/>
-                <a:cs typeface="Courier New"/>
-              </a:defRPr>
-            </a:pPr>
-            <a:r>
-              <a:rPr sz="975">
-                <a:solidFill>
-                  <a:srgbClr val="221F20"/>
-                </a:solidFill>
-                <a:latin typeface="Courier New"/>
-                <a:ea typeface="Courier New"/>
-                <a:cs typeface="Courier New"/>
-              </a:rPr>
-              <a:t>  value = local.service_name</a:t>
+              <a:t>  value = terraform_data.release.output</a:t>
             </a:r>
           </a:p>
           <a:p>
@@ -46109,7 +45940,7 @@
                 <a:ea typeface="Arial"/>
                 <a:cs typeface="Arial"/>
               </a:rPr>
-              <a:t>The CLI workflow is the class rhythm</a:t>
+              <a:t>HCL gives Terraform a readable contract</a:t>
             </a:r>
           </a:p>
         </p:txBody>
@@ -46168,7 +45999,7 @@
                 <a:ea typeface="Arial"/>
                 <a:cs typeface="Arial"/>
               </a:rPr>
-              <a:t>Initialize the working directory.</a:t>
+              <a:t>Blocks group configuration.</a:t>
             </a:r>
           </a:p>
           <a:p>
@@ -46198,7 +46029,7 @@
                 <a:ea typeface="Arial"/>
                 <a:cs typeface="Arial"/>
               </a:rPr>
-              <a:t>Format and validate the configuration.</a:t>
+              <a:t>Arguments assign values.</a:t>
             </a:r>
           </a:p>
           <a:p>
@@ -46228,7 +46059,7 @@
                 <a:ea typeface="Arial"/>
                 <a:cs typeface="Arial"/>
               </a:rPr>
-              <a:t>Preview the proposed change.</a:t>
+              <a:t>Variables define inputs.</a:t>
             </a:r>
           </a:p>
           <a:p>
@@ -46258,7 +46089,7 @@
                 <a:ea typeface="Arial"/>
                 <a:cs typeface="Arial"/>
               </a:rPr>
-              <a:t>Apply only after reading the plan.</a:t>
+              <a:t>Locals name reusable expressions.</a:t>
             </a:r>
           </a:p>
           <a:p>
@@ -46288,7 +46119,7 @@
                 <a:ea typeface="Arial"/>
                 <a:cs typeface="Arial"/>
               </a:rPr>
-              <a:t>Inspect outputs and state, then clean up.</a:t>
+              <a:t>Outputs expose useful results.</a:t>
             </a:r>
           </a:p>
         </p:txBody>
@@ -46298,7 +46129,7 @@
           <p:cNvPr id="4" name="modern-gold-rule">
             <a:extLst>
               <a:ext uri="{FF2B5EF4-FFF2-40B4-BE49-F238E27FC236}">
-                <a16:creationId xmlns:a16="http://schemas.microsoft.com/office/drawing/2014/main" id="{E0A189C8-77FB-4385-9FE7-DC6AEB830A98}"/>
+                <a16:creationId xmlns:a16="http://schemas.microsoft.com/office/drawing/2014/main" id="{ADE1AA7D-FE6D-4A89-95D5-88E8CD5E9A5B}"/>
               </a:ext>
             </a:extLst>
           </p:cNvPr>
@@ -46325,13 +46156,20 @@
             <a:prstDash val="solid"/>
           </a:ln>
         </p:spPr>
+        <p:txBody>
+          <a:bodyPr/>
+          <a:lstStyle/>
+          <a:p>
+            <a:endParaRPr lang="en-US"/>
+          </a:p>
+        </p:txBody>
       </p:sp>
       <p:sp>
         <p:nvSpPr>
           <p:cNvPr id="5" name="section-label">
             <a:extLst>
               <a:ext uri="{FF2B5EF4-FFF2-40B4-BE49-F238E27FC236}">
-                <a16:creationId xmlns:a16="http://schemas.microsoft.com/office/drawing/2014/main" id="{E122F632-BB12-46EC-9A27-166C53C69C4F}"/>
+                <a16:creationId xmlns:a16="http://schemas.microsoft.com/office/drawing/2014/main" id="{B8B2056A-F73B-4FEA-8DB4-B69CD30D86EF}"/>
               </a:ext>
             </a:extLst>
           </p:cNvPr>
@@ -46379,7 +46217,7 @@
                 <a:ea typeface="Arial"/>
                 <a:cs typeface="Arial"/>
               </a:rPr>
-              <a:t>TERRAFORM WORKFLOW</a:t>
+              <a:t>CONFIGURATION LANGUAGE</a:t>
             </a:r>
           </a:p>
         </p:txBody>
@@ -46389,7 +46227,7 @@
           <p:cNvPr id="6" name="code-snippet">
             <a:extLst>
               <a:ext uri="{FF2B5EF4-FFF2-40B4-BE49-F238E27FC236}">
-                <a16:creationId xmlns:a16="http://schemas.microsoft.com/office/drawing/2014/main" id="{7A7B82B5-BD18-4FF8-B46C-EF605807B05C}"/>
+                <a16:creationId xmlns:a16="http://schemas.microsoft.com/office/drawing/2014/main" id="{57E2E528-1065-49D3-B349-35CF9E5D0581}"/>
               </a:ext>
             </a:extLst>
           </p:cNvPr>
@@ -46400,7 +46238,7 @@
         </p:nvSpPr>
         <p:spPr>
           <a:xfrm>
-            <a:off x="552450" y="2705100"/>
+            <a:off x="581025" y="2705100"/>
             <a:ext cx="7620000" cy="1695450"/>
           </a:xfrm>
           <a:prstGeom prst="rect">
@@ -46418,7 +46256,7 @@
         </p:spPr>
         <p:txBody>
           <a:bodyPr wrap="square" lIns="133350" tIns="114300" rIns="133350" bIns="95250">
-            <a:normAutofit/>
+            <a:normAutofit fontScale="90833" lnSpcReduction="10000"/>
           </a:bodyPr>
           <a:lstStyle/>
           <a:p>
@@ -46441,7 +46279,7 @@
                 <a:ea typeface="Courier New"/>
                 <a:cs typeface="Courier New"/>
               </a:rPr>
-              <a:t>terraform init</a:t>
+              <a:t>variable "environment" {</a:t>
             </a:r>
           </a:p>
           <a:p>
@@ -46464,7 +46302,7 @@
                 <a:ea typeface="Courier New"/>
                 <a:cs typeface="Courier New"/>
               </a:rPr>
-              <a:t>terraform fmt</a:t>
+              <a:t>  type    = string</a:t>
             </a:r>
           </a:p>
           <a:p>
@@ -46487,7 +46325,7 @@
                 <a:ea typeface="Courier New"/>
                 <a:cs typeface="Courier New"/>
               </a:rPr>
-              <a:t>terraform validate</a:t>
+              <a:t>  default = "dev"</a:t>
             </a:r>
           </a:p>
           <a:p>
@@ -46510,8 +46348,18 @@
                 <a:ea typeface="Courier New"/>
                 <a:cs typeface="Courier New"/>
               </a:rPr>
-              <a:t>terraform plan</a:t>
+              <a:t>}</a:t>
             </a:r>
+          </a:p>
+          <a:p>
+            <a:endParaRPr sz="975">
+              <a:solidFill>
+                <a:srgbClr val="221F20"/>
+              </a:solidFill>
+              <a:latin typeface="Courier New"/>
+              <a:ea typeface="Courier New"/>
+              <a:cs typeface="Courier New"/>
+            </a:endParaRPr>
           </a:p>
           <a:p>
             <a:pPr>
@@ -46533,7 +46381,7 @@
                 <a:ea typeface="Courier New"/>
                 <a:cs typeface="Courier New"/>
               </a:rPr>
-              <a:t>terraform apply</a:t>
+              <a:t>locals {</a:t>
             </a:r>
           </a:p>
           <a:p>
@@ -46556,7 +46404,7 @@
                 <a:ea typeface="Courier New"/>
                 <a:cs typeface="Courier New"/>
               </a:rPr>
-              <a:t>terraform output</a:t>
+              <a:t>  service_name = "checkout-${var.environment}"</a:t>
             </a:r>
           </a:p>
           <a:p>
@@ -46579,8 +46427,18 @@
                 <a:ea typeface="Courier New"/>
                 <a:cs typeface="Courier New"/>
               </a:rPr>
-              <a:t>terraform state list</a:t>
+              <a:t>}</a:t>
             </a:r>
+          </a:p>
+          <a:p>
+            <a:endParaRPr sz="975">
+              <a:solidFill>
+                <a:srgbClr val="221F20"/>
+              </a:solidFill>
+              <a:latin typeface="Courier New"/>
+              <a:ea typeface="Courier New"/>
+              <a:cs typeface="Courier New"/>
+            </a:endParaRPr>
           </a:p>
           <a:p>
             <a:pPr>
@@ -46602,7 +46460,53 @@
                 <a:ea typeface="Courier New"/>
                 <a:cs typeface="Courier New"/>
               </a:rPr>
-              <a:t>terraform destroy</a:t>
+              <a:t>output "service_name" {</a:t>
+            </a:r>
+          </a:p>
+          <a:p>
+            <a:pPr>
+              <a:defRPr sz="975">
+                <a:solidFill>
+                  <a:srgbClr val="221F20"/>
+                </a:solidFill>
+                <a:latin typeface="Courier New"/>
+                <a:ea typeface="Courier New"/>
+                <a:cs typeface="Courier New"/>
+              </a:defRPr>
+            </a:pPr>
+            <a:r>
+              <a:rPr sz="975">
+                <a:solidFill>
+                  <a:srgbClr val="221F20"/>
+                </a:solidFill>
+                <a:latin typeface="Courier New"/>
+                <a:ea typeface="Courier New"/>
+                <a:cs typeface="Courier New"/>
+              </a:rPr>
+              <a:t>  value = local.service_name</a:t>
+            </a:r>
+          </a:p>
+          <a:p>
+            <a:pPr>
+              <a:defRPr sz="975">
+                <a:solidFill>
+                  <a:srgbClr val="221F20"/>
+                </a:solidFill>
+                <a:latin typeface="Courier New"/>
+                <a:ea typeface="Courier New"/>
+                <a:cs typeface="Courier New"/>
+              </a:defRPr>
+            </a:pPr>
+            <a:r>
+              <a:rPr sz="975">
+                <a:solidFill>
+                  <a:srgbClr val="221F20"/>
+                </a:solidFill>
+                <a:latin typeface="Courier New"/>
+                <a:ea typeface="Courier New"/>
+                <a:cs typeface="Courier New"/>
+              </a:rPr>
+              <a:t>}</a:t>
             </a:r>
           </a:p>
         </p:txBody>
@@ -46685,7 +46589,7 @@
                 <a:ea typeface="Arial"/>
                 <a:cs typeface="Arial"/>
               </a:rPr>
-              <a:t>Terraform has five core concepts</a:t>
+              <a:t>The CLI workflow is the class rhythm</a:t>
             </a:r>
           </a:p>
         </p:txBody>
@@ -46726,7 +46630,7 @@
                 <a:spcPts val="650"/>
               </a:spcAft>
               <a:buNone/>
-              <a:defRPr sz="1350" b="0" u="none">
+              <a:defRPr sz="1238" b="0" u="none">
                 <a:solidFill>
                   <a:srgbClr val="221F20"/>
                 </a:solidFill>
@@ -46736,7 +46640,7 @@
               </a:defRPr>
             </a:pPr>
             <a:r>
-              <a:rPr sz="1350" b="0" u="none">
+              <a:rPr sz="1238" b="0" u="none">
                 <a:solidFill>
                   <a:srgbClr val="221F20"/>
                 </a:solidFill>
@@ -46744,7 +46648,7 @@
                 <a:ea typeface="Arial"/>
                 <a:cs typeface="Arial"/>
               </a:rPr>
-              <a:t>Configuration: what you want.</a:t>
+              <a:t>Initialize the working directory.</a:t>
             </a:r>
           </a:p>
           <a:p>
@@ -46756,7 +46660,7 @@
                 <a:spcPts val="650"/>
               </a:spcAft>
               <a:buNone/>
-              <a:defRPr sz="1350" b="0" u="none">
+              <a:defRPr sz="1238" b="0" u="none">
                 <a:solidFill>
                   <a:srgbClr val="221F20"/>
                 </a:solidFill>
@@ -46766,7 +46670,7 @@
               </a:defRPr>
             </a:pPr>
             <a:r>
-              <a:rPr sz="1350" b="0" u="none">
+              <a:rPr sz="1238" b="0" u="none">
                 <a:solidFill>
                   <a:srgbClr val="221F20"/>
                 </a:solidFill>
@@ -46774,7 +46678,7 @@
                 <a:ea typeface="Arial"/>
                 <a:cs typeface="Arial"/>
               </a:rPr>
-              <a:t>Providers: APIs Terraform talks to.</a:t>
+              <a:t>Format and validate the configuration.</a:t>
             </a:r>
           </a:p>
           <a:p>
@@ -46786,7 +46690,7 @@
                 <a:spcPts val="650"/>
               </a:spcAft>
               <a:buNone/>
-              <a:defRPr sz="1350" b="0" u="none">
+              <a:defRPr sz="1238" b="0" u="none">
                 <a:solidFill>
                   <a:srgbClr val="221F20"/>
                 </a:solidFill>
@@ -46796,7 +46700,7 @@
               </a:defRPr>
             </a:pPr>
             <a:r>
-              <a:rPr sz="1350" b="0" u="none">
+              <a:rPr sz="1238" b="0" u="none">
                 <a:solidFill>
                   <a:srgbClr val="221F20"/>
                 </a:solidFill>
@@ -46804,7 +46708,7 @@
                 <a:ea typeface="Arial"/>
                 <a:cs typeface="Arial"/>
               </a:rPr>
-              <a:t>Resources: objects Terraform manages.</a:t>
+              <a:t>Preview the proposed change.</a:t>
             </a:r>
           </a:p>
           <a:p>
@@ -46816,7 +46720,7 @@
                 <a:spcPts val="650"/>
               </a:spcAft>
               <a:buNone/>
-              <a:defRPr sz="1350" b="0" u="none">
+              <a:defRPr sz="1238" b="0" u="none">
                 <a:solidFill>
                   <a:srgbClr val="221F20"/>
                 </a:solidFill>
@@ -46826,7 +46730,7 @@
               </a:defRPr>
             </a:pPr>
             <a:r>
-              <a:rPr sz="1350" b="0" u="none">
+              <a:rPr sz="1238" b="0" u="none">
                 <a:solidFill>
                   <a:srgbClr val="221F20"/>
                 </a:solidFill>
@@ -46834,7 +46738,7 @@
                 <a:ea typeface="Arial"/>
                 <a:cs typeface="Arial"/>
               </a:rPr>
-              <a:t>State: what Terraform believes exists.</a:t>
+              <a:t>Apply only after reading the plan.</a:t>
             </a:r>
           </a:p>
           <a:p>
@@ -46846,7 +46750,7 @@
                 <a:spcPts val="650"/>
               </a:spcAft>
               <a:buNone/>
-              <a:defRPr sz="1350" b="0" u="none">
+              <a:defRPr sz="1238" b="0" u="none">
                 <a:solidFill>
                   <a:srgbClr val="221F20"/>
                 </a:solidFill>
@@ -46856,7 +46760,7 @@
               </a:defRPr>
             </a:pPr>
             <a:r>
-              <a:rPr sz="1350" b="0" u="none">
+              <a:rPr sz="1238" b="0" u="none">
                 <a:solidFill>
                   <a:srgbClr val="221F20"/>
                 </a:solidFill>
@@ -46864,7 +46768,7 @@
                 <a:ea typeface="Arial"/>
                 <a:cs typeface="Arial"/>
               </a:rPr>
-              <a:t>Plan and apply: preview the difference, then execute intentionally.</a:t>
+              <a:t>Inspect outputs and state, then clean up.</a:t>
             </a:r>
           </a:p>
         </p:txBody>
@@ -46874,7 +46778,7 @@
           <p:cNvPr id="4" name="modern-gold-rule">
             <a:extLst>
               <a:ext uri="{FF2B5EF4-FFF2-40B4-BE49-F238E27FC236}">
-                <a16:creationId xmlns:a16="http://schemas.microsoft.com/office/drawing/2014/main" id="{8BE5AC4A-337D-427C-BA98-F9D592598259}"/>
+                <a16:creationId xmlns:a16="http://schemas.microsoft.com/office/drawing/2014/main" id="{E0A189C8-77FB-4385-9FE7-DC6AEB830A98}"/>
               </a:ext>
             </a:extLst>
           </p:cNvPr>
@@ -46901,13 +46805,20 @@
             <a:prstDash val="solid"/>
           </a:ln>
         </p:spPr>
+        <p:txBody>
+          <a:bodyPr/>
+          <a:lstStyle/>
+          <a:p>
+            <a:endParaRPr lang="en-US"/>
+          </a:p>
+        </p:txBody>
       </p:sp>
       <p:sp>
         <p:nvSpPr>
           <p:cNvPr id="5" name="section-label">
             <a:extLst>
               <a:ext uri="{FF2B5EF4-FFF2-40B4-BE49-F238E27FC236}">
-                <a16:creationId xmlns:a16="http://schemas.microsoft.com/office/drawing/2014/main" id="{FECE6EFD-8B75-49EF-B72A-A270CFD4704E}"/>
+                <a16:creationId xmlns:a16="http://schemas.microsoft.com/office/drawing/2014/main" id="{E122F632-BB12-46EC-9A27-166C53C69C4F}"/>
               </a:ext>
             </a:extLst>
           </p:cNvPr>
@@ -46955,7 +46866,230 @@
                 <a:ea typeface="Arial"/>
                 <a:cs typeface="Arial"/>
               </a:rPr>
-              <a:t>MENTAL MODEL</a:t>
+              <a:t>TERRAFORM WORKFLOW</a:t>
+            </a:r>
+          </a:p>
+        </p:txBody>
+      </p:sp>
+      <p:sp>
+        <p:nvSpPr>
+          <p:cNvPr id="6" name="code-snippet">
+            <a:extLst>
+              <a:ext uri="{FF2B5EF4-FFF2-40B4-BE49-F238E27FC236}">
+                <a16:creationId xmlns:a16="http://schemas.microsoft.com/office/drawing/2014/main" id="{7A7B82B5-BD18-4FF8-B46C-EF605807B05C}"/>
+              </a:ext>
+            </a:extLst>
+          </p:cNvPr>
+          <p:cNvSpPr>
+            <a:spLocks noGrp="1"/>
+          </p:cNvSpPr>
+          <p:nvPr/>
+        </p:nvSpPr>
+        <p:spPr>
+          <a:xfrm>
+            <a:off x="552450" y="2705100"/>
+            <a:ext cx="7620000" cy="1695450"/>
+          </a:xfrm>
+          <a:prstGeom prst="rect">
+            <a:avLst/>
+          </a:prstGeom>
+          <a:solidFill>
+            <a:srgbClr val="F7F7F5"/>
+          </a:solidFill>
+          <a:ln w="9525">
+            <a:solidFill>
+              <a:srgbClr val="D5D5D7"/>
+            </a:solidFill>
+            <a:prstDash val="solid"/>
+          </a:ln>
+        </p:spPr>
+        <p:txBody>
+          <a:bodyPr wrap="square" lIns="133350" tIns="114300" rIns="133350" bIns="95250">
+            <a:normAutofit/>
+          </a:bodyPr>
+          <a:lstStyle/>
+          <a:p>
+            <a:pPr>
+              <a:defRPr sz="975">
+                <a:solidFill>
+                  <a:srgbClr val="221F20"/>
+                </a:solidFill>
+                <a:latin typeface="Courier New"/>
+                <a:ea typeface="Courier New"/>
+                <a:cs typeface="Courier New"/>
+              </a:defRPr>
+            </a:pPr>
+            <a:r>
+              <a:rPr sz="975">
+                <a:solidFill>
+                  <a:srgbClr val="221F20"/>
+                </a:solidFill>
+                <a:latin typeface="Courier New"/>
+                <a:ea typeface="Courier New"/>
+                <a:cs typeface="Courier New"/>
+              </a:rPr>
+              <a:t>terraform init</a:t>
+            </a:r>
+          </a:p>
+          <a:p>
+            <a:pPr>
+              <a:defRPr sz="975">
+                <a:solidFill>
+                  <a:srgbClr val="221F20"/>
+                </a:solidFill>
+                <a:latin typeface="Courier New"/>
+                <a:ea typeface="Courier New"/>
+                <a:cs typeface="Courier New"/>
+              </a:defRPr>
+            </a:pPr>
+            <a:r>
+              <a:rPr sz="975">
+                <a:solidFill>
+                  <a:srgbClr val="221F20"/>
+                </a:solidFill>
+                <a:latin typeface="Courier New"/>
+                <a:ea typeface="Courier New"/>
+                <a:cs typeface="Courier New"/>
+              </a:rPr>
+              <a:t>terraform fmt</a:t>
+            </a:r>
+          </a:p>
+          <a:p>
+            <a:pPr>
+              <a:defRPr sz="975">
+                <a:solidFill>
+                  <a:srgbClr val="221F20"/>
+                </a:solidFill>
+                <a:latin typeface="Courier New"/>
+                <a:ea typeface="Courier New"/>
+                <a:cs typeface="Courier New"/>
+              </a:defRPr>
+            </a:pPr>
+            <a:r>
+              <a:rPr sz="975">
+                <a:solidFill>
+                  <a:srgbClr val="221F20"/>
+                </a:solidFill>
+                <a:latin typeface="Courier New"/>
+                <a:ea typeface="Courier New"/>
+                <a:cs typeface="Courier New"/>
+              </a:rPr>
+              <a:t>terraform validate</a:t>
+            </a:r>
+          </a:p>
+          <a:p>
+            <a:pPr>
+              <a:defRPr sz="975">
+                <a:solidFill>
+                  <a:srgbClr val="221F20"/>
+                </a:solidFill>
+                <a:latin typeface="Courier New"/>
+                <a:ea typeface="Courier New"/>
+                <a:cs typeface="Courier New"/>
+              </a:defRPr>
+            </a:pPr>
+            <a:r>
+              <a:rPr sz="975">
+                <a:solidFill>
+                  <a:srgbClr val="221F20"/>
+                </a:solidFill>
+                <a:latin typeface="Courier New"/>
+                <a:ea typeface="Courier New"/>
+                <a:cs typeface="Courier New"/>
+              </a:rPr>
+              <a:t>terraform plan</a:t>
+            </a:r>
+          </a:p>
+          <a:p>
+            <a:pPr>
+              <a:defRPr sz="975">
+                <a:solidFill>
+                  <a:srgbClr val="221F20"/>
+                </a:solidFill>
+                <a:latin typeface="Courier New"/>
+                <a:ea typeface="Courier New"/>
+                <a:cs typeface="Courier New"/>
+              </a:defRPr>
+            </a:pPr>
+            <a:r>
+              <a:rPr sz="975">
+                <a:solidFill>
+                  <a:srgbClr val="221F20"/>
+                </a:solidFill>
+                <a:latin typeface="Courier New"/>
+                <a:ea typeface="Courier New"/>
+                <a:cs typeface="Courier New"/>
+              </a:rPr>
+              <a:t>terraform apply</a:t>
+            </a:r>
+          </a:p>
+          <a:p>
+            <a:pPr>
+              <a:defRPr sz="975">
+                <a:solidFill>
+                  <a:srgbClr val="221F20"/>
+                </a:solidFill>
+                <a:latin typeface="Courier New"/>
+                <a:ea typeface="Courier New"/>
+                <a:cs typeface="Courier New"/>
+              </a:defRPr>
+            </a:pPr>
+            <a:r>
+              <a:rPr sz="975">
+                <a:solidFill>
+                  <a:srgbClr val="221F20"/>
+                </a:solidFill>
+                <a:latin typeface="Courier New"/>
+                <a:ea typeface="Courier New"/>
+                <a:cs typeface="Courier New"/>
+              </a:rPr>
+              <a:t>terraform output</a:t>
+            </a:r>
+          </a:p>
+          <a:p>
+            <a:pPr>
+              <a:defRPr sz="975">
+                <a:solidFill>
+                  <a:srgbClr val="221F20"/>
+                </a:solidFill>
+                <a:latin typeface="Courier New"/>
+                <a:ea typeface="Courier New"/>
+                <a:cs typeface="Courier New"/>
+              </a:defRPr>
+            </a:pPr>
+            <a:r>
+              <a:rPr sz="975">
+                <a:solidFill>
+                  <a:srgbClr val="221F20"/>
+                </a:solidFill>
+                <a:latin typeface="Courier New"/>
+                <a:ea typeface="Courier New"/>
+                <a:cs typeface="Courier New"/>
+              </a:rPr>
+              <a:t>terraform state list</a:t>
+            </a:r>
+          </a:p>
+          <a:p>
+            <a:pPr>
+              <a:defRPr sz="975">
+                <a:solidFill>
+                  <a:srgbClr val="221F20"/>
+                </a:solidFill>
+                <a:latin typeface="Courier New"/>
+                <a:ea typeface="Courier New"/>
+                <a:cs typeface="Courier New"/>
+              </a:defRPr>
+            </a:pPr>
+            <a:r>
+              <a:rPr sz="975">
+                <a:solidFill>
+                  <a:srgbClr val="221F20"/>
+                </a:solidFill>
+                <a:latin typeface="Courier New"/>
+                <a:ea typeface="Courier New"/>
+                <a:cs typeface="Courier New"/>
+              </a:rPr>
+              <a:t>terraform destroy</a:t>
             </a:r>
           </a:p>
         </p:txBody>
@@ -47014,7 +47148,7 @@
         </p:spPr>
         <p:txBody>
           <a:bodyPr wrap="square" lIns="0" tIns="0" rIns="38100" bIns="0" anchor="t">
-            <a:normAutofit fontScale="98136"/>
+            <a:normAutofit/>
           </a:bodyPr>
           <a:lstStyle/>
           <a:p>
@@ -47038,7 +47172,7 @@
                 <a:ea typeface="Arial"/>
                 <a:cs typeface="Arial"/>
               </a:rPr>
-              <a:t>Infrastructure as code makes intended change visible</a:t>
+              <a:t>Terraform has five core concepts</a:t>
             </a:r>
           </a:p>
         </p:txBody>
@@ -47097,7 +47231,7 @@
                 <a:ea typeface="Arial"/>
                 <a:cs typeface="Arial"/>
               </a:rPr>
-              <a:t>Manual changes are hard to review.</a:t>
+              <a:t>Configuration: what you want.</a:t>
             </a:r>
           </a:p>
           <a:p>
@@ -47127,7 +47261,7 @@
                 <a:ea typeface="Arial"/>
                 <a:cs typeface="Arial"/>
               </a:rPr>
-              <a:t>Click paths are hard to repeat.</a:t>
+              <a:t>Providers: APIs Terraform talks to.</a:t>
             </a:r>
           </a:p>
           <a:p>
@@ -47157,7 +47291,7 @@
                 <a:ea typeface="Arial"/>
                 <a:cs typeface="Arial"/>
               </a:rPr>
-              <a:t>Drift is hard to see.</a:t>
+              <a:t>Resources: objects Terraform manages.</a:t>
             </a:r>
           </a:p>
           <a:p>
@@ -47187,7 +47321,7 @@
                 <a:ea typeface="Arial"/>
                 <a:cs typeface="Arial"/>
               </a:rPr>
-              <a:t>Plans make proposed changes visible before execution.</a:t>
+              <a:t>State: what Terraform believes exists.</a:t>
             </a:r>
           </a:p>
           <a:p>
@@ -47217,7 +47351,7 @@
                 <a:ea typeface="Arial"/>
                 <a:cs typeface="Arial"/>
               </a:rPr>
-              <a:t>State gives Terraform memory across runs.</a:t>
+              <a:t>Plan and apply: preview the difference, then execute intentionally.</a:t>
             </a:r>
           </a:p>
         </p:txBody>
@@ -47227,7 +47361,7 @@
           <p:cNvPr id="4" name="modern-gold-rule">
             <a:extLst>
               <a:ext uri="{FF2B5EF4-FFF2-40B4-BE49-F238E27FC236}">
-                <a16:creationId xmlns:a16="http://schemas.microsoft.com/office/drawing/2014/main" id="{B3812874-9CA6-451C-810E-9959629C1C7B}"/>
+                <a16:creationId xmlns:a16="http://schemas.microsoft.com/office/drawing/2014/main" id="{8BE5AC4A-337D-427C-BA98-F9D592598259}"/>
               </a:ext>
             </a:extLst>
           </p:cNvPr>
@@ -47254,13 +47388,20 @@
             <a:prstDash val="solid"/>
           </a:ln>
         </p:spPr>
+        <p:txBody>
+          <a:bodyPr/>
+          <a:lstStyle/>
+          <a:p>
+            <a:endParaRPr lang="en-US"/>
+          </a:p>
+        </p:txBody>
       </p:sp>
       <p:sp>
         <p:nvSpPr>
           <p:cNvPr id="5" name="section-label">
             <a:extLst>
               <a:ext uri="{FF2B5EF4-FFF2-40B4-BE49-F238E27FC236}">
-                <a16:creationId xmlns:a16="http://schemas.microsoft.com/office/drawing/2014/main" id="{068C5413-AC72-40C8-A229-77B1654737C7}"/>
+                <a16:creationId xmlns:a16="http://schemas.microsoft.com/office/drawing/2014/main" id="{FECE6EFD-8B75-49EF-B72A-A270CFD4704E}"/>
               </a:ext>
             </a:extLst>
           </p:cNvPr>
@@ -47308,7 +47449,7 @@
                 <a:ea typeface="Arial"/>
                 <a:cs typeface="Arial"/>
               </a:rPr>
-              <a:t>WHY TERRAFORM</a:t>
+              <a:t>MENTAL MODEL</a:t>
             </a:r>
           </a:p>
         </p:txBody>
@@ -47367,7 +47508,7 @@
         </p:spPr>
         <p:txBody>
           <a:bodyPr wrap="square" lIns="0" tIns="0" rIns="38100" bIns="0" anchor="t">
-            <a:normAutofit/>
+            <a:normAutofit fontScale="98136"/>
           </a:bodyPr>
           <a:lstStyle/>
           <a:p>
@@ -47391,7 +47532,7 @@
                 <a:ea typeface="Arial"/>
                 <a:cs typeface="Arial"/>
               </a:rPr>
-              <a:t>Class setup and ground rules</a:t>
+              <a:t>Infrastructure as code makes intended change visible</a:t>
             </a:r>
           </a:p>
         </p:txBody>
@@ -47450,7 +47591,7 @@
                 <a:ea typeface="Arial"/>
                 <a:cs typeface="Arial"/>
               </a:rPr>
-              <a:t>Students need:</a:t>
+              <a:t>Manual changes are hard to review.</a:t>
             </a:r>
           </a:p>
           <a:p>
@@ -47480,7 +47621,7 @@
                 <a:ea typeface="Arial"/>
                 <a:cs typeface="Arial"/>
               </a:rPr>
-              <a:t>Terraform CLI 1.4 or later</a:t>
+              <a:t>Click paths are hard to repeat.</a:t>
             </a:r>
           </a:p>
           <a:p>
@@ -47510,7 +47651,7 @@
                 <a:ea typeface="Arial"/>
                 <a:cs typeface="Arial"/>
               </a:rPr>
-              <a:t>A terminal, text editor, and Git repository</a:t>
+              <a:t>Drift is hard to see.</a:t>
             </a:r>
           </a:p>
           <a:p>
@@ -47540,35 +47681,8 @@
                 <a:ea typeface="Arial"/>
                 <a:cs typeface="Arial"/>
               </a:rPr>
-              <a:t>No provider credentials and no cloud account</a:t>
+              <a:t>Plans make proposed changes visible before execution.</a:t>
             </a:r>
-          </a:p>
-          <a:p>
-            <a:pPr marL="0" indent="0" algn="l">
-              <a:spcBef>
-                <a:spcPts val="0"/>
-              </a:spcBef>
-              <a:spcAft>
-                <a:spcPts val="650"/>
-              </a:spcAft>
-              <a:buNone/>
-              <a:defRPr sz="1350" b="0" u="none">
-                <a:solidFill>
-                  <a:srgbClr val="221F20"/>
-                </a:solidFill>
-                <a:latin typeface="Arial"/>
-                <a:ea typeface="Arial"/>
-                <a:cs typeface="Arial"/>
-              </a:defRPr>
-            </a:pPr>
-            <a:endParaRPr sz="1350" b="0" u="none">
-              <a:solidFill>
-                <a:srgbClr val="221F20"/>
-              </a:solidFill>
-              <a:latin typeface="Arial"/>
-              <a:ea typeface="Arial"/>
-              <a:cs typeface="Arial"/>
-            </a:endParaRPr>
           </a:p>
           <a:p>
             <a:pPr marL="0" indent="0" algn="l">
@@ -47597,7 +47711,7 @@
                 <a:ea typeface="Arial"/>
                 <a:cs typeface="Arial"/>
               </a:rPr>
-              <a:t>Class rule: read every plan before apply.</a:t>
+              <a:t>State gives Terraform memory across runs.</a:t>
             </a:r>
           </a:p>
         </p:txBody>
@@ -47607,7 +47721,7 @@
           <p:cNvPr id="4" name="modern-gold-rule">
             <a:extLst>
               <a:ext uri="{FF2B5EF4-FFF2-40B4-BE49-F238E27FC236}">
-                <a16:creationId xmlns:a16="http://schemas.microsoft.com/office/drawing/2014/main" id="{D5F897DB-3684-475D-838F-7ACC5F689F9B}"/>
+                <a16:creationId xmlns:a16="http://schemas.microsoft.com/office/drawing/2014/main" id="{B3812874-9CA6-451C-810E-9959629C1C7B}"/>
               </a:ext>
             </a:extLst>
           </p:cNvPr>
@@ -47634,13 +47748,20 @@
             <a:prstDash val="solid"/>
           </a:ln>
         </p:spPr>
+        <p:txBody>
+          <a:bodyPr/>
+          <a:lstStyle/>
+          <a:p>
+            <a:endParaRPr lang="en-US"/>
+          </a:p>
+        </p:txBody>
       </p:sp>
       <p:sp>
         <p:nvSpPr>
           <p:cNvPr id="5" name="section-label">
             <a:extLst>
               <a:ext uri="{FF2B5EF4-FFF2-40B4-BE49-F238E27FC236}">
-                <a16:creationId xmlns:a16="http://schemas.microsoft.com/office/drawing/2014/main" id="{59C4020A-3214-44E2-9E98-D397139B1CCC}"/>
+                <a16:creationId xmlns:a16="http://schemas.microsoft.com/office/drawing/2014/main" id="{068C5413-AC72-40C8-A229-77B1654737C7}"/>
               </a:ext>
             </a:extLst>
           </p:cNvPr>
@@ -47688,7 +47809,7 @@
                 <a:ea typeface="Arial"/>
                 <a:cs typeface="Arial"/>
               </a:rPr>
-              <a:t>HANDS-ON SETUP</a:t>
+              <a:t>WHY TERRAFORM</a:t>
             </a:r>
           </a:p>
         </p:txBody>
@@ -47771,6 +47892,393 @@
                 <a:ea typeface="Arial"/>
                 <a:cs typeface="Arial"/>
               </a:rPr>
+              <a:t>Class setup and ground rules</a:t>
+            </a:r>
+          </a:p>
+        </p:txBody>
+      </p:sp>
+      <p:sp>
+        <p:nvSpPr>
+          <p:cNvPr id="3" name="Content Placeholder 2">
+            <a:extLst>
+              <a:ext uri="{FF2B5EF4-FFF2-40B4-BE49-F238E27FC236}">
+                <a16:creationId xmlns:a16="http://schemas.microsoft.com/office/drawing/2014/main" id="{D93EE42B-DB9D-4A87-960F-9EAB79C801BC}"/>
+              </a:ext>
+            </a:extLst>
+          </p:cNvPr>
+          <p:cNvSpPr>
+            <a:spLocks noGrp="1"/>
+          </p:cNvSpPr>
+          <p:nvPr>
+            <p:ph idx="1"/>
+          </p:nvPr>
+        </p:nvSpPr>
+        <p:spPr>
+          <a:xfrm>
+            <a:off x="552450" y="1181100"/>
+            <a:ext cx="7677150" cy="3048000"/>
+          </a:xfrm>
+        </p:spPr>
+        <p:txBody>
+          <a:bodyPr wrap="square" lIns="0" tIns="0" rIns="38100" bIns="0" anchor="t">
+            <a:normAutofit/>
+          </a:bodyPr>
+          <a:lstStyle/>
+          <a:p>
+            <a:pPr marL="0" indent="0" algn="l">
+              <a:spcBef>
+                <a:spcPts val="0"/>
+              </a:spcBef>
+              <a:spcAft>
+                <a:spcPts val="650"/>
+              </a:spcAft>
+              <a:buNone/>
+              <a:defRPr sz="1350" b="0" u="none">
+                <a:solidFill>
+                  <a:srgbClr val="221F20"/>
+                </a:solidFill>
+                <a:latin typeface="Arial"/>
+                <a:ea typeface="Arial"/>
+                <a:cs typeface="Arial"/>
+              </a:defRPr>
+            </a:pPr>
+            <a:r>
+              <a:rPr sz="1350" b="0" u="none">
+                <a:solidFill>
+                  <a:srgbClr val="221F20"/>
+                </a:solidFill>
+                <a:latin typeface="Arial"/>
+                <a:ea typeface="Arial"/>
+                <a:cs typeface="Arial"/>
+              </a:rPr>
+              <a:t>Students need:</a:t>
+            </a:r>
+          </a:p>
+          <a:p>
+            <a:pPr marL="0" indent="0" algn="l">
+              <a:spcBef>
+                <a:spcPts val="0"/>
+              </a:spcBef>
+              <a:spcAft>
+                <a:spcPts val="650"/>
+              </a:spcAft>
+              <a:buNone/>
+              <a:defRPr sz="1350" b="0" u="none">
+                <a:solidFill>
+                  <a:srgbClr val="221F20"/>
+                </a:solidFill>
+                <a:latin typeface="Arial"/>
+                <a:ea typeface="Arial"/>
+                <a:cs typeface="Arial"/>
+              </a:defRPr>
+            </a:pPr>
+            <a:r>
+              <a:rPr sz="1350" b="0" u="none">
+                <a:solidFill>
+                  <a:srgbClr val="221F20"/>
+                </a:solidFill>
+                <a:latin typeface="Arial"/>
+                <a:ea typeface="Arial"/>
+                <a:cs typeface="Arial"/>
+              </a:rPr>
+              <a:t>Terraform CLI 1.4 or later</a:t>
+            </a:r>
+          </a:p>
+          <a:p>
+            <a:pPr marL="0" indent="0" algn="l">
+              <a:spcBef>
+                <a:spcPts val="0"/>
+              </a:spcBef>
+              <a:spcAft>
+                <a:spcPts val="650"/>
+              </a:spcAft>
+              <a:buNone/>
+              <a:defRPr sz="1350" b="0" u="none">
+                <a:solidFill>
+                  <a:srgbClr val="221F20"/>
+                </a:solidFill>
+                <a:latin typeface="Arial"/>
+                <a:ea typeface="Arial"/>
+                <a:cs typeface="Arial"/>
+              </a:defRPr>
+            </a:pPr>
+            <a:r>
+              <a:rPr sz="1350" b="0" u="none">
+                <a:solidFill>
+                  <a:srgbClr val="221F20"/>
+                </a:solidFill>
+                <a:latin typeface="Arial"/>
+                <a:ea typeface="Arial"/>
+                <a:cs typeface="Arial"/>
+              </a:rPr>
+              <a:t>A terminal, text editor, and Git repository</a:t>
+            </a:r>
+          </a:p>
+          <a:p>
+            <a:pPr marL="0" indent="0" algn="l">
+              <a:spcBef>
+                <a:spcPts val="0"/>
+              </a:spcBef>
+              <a:spcAft>
+                <a:spcPts val="650"/>
+              </a:spcAft>
+              <a:buNone/>
+              <a:defRPr sz="1350" b="0" u="none">
+                <a:solidFill>
+                  <a:srgbClr val="221F20"/>
+                </a:solidFill>
+                <a:latin typeface="Arial"/>
+                <a:ea typeface="Arial"/>
+                <a:cs typeface="Arial"/>
+              </a:defRPr>
+            </a:pPr>
+            <a:r>
+              <a:rPr sz="1350" b="0" u="none">
+                <a:solidFill>
+                  <a:srgbClr val="221F20"/>
+                </a:solidFill>
+                <a:latin typeface="Arial"/>
+                <a:ea typeface="Arial"/>
+                <a:cs typeface="Arial"/>
+              </a:rPr>
+              <a:t>No provider credentials and no cloud account</a:t>
+            </a:r>
+          </a:p>
+          <a:p>
+            <a:pPr marL="0" indent="0" algn="l">
+              <a:spcBef>
+                <a:spcPts val="0"/>
+              </a:spcBef>
+              <a:spcAft>
+                <a:spcPts val="650"/>
+              </a:spcAft>
+              <a:buNone/>
+              <a:defRPr sz="1350" b="0" u="none">
+                <a:solidFill>
+                  <a:srgbClr val="221F20"/>
+                </a:solidFill>
+                <a:latin typeface="Arial"/>
+                <a:ea typeface="Arial"/>
+                <a:cs typeface="Arial"/>
+              </a:defRPr>
+            </a:pPr>
+            <a:endParaRPr sz="1350" b="0" u="none">
+              <a:solidFill>
+                <a:srgbClr val="221F20"/>
+              </a:solidFill>
+              <a:latin typeface="Arial"/>
+              <a:ea typeface="Arial"/>
+              <a:cs typeface="Arial"/>
+            </a:endParaRPr>
+          </a:p>
+          <a:p>
+            <a:pPr marL="0" indent="0" algn="l">
+              <a:spcBef>
+                <a:spcPts val="0"/>
+              </a:spcBef>
+              <a:spcAft>
+                <a:spcPts val="650"/>
+              </a:spcAft>
+              <a:buNone/>
+              <a:defRPr sz="1350" b="0" u="none">
+                <a:solidFill>
+                  <a:srgbClr val="221F20"/>
+                </a:solidFill>
+                <a:latin typeface="Arial"/>
+                <a:ea typeface="Arial"/>
+                <a:cs typeface="Arial"/>
+              </a:defRPr>
+            </a:pPr>
+            <a:r>
+              <a:rPr sz="1350" b="0" u="none">
+                <a:solidFill>
+                  <a:srgbClr val="221F20"/>
+                </a:solidFill>
+                <a:latin typeface="Arial"/>
+                <a:ea typeface="Arial"/>
+                <a:cs typeface="Arial"/>
+              </a:rPr>
+              <a:t>Class rule: read every plan before apply.</a:t>
+            </a:r>
+          </a:p>
+        </p:txBody>
+      </p:sp>
+      <p:sp>
+        <p:nvSpPr>
+          <p:cNvPr id="4" name="modern-gold-rule">
+            <a:extLst>
+              <a:ext uri="{FF2B5EF4-FFF2-40B4-BE49-F238E27FC236}">
+                <a16:creationId xmlns:a16="http://schemas.microsoft.com/office/drawing/2014/main" id="{D5F897DB-3684-475D-838F-7ACC5F689F9B}"/>
+              </a:ext>
+            </a:extLst>
+          </p:cNvPr>
+          <p:cNvSpPr>
+            <a:spLocks noGrp="1"/>
+          </p:cNvSpPr>
+          <p:nvPr/>
+        </p:nvSpPr>
+        <p:spPr>
+          <a:xfrm>
+            <a:off x="381000" y="914400"/>
+            <a:ext cx="2095500" cy="47625"/>
+          </a:xfrm>
+          <a:prstGeom prst="rect">
+            <a:avLst/>
+          </a:prstGeom>
+          <a:solidFill>
+            <a:srgbClr val="FFCC01"/>
+          </a:solidFill>
+          <a:ln w="0">
+            <a:solidFill>
+              <a:srgbClr val="FFCC01"/>
+            </a:solidFill>
+            <a:prstDash val="solid"/>
+          </a:ln>
+        </p:spPr>
+        <p:txBody>
+          <a:bodyPr/>
+          <a:lstStyle/>
+          <a:p>
+            <a:endParaRPr lang="en-US"/>
+          </a:p>
+        </p:txBody>
+      </p:sp>
+      <p:sp>
+        <p:nvSpPr>
+          <p:cNvPr id="5" name="section-label">
+            <a:extLst>
+              <a:ext uri="{FF2B5EF4-FFF2-40B4-BE49-F238E27FC236}">
+                <a16:creationId xmlns:a16="http://schemas.microsoft.com/office/drawing/2014/main" id="{59C4020A-3214-44E2-9E98-D397139B1CCC}"/>
+              </a:ext>
+            </a:extLst>
+          </p:cNvPr>
+          <p:cNvSpPr>
+            <a:spLocks noGrp="1"/>
+          </p:cNvSpPr>
+          <p:nvPr/>
+        </p:nvSpPr>
+        <p:spPr>
+          <a:xfrm>
+            <a:off x="381000" y="990600"/>
+            <a:ext cx="4286250" cy="171450"/>
+          </a:xfrm>
+          <a:prstGeom prst="rect">
+            <a:avLst/>
+          </a:prstGeom>
+          <a:noFill/>
+          <a:ln w="0">
+            <a:noFill/>
+            <a:prstDash val="solid"/>
+          </a:ln>
+        </p:spPr>
+        <p:txBody>
+          <a:bodyPr wrap="square" lIns="0" tIns="0" rIns="0" bIns="0" anchor="t">
+            <a:normAutofit/>
+          </a:bodyPr>
+          <a:lstStyle/>
+          <a:p>
+            <a:pPr algn="l">
+              <a:defRPr sz="638" b="1" u="none">
+                <a:solidFill>
+                  <a:srgbClr val="565557"/>
+                </a:solidFill>
+                <a:latin typeface="Arial"/>
+                <a:ea typeface="Arial"/>
+                <a:cs typeface="Arial"/>
+              </a:defRPr>
+            </a:pPr>
+            <a:r>
+              <a:rPr sz="638" b="1" u="none">
+                <a:solidFill>
+                  <a:srgbClr val="565557"/>
+                </a:solidFill>
+                <a:latin typeface="Arial"/>
+                <a:ea typeface="Arial"/>
+                <a:cs typeface="Arial"/>
+              </a:rPr>
+              <a:t>HANDS-ON SETUP</a:t>
+            </a:r>
+          </a:p>
+        </p:txBody>
+      </p:sp>
+    </p:spTree>
+    <p:extLst>
+      <p:ext uri="{BB962C8B-B14F-4D97-AF65-F5344CB8AC3E}">
+        <p14:creationId xmlns:p14="http://schemas.microsoft.com/office/powerpoint/2010/main" val="3459908186"/>
+      </p:ext>
+    </p:extLst>
+  </p:cSld>
+  <p:clrMapOvr>
+    <a:masterClrMapping/>
+  </p:clrMapOvr>
+</p:sld>
+</file>
+
+<file path=ppt/slides/slide29.xml><?xml version="1.0" encoding="utf-8"?>
+<p:sld xmlns:a="http://schemas.openxmlformats.org/drawingml/2006/main" xmlns:r="http://schemas.openxmlformats.org/officeDocument/2006/relationships" xmlns:p="http://schemas.openxmlformats.org/presentationml/2006/main">
+  <p:cSld>
+    <p:spTree>
+      <p:nvGrpSpPr>
+        <p:cNvPr id="1" name=""/>
+        <p:cNvGrpSpPr/>
+        <p:nvPr/>
+      </p:nvGrpSpPr>
+      <p:grpSpPr>
+        <a:xfrm>
+          <a:off x="0" y="0"/>
+          <a:ext cx="0" cy="0"/>
+          <a:chOff x="0" y="0"/>
+          <a:chExt cx="0" cy="0"/>
+        </a:xfrm>
+      </p:grpSpPr>
+      <p:sp>
+        <p:nvSpPr>
+          <p:cNvPr id="2" name="Title 1">
+            <a:extLst>
+              <a:ext uri="{FF2B5EF4-FFF2-40B4-BE49-F238E27FC236}">
+                <a16:creationId xmlns:a16="http://schemas.microsoft.com/office/drawing/2014/main" id="{CE3EBA7D-B4B3-3797-8578-839899CDAF0F}"/>
+              </a:ext>
+            </a:extLst>
+          </p:cNvPr>
+          <p:cNvSpPr>
+            <a:spLocks noGrp="1"/>
+          </p:cNvSpPr>
+          <p:nvPr>
+            <p:ph type="title"/>
+          </p:nvPr>
+        </p:nvSpPr>
+        <p:spPr>
+          <a:xfrm>
+            <a:off x="381000" y="361950"/>
+            <a:ext cx="6953250" cy="552450"/>
+          </a:xfrm>
+        </p:spPr>
+        <p:txBody>
+          <a:bodyPr wrap="square" lIns="0" tIns="0" rIns="38100" bIns="0" anchor="t">
+            <a:normAutofit/>
+          </a:bodyPr>
+          <a:lstStyle/>
+          <a:p>
+            <a:pPr algn="l">
+              <a:buNone/>
+              <a:defRPr sz="2175" b="1" u="none">
+                <a:solidFill>
+                  <a:srgbClr val="221F20"/>
+                </a:solidFill>
+                <a:latin typeface="Arial"/>
+                <a:ea typeface="Arial"/>
+                <a:cs typeface="Arial"/>
+              </a:defRPr>
+            </a:pPr>
+            <a:r>
+              <a:rPr sz="2175" b="1" u="none">
+                <a:solidFill>
+                  <a:srgbClr val="221F20"/>
+                </a:solidFill>
+                <a:latin typeface="Arial"/>
+                <a:ea typeface="Arial"/>
+                <a:cs typeface="Arial"/>
+              </a:rPr>
               <a:t>Part 2: Terraform without cloud access</a:t>
             </a:r>
           </a:p>
@@ -47927,6 +48435,13 @@
             <a:prstDash val="solid"/>
           </a:ln>
         </p:spPr>
+        <p:txBody>
+          <a:bodyPr/>
+          <a:lstStyle/>
+          <a:p>
+            <a:endParaRPr lang="en-US"/>
+          </a:p>
+        </p:txBody>
       </p:sp>
       <p:sp>
         <p:nvSpPr>
@@ -48318,6 +48833,13 @@
             <a:prstDash val="solid"/>
           </a:ln>
         </p:spPr>
+        <p:txBody>
+          <a:bodyPr/>
+          <a:lstStyle/>
+          <a:p>
+            <a:endParaRPr lang="en-US"/>
+          </a:p>
+        </p:txBody>
       </p:sp>
       <p:sp>
         <p:nvSpPr>
